--- a/Final/Figures/wavepacket_l=1.pptx
+++ b/Final/Figures/wavepacket_l=1.pptx
@@ -254,7 +254,7 @@
           <a:p>
             <a:fld id="{B4A272A4-1B6B-4C0A-B74D-70EF2D8C7D55}" type="datetimeFigureOut">
               <a:rPr lang="zh-TW" altLang="en-US" smtClean="0"/>
-              <a:t>2026/5/26</a:t>
+              <a:t>2026/5/27</a:t>
             </a:fld>
             <a:endParaRPr lang="zh-TW" altLang="en-US"/>
           </a:p>
@@ -424,7 +424,7 @@
           <a:p>
             <a:fld id="{B4A272A4-1B6B-4C0A-B74D-70EF2D8C7D55}" type="datetimeFigureOut">
               <a:rPr lang="zh-TW" altLang="en-US" smtClean="0"/>
-              <a:t>2026/5/26</a:t>
+              <a:t>2026/5/27</a:t>
             </a:fld>
             <a:endParaRPr lang="zh-TW" altLang="en-US"/>
           </a:p>
@@ -604,7 +604,7 @@
           <a:p>
             <a:fld id="{B4A272A4-1B6B-4C0A-B74D-70EF2D8C7D55}" type="datetimeFigureOut">
               <a:rPr lang="zh-TW" altLang="en-US" smtClean="0"/>
-              <a:t>2026/5/26</a:t>
+              <a:t>2026/5/27</a:t>
             </a:fld>
             <a:endParaRPr lang="zh-TW" altLang="en-US"/>
           </a:p>
@@ -774,7 +774,7 @@
           <a:p>
             <a:fld id="{B4A272A4-1B6B-4C0A-B74D-70EF2D8C7D55}" type="datetimeFigureOut">
               <a:rPr lang="zh-TW" altLang="en-US" smtClean="0"/>
-              <a:t>2026/5/26</a:t>
+              <a:t>2026/5/27</a:t>
             </a:fld>
             <a:endParaRPr lang="zh-TW" altLang="en-US"/>
           </a:p>
@@ -1018,7 +1018,7 @@
           <a:p>
             <a:fld id="{B4A272A4-1B6B-4C0A-B74D-70EF2D8C7D55}" type="datetimeFigureOut">
               <a:rPr lang="zh-TW" altLang="en-US" smtClean="0"/>
-              <a:t>2026/5/26</a:t>
+              <a:t>2026/5/27</a:t>
             </a:fld>
             <a:endParaRPr lang="zh-TW" altLang="en-US"/>
           </a:p>
@@ -1250,7 +1250,7 @@
           <a:p>
             <a:fld id="{B4A272A4-1B6B-4C0A-B74D-70EF2D8C7D55}" type="datetimeFigureOut">
               <a:rPr lang="zh-TW" altLang="en-US" smtClean="0"/>
-              <a:t>2026/5/26</a:t>
+              <a:t>2026/5/27</a:t>
             </a:fld>
             <a:endParaRPr lang="zh-TW" altLang="en-US"/>
           </a:p>
@@ -1617,7 +1617,7 @@
           <a:p>
             <a:fld id="{B4A272A4-1B6B-4C0A-B74D-70EF2D8C7D55}" type="datetimeFigureOut">
               <a:rPr lang="zh-TW" altLang="en-US" smtClean="0"/>
-              <a:t>2026/5/26</a:t>
+              <a:t>2026/5/27</a:t>
             </a:fld>
             <a:endParaRPr lang="zh-TW" altLang="en-US"/>
           </a:p>
@@ -1735,7 +1735,7 @@
           <a:p>
             <a:fld id="{B4A272A4-1B6B-4C0A-B74D-70EF2D8C7D55}" type="datetimeFigureOut">
               <a:rPr lang="zh-TW" altLang="en-US" smtClean="0"/>
-              <a:t>2026/5/26</a:t>
+              <a:t>2026/5/27</a:t>
             </a:fld>
             <a:endParaRPr lang="zh-TW" altLang="en-US"/>
           </a:p>
@@ -1830,7 +1830,7 @@
           <a:p>
             <a:fld id="{B4A272A4-1B6B-4C0A-B74D-70EF2D8C7D55}" type="datetimeFigureOut">
               <a:rPr lang="zh-TW" altLang="en-US" smtClean="0"/>
-              <a:t>2026/5/26</a:t>
+              <a:t>2026/5/27</a:t>
             </a:fld>
             <a:endParaRPr lang="zh-TW" altLang="en-US"/>
           </a:p>
@@ -2107,7 +2107,7 @@
           <a:p>
             <a:fld id="{B4A272A4-1B6B-4C0A-B74D-70EF2D8C7D55}" type="datetimeFigureOut">
               <a:rPr lang="zh-TW" altLang="en-US" smtClean="0"/>
-              <a:t>2026/5/26</a:t>
+              <a:t>2026/5/27</a:t>
             </a:fld>
             <a:endParaRPr lang="zh-TW" altLang="en-US"/>
           </a:p>
@@ -2364,7 +2364,7 @@
           <a:p>
             <a:fld id="{B4A272A4-1B6B-4C0A-B74D-70EF2D8C7D55}" type="datetimeFigureOut">
               <a:rPr lang="zh-TW" altLang="en-US" smtClean="0"/>
-              <a:t>2026/5/26</a:t>
+              <a:t>2026/5/27</a:t>
             </a:fld>
             <a:endParaRPr lang="zh-TW" altLang="en-US"/>
           </a:p>
@@ -2577,7 +2577,7 @@
           <a:p>
             <a:fld id="{B4A272A4-1B6B-4C0A-B74D-70EF2D8C7D55}" type="datetimeFigureOut">
               <a:rPr lang="zh-TW" altLang="en-US" smtClean="0"/>
-              <a:t>2026/5/26</a:t>
+              <a:t>2026/5/27</a:t>
             </a:fld>
             <a:endParaRPr lang="zh-TW" altLang="en-US"/>
           </a:p>
@@ -6218,10 +6218,10 @@
       </p:sp>
       <p:sp>
         <p:nvSpPr>
-          <p:cNvPr id="62" name="矩形: 圓角 61">
+          <p:cNvPr id="86" name="矩形: 圓角 85">
             <a:extLst>
               <a:ext uri="{FF2B5EF4-FFF2-40B4-BE49-F238E27FC236}">
-                <a16:creationId xmlns:a16="http://schemas.microsoft.com/office/drawing/2014/main" id="{60966188-E876-42D2-A6B4-23BE2EE5DECF}"/>
+                <a16:creationId xmlns:a16="http://schemas.microsoft.com/office/drawing/2014/main" id="{5DC4C0D8-3763-48F5-B884-044DC405D1D3}"/>
               </a:ext>
             </a:extLst>
           </p:cNvPr>
@@ -6230,8 +6230,428 @@
         </p:nvSpPr>
         <p:spPr>
           <a:xfrm>
-            <a:off x="842076" y="1782008"/>
-            <a:ext cx="3932177" cy="3340786"/>
+            <a:off x="4958510" y="1233646"/>
+            <a:ext cx="4950000" cy="4028171"/>
+          </a:xfrm>
+          <a:prstGeom prst="roundRect">
+            <a:avLst>
+              <a:gd name="adj" fmla="val 2129"/>
+            </a:avLst>
+          </a:prstGeom>
+          <a:gradFill flip="none" rotWithShape="1">
+            <a:gsLst>
+              <a:gs pos="0">
+                <a:schemeClr val="bg1">
+                  <a:lumMod val="95000"/>
+                </a:schemeClr>
+              </a:gs>
+              <a:gs pos="100000">
+                <a:schemeClr val="bg1">
+                  <a:lumMod val="85000"/>
+                </a:schemeClr>
+              </a:gs>
+            </a:gsLst>
+            <a:lin ang="5400000" scaled="1"/>
+            <a:tileRect/>
+          </a:gradFill>
+        </p:spPr>
+        <p:style>
+          <a:lnRef idx="1">
+            <a:schemeClr val="accent3"/>
+          </a:lnRef>
+          <a:fillRef idx="2">
+            <a:schemeClr val="accent3"/>
+          </a:fillRef>
+          <a:effectRef idx="1">
+            <a:schemeClr val="accent3"/>
+          </a:effectRef>
+          <a:fontRef idx="minor">
+            <a:schemeClr val="dk1"/>
+          </a:fontRef>
+        </p:style>
+        <p:txBody>
+          <a:bodyPr rot="0" spcFirstLastPara="0" vertOverflow="overflow" horzOverflow="overflow" vert="horz" wrap="square" lIns="37158" tIns="18579" rIns="37158" bIns="18579" numCol="1" spcCol="0" rtlCol="0" fromWordArt="0" anchor="ctr" anchorCtr="0" forceAA="0" compatLnSpc="1">
+            <a:prstTxWarp prst="textNoShape">
+              <a:avLst/>
+            </a:prstTxWarp>
+            <a:noAutofit/>
+          </a:bodyPr>
+          <a:lstStyle/>
+          <a:p>
+            <a:pPr algn="ctr"/>
+            <a:endParaRPr lang="zh-TW" altLang="en-US" sz="2000" dirty="0">
+              <a:latin typeface="Times New Roman" panose="02020603050405020304" pitchFamily="18" charset="0"/>
+              <a:cs typeface="Times New Roman" panose="02020603050405020304" pitchFamily="18" charset="0"/>
+            </a:endParaRPr>
+          </a:p>
+        </p:txBody>
+      </p:sp>
+      <p:sp>
+        <p:nvSpPr>
+          <p:cNvPr id="107" name="矩形: 圓角 106">
+            <a:extLst>
+              <a:ext uri="{FF2B5EF4-FFF2-40B4-BE49-F238E27FC236}">
+                <a16:creationId xmlns:a16="http://schemas.microsoft.com/office/drawing/2014/main" id="{7DA27A08-93FB-482D-9BD3-3230D7EA929D}"/>
+              </a:ext>
+            </a:extLst>
+          </p:cNvPr>
+          <p:cNvSpPr/>
+          <p:nvPr/>
+        </p:nvSpPr>
+        <p:spPr>
+          <a:xfrm>
+            <a:off x="-7163" y="5873376"/>
+            <a:ext cx="4950000" cy="4028171"/>
+          </a:xfrm>
+          <a:prstGeom prst="roundRect">
+            <a:avLst>
+              <a:gd name="adj" fmla="val 2129"/>
+            </a:avLst>
+          </a:prstGeom>
+          <a:gradFill flip="none" rotWithShape="1">
+            <a:gsLst>
+              <a:gs pos="0">
+                <a:schemeClr val="bg1">
+                  <a:lumMod val="95000"/>
+                </a:schemeClr>
+              </a:gs>
+              <a:gs pos="100000">
+                <a:schemeClr val="bg1">
+                  <a:lumMod val="85000"/>
+                </a:schemeClr>
+              </a:gs>
+            </a:gsLst>
+            <a:lin ang="5400000" scaled="1"/>
+            <a:tileRect/>
+          </a:gradFill>
+        </p:spPr>
+        <p:style>
+          <a:lnRef idx="1">
+            <a:schemeClr val="accent3"/>
+          </a:lnRef>
+          <a:fillRef idx="2">
+            <a:schemeClr val="accent3"/>
+          </a:fillRef>
+          <a:effectRef idx="1">
+            <a:schemeClr val="accent3"/>
+          </a:effectRef>
+          <a:fontRef idx="minor">
+            <a:schemeClr val="dk1"/>
+          </a:fontRef>
+        </p:style>
+        <p:txBody>
+          <a:bodyPr rot="0" spcFirstLastPara="0" vertOverflow="overflow" horzOverflow="overflow" vert="horz" wrap="square" lIns="37158" tIns="18579" rIns="37158" bIns="18579" numCol="1" spcCol="0" rtlCol="0" fromWordArt="0" anchor="ctr" anchorCtr="0" forceAA="0" compatLnSpc="1">
+            <a:prstTxWarp prst="textNoShape">
+              <a:avLst/>
+            </a:prstTxWarp>
+            <a:noAutofit/>
+          </a:bodyPr>
+          <a:lstStyle/>
+          <a:p>
+            <a:pPr algn="ctr"/>
+            <a:endParaRPr lang="zh-TW" altLang="en-US" sz="2000" dirty="0">
+              <a:latin typeface="Times New Roman" panose="02020603050405020304" pitchFamily="18" charset="0"/>
+              <a:cs typeface="Times New Roman" panose="02020603050405020304" pitchFamily="18" charset="0"/>
+            </a:endParaRPr>
+          </a:p>
+        </p:txBody>
+      </p:sp>
+      <p:sp>
+        <p:nvSpPr>
+          <p:cNvPr id="127" name="矩形: 圓角 126">
+            <a:extLst>
+              <a:ext uri="{FF2B5EF4-FFF2-40B4-BE49-F238E27FC236}">
+                <a16:creationId xmlns:a16="http://schemas.microsoft.com/office/drawing/2014/main" id="{D72C397B-56F1-4A0B-AB83-AB14833275AE}"/>
+              </a:ext>
+            </a:extLst>
+          </p:cNvPr>
+          <p:cNvSpPr/>
+          <p:nvPr/>
+        </p:nvSpPr>
+        <p:spPr>
+          <a:xfrm>
+            <a:off x="4951347" y="5870711"/>
+            <a:ext cx="4950000" cy="4028171"/>
+          </a:xfrm>
+          <a:prstGeom prst="roundRect">
+            <a:avLst>
+              <a:gd name="adj" fmla="val 2129"/>
+            </a:avLst>
+          </a:prstGeom>
+          <a:gradFill flip="none" rotWithShape="1">
+            <a:gsLst>
+              <a:gs pos="0">
+                <a:schemeClr val="bg1">
+                  <a:lumMod val="95000"/>
+                </a:schemeClr>
+              </a:gs>
+              <a:gs pos="100000">
+                <a:schemeClr val="bg1">
+                  <a:lumMod val="85000"/>
+                </a:schemeClr>
+              </a:gs>
+            </a:gsLst>
+            <a:lin ang="5400000" scaled="1"/>
+            <a:tileRect/>
+          </a:gradFill>
+        </p:spPr>
+        <p:style>
+          <a:lnRef idx="1">
+            <a:schemeClr val="accent3"/>
+          </a:lnRef>
+          <a:fillRef idx="2">
+            <a:schemeClr val="accent3"/>
+          </a:fillRef>
+          <a:effectRef idx="1">
+            <a:schemeClr val="accent3"/>
+          </a:effectRef>
+          <a:fontRef idx="minor">
+            <a:schemeClr val="dk1"/>
+          </a:fontRef>
+        </p:style>
+        <p:txBody>
+          <a:bodyPr rot="0" spcFirstLastPara="0" vertOverflow="overflow" horzOverflow="overflow" vert="horz" wrap="square" lIns="37158" tIns="18579" rIns="37158" bIns="18579" numCol="1" spcCol="0" rtlCol="0" fromWordArt="0" anchor="ctr" anchorCtr="0" forceAA="0" compatLnSpc="1">
+            <a:prstTxWarp prst="textNoShape">
+              <a:avLst/>
+            </a:prstTxWarp>
+            <a:noAutofit/>
+          </a:bodyPr>
+          <a:lstStyle/>
+          <a:p>
+            <a:pPr algn="ctr"/>
+            <a:endParaRPr lang="zh-TW" altLang="en-US" sz="2000" dirty="0">
+              <a:latin typeface="Times New Roman" panose="02020603050405020304" pitchFamily="18" charset="0"/>
+              <a:cs typeface="Times New Roman" panose="02020603050405020304" pitchFamily="18" charset="0"/>
+            </a:endParaRPr>
+          </a:p>
+        </p:txBody>
+      </p:sp>
+      <p:sp>
+        <p:nvSpPr>
+          <p:cNvPr id="74" name="矩形: 圓角 73">
+            <a:extLst>
+              <a:ext uri="{FF2B5EF4-FFF2-40B4-BE49-F238E27FC236}">
+                <a16:creationId xmlns:a16="http://schemas.microsoft.com/office/drawing/2014/main" id="{0A46192C-FDD2-4F52-ADB1-76053AEE552D}"/>
+              </a:ext>
+            </a:extLst>
+          </p:cNvPr>
+          <p:cNvSpPr/>
+          <p:nvPr/>
+        </p:nvSpPr>
+        <p:spPr>
+          <a:xfrm>
+            <a:off x="892876" y="1882264"/>
+            <a:ext cx="3932177" cy="3240529"/>
+          </a:xfrm>
+          <a:prstGeom prst="roundRect">
+            <a:avLst>
+              <a:gd name="adj" fmla="val 4125"/>
+            </a:avLst>
+          </a:prstGeom>
+          <a:gradFill flip="none" rotWithShape="1">
+            <a:gsLst>
+              <a:gs pos="100000">
+                <a:schemeClr val="bg1">
+                  <a:lumMod val="95000"/>
+                </a:schemeClr>
+              </a:gs>
+              <a:gs pos="0">
+                <a:schemeClr val="bg1">
+                  <a:lumMod val="85000"/>
+                </a:schemeClr>
+              </a:gs>
+            </a:gsLst>
+            <a:lin ang="5400000" scaled="1"/>
+            <a:tileRect/>
+          </a:gradFill>
+        </p:spPr>
+        <p:style>
+          <a:lnRef idx="1">
+            <a:schemeClr val="accent3"/>
+          </a:lnRef>
+          <a:fillRef idx="2">
+            <a:schemeClr val="accent3"/>
+          </a:fillRef>
+          <a:effectRef idx="1">
+            <a:schemeClr val="accent3"/>
+          </a:effectRef>
+          <a:fontRef idx="minor">
+            <a:schemeClr val="dk1"/>
+          </a:fontRef>
+        </p:style>
+        <p:txBody>
+          <a:bodyPr rot="0" spcFirstLastPara="0" vertOverflow="overflow" horzOverflow="overflow" vert="horz" wrap="square" lIns="37158" tIns="18579" rIns="37158" bIns="18579" numCol="1" spcCol="0" rtlCol="0" fromWordArt="0" anchor="ctr" anchorCtr="0" forceAA="0" compatLnSpc="1">
+            <a:prstTxWarp prst="textNoShape">
+              <a:avLst/>
+            </a:prstTxWarp>
+            <a:noAutofit/>
+          </a:bodyPr>
+          <a:lstStyle/>
+          <a:p>
+            <a:pPr algn="ctr"/>
+            <a:endParaRPr lang="zh-TW" altLang="en-US" sz="2000" dirty="0">
+              <a:latin typeface="Times New Roman" panose="02020603050405020304" pitchFamily="18" charset="0"/>
+              <a:cs typeface="Times New Roman" panose="02020603050405020304" pitchFamily="18" charset="0"/>
+            </a:endParaRPr>
+          </a:p>
+        </p:txBody>
+      </p:sp>
+      <p:sp>
+        <p:nvSpPr>
+          <p:cNvPr id="76" name="矩形: 圓角 75">
+            <a:extLst>
+              <a:ext uri="{FF2B5EF4-FFF2-40B4-BE49-F238E27FC236}">
+                <a16:creationId xmlns:a16="http://schemas.microsoft.com/office/drawing/2014/main" id="{98BF37B8-177B-4F18-9ACB-35D7E8F4AF8C}"/>
+              </a:ext>
+            </a:extLst>
+          </p:cNvPr>
+          <p:cNvSpPr/>
+          <p:nvPr/>
+        </p:nvSpPr>
+        <p:spPr>
+          <a:xfrm>
+            <a:off x="5851386" y="1879599"/>
+            <a:ext cx="3932177" cy="3240529"/>
+          </a:xfrm>
+          <a:prstGeom prst="roundRect">
+            <a:avLst>
+              <a:gd name="adj" fmla="val 4125"/>
+            </a:avLst>
+          </a:prstGeom>
+          <a:gradFill flip="none" rotWithShape="1">
+            <a:gsLst>
+              <a:gs pos="100000">
+                <a:schemeClr val="bg1">
+                  <a:lumMod val="95000"/>
+                </a:schemeClr>
+              </a:gs>
+              <a:gs pos="0">
+                <a:schemeClr val="bg1">
+                  <a:lumMod val="85000"/>
+                </a:schemeClr>
+              </a:gs>
+            </a:gsLst>
+            <a:lin ang="5400000" scaled="1"/>
+            <a:tileRect/>
+          </a:gradFill>
+        </p:spPr>
+        <p:style>
+          <a:lnRef idx="1">
+            <a:schemeClr val="accent3"/>
+          </a:lnRef>
+          <a:fillRef idx="2">
+            <a:schemeClr val="accent3"/>
+          </a:fillRef>
+          <a:effectRef idx="1">
+            <a:schemeClr val="accent3"/>
+          </a:effectRef>
+          <a:fontRef idx="minor">
+            <a:schemeClr val="dk1"/>
+          </a:fontRef>
+        </p:style>
+        <p:txBody>
+          <a:bodyPr rot="0" spcFirstLastPara="0" vertOverflow="overflow" horzOverflow="overflow" vert="horz" wrap="square" lIns="37158" tIns="18579" rIns="37158" bIns="18579" numCol="1" spcCol="0" rtlCol="0" fromWordArt="0" anchor="ctr" anchorCtr="0" forceAA="0" compatLnSpc="1">
+            <a:prstTxWarp prst="textNoShape">
+              <a:avLst/>
+            </a:prstTxWarp>
+            <a:noAutofit/>
+          </a:bodyPr>
+          <a:lstStyle/>
+          <a:p>
+            <a:pPr algn="ctr"/>
+            <a:endParaRPr lang="zh-TW" altLang="en-US" sz="2000" dirty="0">
+              <a:latin typeface="Times New Roman" panose="02020603050405020304" pitchFamily="18" charset="0"/>
+              <a:cs typeface="Times New Roman" panose="02020603050405020304" pitchFamily="18" charset="0"/>
+            </a:endParaRPr>
+          </a:p>
+        </p:txBody>
+      </p:sp>
+      <p:sp>
+        <p:nvSpPr>
+          <p:cNvPr id="83" name="矩形: 圓角 82">
+            <a:extLst>
+              <a:ext uri="{FF2B5EF4-FFF2-40B4-BE49-F238E27FC236}">
+                <a16:creationId xmlns:a16="http://schemas.microsoft.com/office/drawing/2014/main" id="{AC92492F-7AC0-41C6-B79B-E60E87CDF6D5}"/>
+              </a:ext>
+            </a:extLst>
+          </p:cNvPr>
+          <p:cNvSpPr/>
+          <p:nvPr/>
+        </p:nvSpPr>
+        <p:spPr>
+          <a:xfrm>
+            <a:off x="885713" y="6519329"/>
+            <a:ext cx="3932177" cy="3240529"/>
+          </a:xfrm>
+          <a:prstGeom prst="roundRect">
+            <a:avLst>
+              <a:gd name="adj" fmla="val 4125"/>
+            </a:avLst>
+          </a:prstGeom>
+          <a:gradFill flip="none" rotWithShape="1">
+            <a:gsLst>
+              <a:gs pos="100000">
+                <a:schemeClr val="bg1">
+                  <a:lumMod val="95000"/>
+                </a:schemeClr>
+              </a:gs>
+              <a:gs pos="0">
+                <a:schemeClr val="bg1">
+                  <a:lumMod val="85000"/>
+                </a:schemeClr>
+              </a:gs>
+            </a:gsLst>
+            <a:lin ang="5400000" scaled="1"/>
+            <a:tileRect/>
+          </a:gradFill>
+        </p:spPr>
+        <p:style>
+          <a:lnRef idx="1">
+            <a:schemeClr val="accent3"/>
+          </a:lnRef>
+          <a:fillRef idx="2">
+            <a:schemeClr val="accent3"/>
+          </a:fillRef>
+          <a:effectRef idx="1">
+            <a:schemeClr val="accent3"/>
+          </a:effectRef>
+          <a:fontRef idx="minor">
+            <a:schemeClr val="dk1"/>
+          </a:fontRef>
+        </p:style>
+        <p:txBody>
+          <a:bodyPr rot="0" spcFirstLastPara="0" vertOverflow="overflow" horzOverflow="overflow" vert="horz" wrap="square" lIns="37158" tIns="18579" rIns="37158" bIns="18579" numCol="1" spcCol="0" rtlCol="0" fromWordArt="0" anchor="ctr" anchorCtr="0" forceAA="0" compatLnSpc="1">
+            <a:prstTxWarp prst="textNoShape">
+              <a:avLst/>
+            </a:prstTxWarp>
+            <a:noAutofit/>
+          </a:bodyPr>
+          <a:lstStyle/>
+          <a:p>
+            <a:pPr algn="ctr"/>
+            <a:endParaRPr lang="zh-TW" altLang="en-US" sz="2000" dirty="0">
+              <a:latin typeface="Times New Roman" panose="02020603050405020304" pitchFamily="18" charset="0"/>
+              <a:cs typeface="Times New Roman" panose="02020603050405020304" pitchFamily="18" charset="0"/>
+            </a:endParaRPr>
+          </a:p>
+        </p:txBody>
+      </p:sp>
+      <p:sp>
+        <p:nvSpPr>
+          <p:cNvPr id="84" name="矩形: 圓角 83">
+            <a:extLst>
+              <a:ext uri="{FF2B5EF4-FFF2-40B4-BE49-F238E27FC236}">
+                <a16:creationId xmlns:a16="http://schemas.microsoft.com/office/drawing/2014/main" id="{BD88F1A2-95EF-4E0B-BD7F-343E524212DE}"/>
+              </a:ext>
+            </a:extLst>
+          </p:cNvPr>
+          <p:cNvSpPr/>
+          <p:nvPr/>
+        </p:nvSpPr>
+        <p:spPr>
+          <a:xfrm>
+            <a:off x="5844223" y="6516664"/>
+            <a:ext cx="3932177" cy="3240529"/>
           </a:xfrm>
           <a:prstGeom prst="roundRect">
             <a:avLst>
@@ -6421,214 +6841,6 @@
           </a:prstGeom>
         </p:spPr>
       </p:pic>
-      <mc:AlternateContent xmlns:mc="http://schemas.openxmlformats.org/markup-compatibility/2006">
-        <mc:Choice xmlns:a14="http://schemas.microsoft.com/office/drawing/2010/main" Requires="a14">
-          <p:sp>
-            <p:nvSpPr>
-              <p:cNvPr id="65" name="矩形 64">
-                <a:extLst>
-                  <a:ext uri="{FF2B5EF4-FFF2-40B4-BE49-F238E27FC236}">
-                    <a16:creationId xmlns:a16="http://schemas.microsoft.com/office/drawing/2014/main" id="{178D7801-2716-418F-8120-C1D43243C2D9}"/>
-                  </a:ext>
-                </a:extLst>
-              </p:cNvPr>
-              <p:cNvSpPr/>
-              <p:nvPr/>
-            </p:nvSpPr>
-            <p:spPr>
-              <a:xfrm>
-                <a:off x="1223301" y="1258082"/>
-                <a:ext cx="1198533" cy="555152"/>
-              </a:xfrm>
-              <a:prstGeom prst="rect">
-                <a:avLst/>
-              </a:prstGeom>
-            </p:spPr>
-            <p:txBody>
-              <a:bodyPr wrap="none">
-                <a:spAutoFit/>
-              </a:bodyPr>
-              <a:lstStyle/>
-              <a:p>
-                <a:pPr algn="r"/>
-                <a14:m>
-                  <m:oMathPara xmlns:m="http://schemas.openxmlformats.org/officeDocument/2006/math">
-                    <m:oMathParaPr>
-                      <m:jc m:val="centerGroup"/>
-                    </m:oMathParaPr>
-                    <m:oMath xmlns:m="http://schemas.openxmlformats.org/officeDocument/2006/math">
-                      <m:sSup>
-                        <m:sSupPr>
-                          <m:ctrlPr>
-                            <a:rPr lang="en-US" altLang="zh-TW" sz="2000" i="1" smtClean="0">
-                              <a:latin typeface="Cambria Math" panose="02040503050406030204" pitchFamily="18" charset="0"/>
-                            </a:rPr>
-                          </m:ctrlPr>
-                        </m:sSupPr>
-                        <m:e>
-                          <m:d>
-                            <m:dPr>
-                              <m:begChr m:val="|"/>
-                              <m:endChr m:val="|"/>
-                              <m:ctrlPr>
-                                <a:rPr lang="en-US" altLang="zh-TW" sz="2000" i="1">
-                                  <a:latin typeface="Cambria Math" panose="02040503050406030204" pitchFamily="18" charset="0"/>
-                                </a:rPr>
-                              </m:ctrlPr>
-                            </m:dPr>
-                            <m:e>
-                              <m:sSubSup>
-                                <m:sSubSupPr>
-                                  <m:ctrlPr>
-                                    <a:rPr lang="en-US" altLang="zh-TW" sz="2000" i="1">
-                                      <a:latin typeface="Cambria Math" panose="02040503050406030204" pitchFamily="18" charset="0"/>
-                                    </a:rPr>
-                                  </m:ctrlPr>
-                                </m:sSubSupPr>
-                                <m:e>
-                                  <m:acc>
-                                    <m:accPr>
-                                      <m:chr m:val="̃"/>
-                                      <m:ctrlPr>
-                                        <a:rPr lang="en-US" altLang="zh-TW" sz="2000" i="1">
-                                          <a:latin typeface="Cambria Math" panose="02040503050406030204" pitchFamily="18" charset="0"/>
-                                        </a:rPr>
-                                      </m:ctrlPr>
-                                    </m:accPr>
-                                    <m:e>
-                                      <m:r>
-                                        <a:rPr lang="en-US" altLang="zh-TW" sz="2000" i="1">
-                                          <a:latin typeface="Cambria Math" panose="02040503050406030204" pitchFamily="18" charset="0"/>
-                                        </a:rPr>
-                                        <m:t>𝑀</m:t>
-                                      </m:r>
-                                    </m:e>
-                                  </m:acc>
-                                </m:e>
-                                <m:sub>
-                                  <m:r>
-                                    <a:rPr lang="en-US" altLang="zh-TW" sz="2000" i="1">
-                                      <a:latin typeface="Cambria Math" panose="02040503050406030204" pitchFamily="18" charset="0"/>
-                                    </a:rPr>
-                                    <m:t>𝑆</m:t>
-                                  </m:r>
-                                  <m:r>
-                                    <a:rPr lang="en-US" altLang="zh-TW" sz="2000" i="1">
-                                      <a:latin typeface="Cambria Math" panose="02040503050406030204" pitchFamily="18" charset="0"/>
-                                    </a:rPr>
-                                    <m:t>,</m:t>
-                                  </m:r>
-                                  <m:r>
-                                    <a:rPr lang="en-US" altLang="zh-TW" sz="2000" b="1" i="1">
-                                      <a:latin typeface="Cambria Math" panose="02040503050406030204" pitchFamily="18" charset="0"/>
-                                    </a:rPr>
-                                    <m:t>𝑸</m:t>
-                                  </m:r>
-                                </m:sub>
-                                <m:sup>
-                                  <m:acc>
-                                    <m:accPr>
-                                      <m:chr m:val="̂"/>
-                                      <m:ctrlPr>
-                                        <a:rPr lang="en-US" altLang="zh-TW" sz="2000" b="1" i="1">
-                                          <a:latin typeface="Cambria Math" panose="02040503050406030204" pitchFamily="18" charset="0"/>
-                                        </a:rPr>
-                                      </m:ctrlPr>
-                                    </m:accPr>
-                                    <m:e>
-                                      <m:r>
-                                        <a:rPr lang="zh-TW" altLang="en-US" sz="2000" b="1" i="1">
-                                          <a:latin typeface="Cambria Math" panose="02040503050406030204" pitchFamily="18" charset="0"/>
-                                        </a:rPr>
-                                        <m:t>𝜺</m:t>
-                                      </m:r>
-                                    </m:e>
-                                  </m:acc>
-                                  <m:r>
-                                    <a:rPr lang="en-US" altLang="zh-TW" sz="2000" i="1">
-                                      <a:latin typeface="Cambria Math" panose="02040503050406030204" pitchFamily="18" charset="0"/>
-                                    </a:rPr>
-                                    <m:t>,</m:t>
-                                  </m:r>
-                                  <m:r>
-                                    <a:rPr lang="en-US" altLang="zh-TW" sz="2000" b="0" i="1" smtClean="0">
-                                      <a:latin typeface="Cambria Math" panose="02040503050406030204" pitchFamily="18" charset="0"/>
-                                    </a:rPr>
-                                    <m:t>±1</m:t>
-                                  </m:r>
-                                </m:sup>
-                              </m:sSubSup>
-                            </m:e>
-                          </m:d>
-                        </m:e>
-                        <m:sup>
-                          <m:r>
-                            <a:rPr lang="en-US" altLang="zh-TW" sz="2000" i="1">
-                              <a:latin typeface="Cambria Math" panose="02040503050406030204" pitchFamily="18" charset="0"/>
-                            </a:rPr>
-                            <m:t>2</m:t>
-                          </m:r>
-                        </m:sup>
-                      </m:sSup>
-                      <m:r>
-                        <a:rPr lang="en-US" altLang="zh-TW" sz="2000" i="1">
-                          <a:latin typeface="Cambria Math" panose="02040503050406030204" pitchFamily="18" charset="0"/>
-                        </a:rPr>
-                        <m:t> </m:t>
-                      </m:r>
-                    </m:oMath>
-                  </m:oMathPara>
-                </a14:m>
-                <a:endParaRPr lang="zh-TW" altLang="en-US" sz="2000" dirty="0"/>
-              </a:p>
-            </p:txBody>
-          </p:sp>
-        </mc:Choice>
-        <mc:Fallback>
-          <p:sp>
-            <p:nvSpPr>
-              <p:cNvPr id="65" name="矩形 64">
-                <a:extLst>
-                  <a:ext uri="{FF2B5EF4-FFF2-40B4-BE49-F238E27FC236}">
-                    <a16:creationId xmlns:a16="http://schemas.microsoft.com/office/drawing/2014/main" id="{178D7801-2716-418F-8120-C1D43243C2D9}"/>
-                  </a:ext>
-                </a:extLst>
-              </p:cNvPr>
-              <p:cNvSpPr>
-                <a:spLocks noRot="1" noChangeAspect="1" noMove="1" noResize="1" noEditPoints="1" noAdjustHandles="1" noChangeArrowheads="1" noChangeShapeType="1" noTextEdit="1"/>
-              </p:cNvSpPr>
-              <p:nvPr/>
-            </p:nvSpPr>
-            <p:spPr>
-              <a:xfrm>
-                <a:off x="1223301" y="1258082"/>
-                <a:ext cx="1198533" cy="555152"/>
-              </a:xfrm>
-              <a:prstGeom prst="rect">
-                <a:avLst/>
-              </a:prstGeom>
-              <a:blipFill>
-                <a:blip r:embed="rId4"/>
-                <a:stretch>
-                  <a:fillRect/>
-                </a:stretch>
-              </a:blipFill>
-            </p:spPr>
-            <p:txBody>
-              <a:bodyPr/>
-              <a:lstStyle/>
-              <a:p>
-                <a:r>
-                  <a:rPr lang="zh-TW" altLang="en-US">
-                    <a:noFill/>
-                  </a:rPr>
-                  <a:t> </a:t>
-                </a:r>
-              </a:p>
-            </p:txBody>
-          </p:sp>
-        </mc:Fallback>
-      </mc:AlternateContent>
       <mc:AlternateContent xmlns:mc="http://schemas.openxmlformats.org/markup-compatibility/2006" xmlns:a14="http://schemas.microsoft.com/office/drawing/2010/main">
         <mc:Choice Requires="a14">
           <p:sp>
@@ -7003,241 +7215,6 @@
                 <a:blip r:embed="rId7"/>
                 <a:stretch>
                   <a:fillRect b="-7576"/>
-                </a:stretch>
-              </a:blipFill>
-            </p:spPr>
-            <p:txBody>
-              <a:bodyPr/>
-              <a:lstStyle/>
-              <a:p>
-                <a:r>
-                  <a:rPr lang="zh-TW" altLang="en-US">
-                    <a:noFill/>
-                  </a:rPr>
-                  <a:t> </a:t>
-                </a:r>
-              </a:p>
-            </p:txBody>
-          </p:sp>
-        </mc:Fallback>
-      </mc:AlternateContent>
-      <mc:AlternateContent xmlns:mc="http://schemas.openxmlformats.org/markup-compatibility/2006" xmlns:a14="http://schemas.microsoft.com/office/drawing/2010/main">
-        <mc:Choice Requires="a14">
-          <p:sp>
-            <p:nvSpPr>
-              <p:cNvPr id="71" name="矩形 70">
-                <a:extLst>
-                  <a:ext uri="{FF2B5EF4-FFF2-40B4-BE49-F238E27FC236}">
-                    <a16:creationId xmlns:a16="http://schemas.microsoft.com/office/drawing/2014/main" id="{3CDA9FBC-47B5-4E7F-8853-D819D057A7DC}"/>
-                  </a:ext>
-                </a:extLst>
-              </p:cNvPr>
-              <p:cNvSpPr/>
-              <p:nvPr/>
-            </p:nvSpPr>
-            <p:spPr>
-              <a:xfrm>
-                <a:off x="2738740" y="1264808"/>
-                <a:ext cx="2287870" cy="528030"/>
-              </a:xfrm>
-              <a:prstGeom prst="rect">
-                <a:avLst/>
-              </a:prstGeom>
-            </p:spPr>
-            <p:txBody>
-              <a:bodyPr wrap="none">
-                <a:spAutoFit/>
-              </a:bodyPr>
-              <a:lstStyle/>
-              <a:p>
-                <a:pPr/>
-                <a14:m>
-                  <m:oMathPara xmlns:m="http://schemas.openxmlformats.org/officeDocument/2006/math">
-                    <m:oMathParaPr>
-                      <m:jc m:val="centerGroup"/>
-                    </m:oMathParaPr>
-                    <m:oMath xmlns:m="http://schemas.openxmlformats.org/officeDocument/2006/math">
-                      <m:sSup>
-                        <m:sSupPr>
-                          <m:ctrlPr>
-                            <a:rPr lang="en-US" altLang="zh-TW" sz="2000" i="1" dirty="0" smtClean="0">
-                              <a:latin typeface="Cambria Math" panose="02040503050406030204" pitchFamily="18" charset="0"/>
-                              <a:ea typeface="Cambria Math" panose="02040503050406030204" pitchFamily="18" charset="0"/>
-                            </a:rPr>
-                          </m:ctrlPr>
-                        </m:sSupPr>
-                        <m:e>
-                          <m:d>
-                            <m:dPr>
-                              <m:begChr m:val="|"/>
-                              <m:endChr m:val="|"/>
-                              <m:ctrlPr>
-                                <a:rPr lang="en-US" altLang="zh-TW" sz="2000" i="1" dirty="0">
-                                  <a:latin typeface="Cambria Math" panose="02040503050406030204" pitchFamily="18" charset="0"/>
-                                  <a:ea typeface="Cambria Math" panose="02040503050406030204" pitchFamily="18" charset="0"/>
-                                </a:rPr>
-                              </m:ctrlPr>
-                            </m:dPr>
-                            <m:e>
-                              <m:sSubSup>
-                                <m:sSubSupPr>
-                                  <m:ctrlPr>
-                                    <a:rPr lang="en-US" altLang="zh-TW" sz="2000" i="1">
-                                      <a:latin typeface="Cambria Math" panose="02040503050406030204" pitchFamily="18" charset="0"/>
-                                    </a:rPr>
-                                  </m:ctrlPr>
-                                </m:sSubSupPr>
-                                <m:e>
-                                  <m:r>
-                                    <a:rPr lang="en-US" altLang="zh-TW" sz="2000" i="1">
-                                      <a:latin typeface="Cambria Math" panose="02040503050406030204" pitchFamily="18" charset="0"/>
-                                    </a:rPr>
-                                    <m:t>𝑓</m:t>
-                                  </m:r>
-                                </m:e>
-                                <m:sub>
-                                  <m:r>
-                                    <a:rPr lang="en-US" altLang="zh-TW" sz="2000" i="1">
-                                      <a:latin typeface="Cambria Math" panose="02040503050406030204" pitchFamily="18" charset="0"/>
-                                    </a:rPr>
-                                    <m:t>𝑆</m:t>
-                                  </m:r>
-                                </m:sub>
-                                <m:sup>
-                                  <m:acc>
-                                    <m:accPr>
-                                      <m:chr m:val="̂"/>
-                                      <m:ctrlPr>
-                                        <a:rPr lang="en-US" altLang="zh-TW" sz="2000" b="1" i="1">
-                                          <a:latin typeface="Cambria Math" panose="02040503050406030204" pitchFamily="18" charset="0"/>
-                                        </a:rPr>
-                                      </m:ctrlPr>
-                                    </m:accPr>
-                                    <m:e>
-                                      <m:r>
-                                        <a:rPr lang="zh-TW" altLang="en-US" sz="2000" b="1" i="1">
-                                          <a:latin typeface="Cambria Math" panose="02040503050406030204" pitchFamily="18" charset="0"/>
-                                        </a:rPr>
-                                        <m:t>𝜺</m:t>
-                                      </m:r>
-                                    </m:e>
-                                  </m:acc>
-                                  <m:r>
-                                    <a:rPr lang="en-US" altLang="zh-TW" sz="2000" i="1">
-                                      <a:latin typeface="Cambria Math" panose="02040503050406030204" pitchFamily="18" charset="0"/>
-                                    </a:rPr>
-                                    <m:t>,</m:t>
-                                  </m:r>
-                                  <m:r>
-                                    <a:rPr lang="en-US" altLang="zh-TW" sz="2000" b="0" i="1" smtClean="0">
-                                      <a:latin typeface="Cambria Math" panose="02040503050406030204" pitchFamily="18" charset="0"/>
-                                    </a:rPr>
-                                    <m:t>±1</m:t>
-                                  </m:r>
-                                </m:sup>
-                              </m:sSubSup>
-                              <m:d>
-                                <m:dPr>
-                                  <m:ctrlPr>
-                                    <a:rPr lang="en-US" altLang="zh-TW" sz="2000" i="1">
-                                      <a:latin typeface="Cambria Math" panose="02040503050406030204" pitchFamily="18" charset="0"/>
-                                    </a:rPr>
-                                  </m:ctrlPr>
-                                </m:dPr>
-                                <m:e>
-                                  <m:sSub>
-                                    <m:sSubPr>
-                                      <m:ctrlPr>
-                                        <a:rPr lang="en-US" altLang="zh-TW" sz="2000" i="1">
-                                          <a:latin typeface="Cambria Math" panose="02040503050406030204" pitchFamily="18" charset="0"/>
-                                        </a:rPr>
-                                      </m:ctrlPr>
-                                    </m:sSubPr>
-                                    <m:e>
-                                      <m:r>
-                                        <a:rPr lang="en-US" altLang="zh-TW" sz="2000" b="1" i="1">
-                                          <a:latin typeface="Cambria Math" panose="02040503050406030204" pitchFamily="18" charset="0"/>
-                                        </a:rPr>
-                                        <m:t>𝑹</m:t>
-                                      </m:r>
-                                    </m:e>
-                                    <m:sub>
-                                      <m:r>
-                                        <a:rPr lang="en-US" altLang="zh-TW" sz="2000" i="1">
-                                          <a:latin typeface="Cambria Math" panose="02040503050406030204" pitchFamily="18" charset="0"/>
-                                        </a:rPr>
-                                        <m:t>𝑐</m:t>
-                                      </m:r>
-                                    </m:sub>
-                                  </m:sSub>
-                                  <m:r>
-                                    <a:rPr lang="en-US" altLang="zh-TW" sz="2000" i="1">
-                                      <a:latin typeface="Cambria Math" panose="02040503050406030204" pitchFamily="18" charset="0"/>
-                                    </a:rPr>
-                                    <m:t>, </m:t>
-                                  </m:r>
-                                  <m:r>
-                                    <a:rPr lang="en-US" altLang="zh-TW" sz="2000" b="1" i="1">
-                                      <a:latin typeface="Cambria Math" panose="02040503050406030204" pitchFamily="18" charset="0"/>
-                                    </a:rPr>
-                                    <m:t>𝒓</m:t>
-                                  </m:r>
-                                  <m:r>
-                                    <a:rPr lang="en-US" altLang="zh-TW" sz="2000" i="1">
-                                      <a:latin typeface="Cambria Math" panose="02040503050406030204" pitchFamily="18" charset="0"/>
-                                    </a:rPr>
-                                    <m:t>=0</m:t>
-                                  </m:r>
-                                </m:e>
-                              </m:d>
-                            </m:e>
-                          </m:d>
-                        </m:e>
-                        <m:sup>
-                          <m:r>
-                            <a:rPr lang="en-US" altLang="zh-TW" sz="2000" i="1" dirty="0">
-                              <a:latin typeface="Cambria Math" panose="02040503050406030204" pitchFamily="18" charset="0"/>
-                              <a:ea typeface="Cambria Math" panose="02040503050406030204" pitchFamily="18" charset="0"/>
-                            </a:rPr>
-                            <m:t>2</m:t>
-                          </m:r>
-                        </m:sup>
-                      </m:sSup>
-                    </m:oMath>
-                  </m:oMathPara>
-                </a14:m>
-                <a:endParaRPr lang="zh-TW" altLang="en-US" sz="2000" dirty="0"/>
-              </a:p>
-            </p:txBody>
-          </p:sp>
-        </mc:Choice>
-        <mc:Fallback xmlns="">
-          <p:sp>
-            <p:nvSpPr>
-              <p:cNvPr id="71" name="矩形 70">
-                <a:extLst>
-                  <a:ext uri="{FF2B5EF4-FFF2-40B4-BE49-F238E27FC236}">
-                    <a16:creationId xmlns:a16="http://schemas.microsoft.com/office/drawing/2014/main" id="{3CDA9FBC-47B5-4E7F-8853-D819D057A7DC}"/>
-                  </a:ext>
-                </a:extLst>
-              </p:cNvPr>
-              <p:cNvSpPr>
-                <a:spLocks noRot="1" noChangeAspect="1" noMove="1" noResize="1" noEditPoints="1" noAdjustHandles="1" noChangeArrowheads="1" noChangeShapeType="1" noTextEdit="1"/>
-              </p:cNvSpPr>
-              <p:nvPr/>
-            </p:nvSpPr>
-            <p:spPr>
-              <a:xfrm>
-                <a:off x="2738740" y="1264808"/>
-                <a:ext cx="2287870" cy="528030"/>
-              </a:xfrm>
-              <a:prstGeom prst="rect">
-                <a:avLst/>
-              </a:prstGeom>
-              <a:blipFill>
-                <a:blip r:embed="rId8"/>
-                <a:stretch>
-                  <a:fillRect/>
                 </a:stretch>
               </a:blipFill>
             </p:spPr>
@@ -7976,589 +7953,6 @@
           </p:sp>
         </mc:Fallback>
       </mc:AlternateContent>
-      <p:sp>
-        <p:nvSpPr>
-          <p:cNvPr id="86" name="矩形: 圓角 85">
-            <a:extLst>
-              <a:ext uri="{FF2B5EF4-FFF2-40B4-BE49-F238E27FC236}">
-                <a16:creationId xmlns:a16="http://schemas.microsoft.com/office/drawing/2014/main" id="{5DC4C0D8-3763-48F5-B884-044DC405D1D3}"/>
-              </a:ext>
-            </a:extLst>
-          </p:cNvPr>
-          <p:cNvSpPr/>
-          <p:nvPr/>
-        </p:nvSpPr>
-        <p:spPr>
-          <a:xfrm>
-            <a:off x="4958510" y="1233646"/>
-            <a:ext cx="4950000" cy="4028171"/>
-          </a:xfrm>
-          <a:prstGeom prst="roundRect">
-            <a:avLst>
-              <a:gd name="adj" fmla="val 2129"/>
-            </a:avLst>
-          </a:prstGeom>
-          <a:gradFill flip="none" rotWithShape="1">
-            <a:gsLst>
-              <a:gs pos="0">
-                <a:schemeClr val="bg1">
-                  <a:lumMod val="95000"/>
-                </a:schemeClr>
-              </a:gs>
-              <a:gs pos="100000">
-                <a:schemeClr val="bg1">
-                  <a:lumMod val="85000"/>
-                </a:schemeClr>
-              </a:gs>
-            </a:gsLst>
-            <a:lin ang="5400000" scaled="1"/>
-            <a:tileRect/>
-          </a:gradFill>
-        </p:spPr>
-        <p:style>
-          <a:lnRef idx="1">
-            <a:schemeClr val="accent3"/>
-          </a:lnRef>
-          <a:fillRef idx="2">
-            <a:schemeClr val="accent3"/>
-          </a:fillRef>
-          <a:effectRef idx="1">
-            <a:schemeClr val="accent3"/>
-          </a:effectRef>
-          <a:fontRef idx="minor">
-            <a:schemeClr val="dk1"/>
-          </a:fontRef>
-        </p:style>
-        <p:txBody>
-          <a:bodyPr rot="0" spcFirstLastPara="0" vertOverflow="overflow" horzOverflow="overflow" vert="horz" wrap="square" lIns="37158" tIns="18579" rIns="37158" bIns="18579" numCol="1" spcCol="0" rtlCol="0" fromWordArt="0" anchor="ctr" anchorCtr="0" forceAA="0" compatLnSpc="1">
-            <a:prstTxWarp prst="textNoShape">
-              <a:avLst/>
-            </a:prstTxWarp>
-            <a:noAutofit/>
-          </a:bodyPr>
-          <a:lstStyle/>
-          <a:p>
-            <a:pPr algn="ctr"/>
-            <a:endParaRPr lang="zh-TW" altLang="en-US" sz="2000" dirty="0">
-              <a:latin typeface="Times New Roman" panose="02020603050405020304" pitchFamily="18" charset="0"/>
-              <a:cs typeface="Times New Roman" panose="02020603050405020304" pitchFamily="18" charset="0"/>
-            </a:endParaRPr>
-          </a:p>
-        </p:txBody>
-      </p:sp>
-      <p:sp>
-        <p:nvSpPr>
-          <p:cNvPr id="87" name="矩形: 圓角 86">
-            <a:extLst>
-              <a:ext uri="{FF2B5EF4-FFF2-40B4-BE49-F238E27FC236}">
-                <a16:creationId xmlns:a16="http://schemas.microsoft.com/office/drawing/2014/main" id="{61EF4C23-BE7A-4C30-ABC5-22678108388D}"/>
-              </a:ext>
-            </a:extLst>
-          </p:cNvPr>
-          <p:cNvSpPr/>
-          <p:nvPr/>
-        </p:nvSpPr>
-        <p:spPr>
-          <a:xfrm>
-            <a:off x="5800586" y="1779343"/>
-            <a:ext cx="3932177" cy="3340786"/>
-          </a:xfrm>
-          <a:prstGeom prst="roundRect">
-            <a:avLst>
-              <a:gd name="adj" fmla="val 4125"/>
-            </a:avLst>
-          </a:prstGeom>
-          <a:gradFill flip="none" rotWithShape="1">
-            <a:gsLst>
-              <a:gs pos="100000">
-                <a:schemeClr val="bg1">
-                  <a:lumMod val="95000"/>
-                </a:schemeClr>
-              </a:gs>
-              <a:gs pos="0">
-                <a:schemeClr val="bg1">
-                  <a:lumMod val="85000"/>
-                </a:schemeClr>
-              </a:gs>
-            </a:gsLst>
-            <a:lin ang="5400000" scaled="1"/>
-            <a:tileRect/>
-          </a:gradFill>
-        </p:spPr>
-        <p:style>
-          <a:lnRef idx="1">
-            <a:schemeClr val="accent3"/>
-          </a:lnRef>
-          <a:fillRef idx="2">
-            <a:schemeClr val="accent3"/>
-          </a:fillRef>
-          <a:effectRef idx="1">
-            <a:schemeClr val="accent3"/>
-          </a:effectRef>
-          <a:fontRef idx="minor">
-            <a:schemeClr val="dk1"/>
-          </a:fontRef>
-        </p:style>
-        <p:txBody>
-          <a:bodyPr rot="0" spcFirstLastPara="0" vertOverflow="overflow" horzOverflow="overflow" vert="horz" wrap="square" lIns="37158" tIns="18579" rIns="37158" bIns="18579" numCol="1" spcCol="0" rtlCol="0" fromWordArt="0" anchor="ctr" anchorCtr="0" forceAA="0" compatLnSpc="1">
-            <a:prstTxWarp prst="textNoShape">
-              <a:avLst/>
-            </a:prstTxWarp>
-            <a:noAutofit/>
-          </a:bodyPr>
-          <a:lstStyle/>
-          <a:p>
-            <a:pPr algn="ctr"/>
-            <a:endParaRPr lang="zh-TW" altLang="en-US" sz="2000" dirty="0">
-              <a:latin typeface="Times New Roman" panose="02020603050405020304" pitchFamily="18" charset="0"/>
-              <a:cs typeface="Times New Roman" panose="02020603050405020304" pitchFamily="18" charset="0"/>
-            </a:endParaRPr>
-          </a:p>
-        </p:txBody>
-      </p:sp>
-      <mc:AlternateContent xmlns:mc="http://schemas.openxmlformats.org/markup-compatibility/2006">
-        <mc:Choice xmlns:a14="http://schemas.microsoft.com/office/drawing/2010/main" Requires="a14">
-          <p:sp>
-            <p:nvSpPr>
-              <p:cNvPr id="90" name="矩形 89">
-                <a:extLst>
-                  <a:ext uri="{FF2B5EF4-FFF2-40B4-BE49-F238E27FC236}">
-                    <a16:creationId xmlns:a16="http://schemas.microsoft.com/office/drawing/2014/main" id="{5BF5F099-3A22-4BFC-A027-FC0142CC1E2B}"/>
-                  </a:ext>
-                </a:extLst>
-              </p:cNvPr>
-              <p:cNvSpPr/>
-              <p:nvPr/>
-            </p:nvSpPr>
-            <p:spPr>
-              <a:xfrm>
-                <a:off x="6181811" y="1255417"/>
-                <a:ext cx="1198533" cy="555152"/>
-              </a:xfrm>
-              <a:prstGeom prst="rect">
-                <a:avLst/>
-              </a:prstGeom>
-            </p:spPr>
-            <p:txBody>
-              <a:bodyPr wrap="none">
-                <a:spAutoFit/>
-              </a:bodyPr>
-              <a:lstStyle/>
-              <a:p>
-                <a:pPr algn="r"/>
-                <a14:m>
-                  <m:oMathPara xmlns:m="http://schemas.openxmlformats.org/officeDocument/2006/math">
-                    <m:oMathParaPr>
-                      <m:jc m:val="centerGroup"/>
-                    </m:oMathParaPr>
-                    <m:oMath xmlns:m="http://schemas.openxmlformats.org/officeDocument/2006/math">
-                      <m:sSup>
-                        <m:sSupPr>
-                          <m:ctrlPr>
-                            <a:rPr lang="en-US" altLang="zh-TW" sz="2000" i="1" smtClean="0">
-                              <a:latin typeface="Cambria Math" panose="02040503050406030204" pitchFamily="18" charset="0"/>
-                            </a:rPr>
-                          </m:ctrlPr>
-                        </m:sSupPr>
-                        <m:e>
-                          <m:d>
-                            <m:dPr>
-                              <m:begChr m:val="|"/>
-                              <m:endChr m:val="|"/>
-                              <m:ctrlPr>
-                                <a:rPr lang="en-US" altLang="zh-TW" sz="2000" i="1">
-                                  <a:latin typeface="Cambria Math" panose="02040503050406030204" pitchFamily="18" charset="0"/>
-                                </a:rPr>
-                              </m:ctrlPr>
-                            </m:dPr>
-                            <m:e>
-                              <m:sSubSup>
-                                <m:sSubSupPr>
-                                  <m:ctrlPr>
-                                    <a:rPr lang="en-US" altLang="zh-TW" sz="2000" i="1">
-                                      <a:latin typeface="Cambria Math" panose="02040503050406030204" pitchFamily="18" charset="0"/>
-                                    </a:rPr>
-                                  </m:ctrlPr>
-                                </m:sSubSupPr>
-                                <m:e>
-                                  <m:acc>
-                                    <m:accPr>
-                                      <m:chr m:val="̃"/>
-                                      <m:ctrlPr>
-                                        <a:rPr lang="en-US" altLang="zh-TW" sz="2000" i="1">
-                                          <a:latin typeface="Cambria Math" panose="02040503050406030204" pitchFamily="18" charset="0"/>
-                                        </a:rPr>
-                                      </m:ctrlPr>
-                                    </m:accPr>
-                                    <m:e>
-                                      <m:r>
-                                        <a:rPr lang="en-US" altLang="zh-TW" sz="2000" i="1">
-                                          <a:latin typeface="Cambria Math" panose="02040503050406030204" pitchFamily="18" charset="0"/>
-                                        </a:rPr>
-                                        <m:t>𝑀</m:t>
-                                      </m:r>
-                                    </m:e>
-                                  </m:acc>
-                                </m:e>
-                                <m:sub>
-                                  <m:r>
-                                    <a:rPr lang="en-US" altLang="zh-TW" sz="2000" i="1">
-                                      <a:latin typeface="Cambria Math" panose="02040503050406030204" pitchFamily="18" charset="0"/>
-                                    </a:rPr>
-                                    <m:t>𝑆</m:t>
-                                  </m:r>
-                                  <m:r>
-                                    <a:rPr lang="en-US" altLang="zh-TW" sz="2000" i="1">
-                                      <a:latin typeface="Cambria Math" panose="02040503050406030204" pitchFamily="18" charset="0"/>
-                                    </a:rPr>
-                                    <m:t>,</m:t>
-                                  </m:r>
-                                  <m:r>
-                                    <a:rPr lang="en-US" altLang="zh-TW" sz="2000" b="1" i="1">
-                                      <a:latin typeface="Cambria Math" panose="02040503050406030204" pitchFamily="18" charset="0"/>
-                                    </a:rPr>
-                                    <m:t>𝑸</m:t>
-                                  </m:r>
-                                </m:sub>
-                                <m:sup>
-                                  <m:acc>
-                                    <m:accPr>
-                                      <m:chr m:val="̂"/>
-                                      <m:ctrlPr>
-                                        <a:rPr lang="en-US" altLang="zh-TW" sz="2000" b="1" i="1">
-                                          <a:latin typeface="Cambria Math" panose="02040503050406030204" pitchFamily="18" charset="0"/>
-                                        </a:rPr>
-                                      </m:ctrlPr>
-                                    </m:accPr>
-                                    <m:e>
-                                      <m:r>
-                                        <a:rPr lang="zh-TW" altLang="en-US" sz="2000" b="1" i="1">
-                                          <a:latin typeface="Cambria Math" panose="02040503050406030204" pitchFamily="18" charset="0"/>
-                                        </a:rPr>
-                                        <m:t>𝜺</m:t>
-                                      </m:r>
-                                    </m:e>
-                                  </m:acc>
-                                  <m:r>
-                                    <a:rPr lang="en-US" altLang="zh-TW" sz="2000" i="1">
-                                      <a:latin typeface="Cambria Math" panose="02040503050406030204" pitchFamily="18" charset="0"/>
-                                    </a:rPr>
-                                    <m:t>,</m:t>
-                                  </m:r>
-                                  <m:r>
-                                    <a:rPr lang="en-US" altLang="zh-TW" sz="2000" b="0" i="1" smtClean="0">
-                                      <a:latin typeface="Cambria Math" panose="02040503050406030204" pitchFamily="18" charset="0"/>
-                                    </a:rPr>
-                                    <m:t>±1</m:t>
-                                  </m:r>
-                                </m:sup>
-                              </m:sSubSup>
-                            </m:e>
-                          </m:d>
-                        </m:e>
-                        <m:sup>
-                          <m:r>
-                            <a:rPr lang="en-US" altLang="zh-TW" sz="2000" i="1">
-                              <a:latin typeface="Cambria Math" panose="02040503050406030204" pitchFamily="18" charset="0"/>
-                            </a:rPr>
-                            <m:t>2</m:t>
-                          </m:r>
-                        </m:sup>
-                      </m:sSup>
-                      <m:r>
-                        <a:rPr lang="en-US" altLang="zh-TW" sz="2000" i="1">
-                          <a:latin typeface="Cambria Math" panose="02040503050406030204" pitchFamily="18" charset="0"/>
-                        </a:rPr>
-                        <m:t> </m:t>
-                      </m:r>
-                    </m:oMath>
-                  </m:oMathPara>
-                </a14:m>
-                <a:endParaRPr lang="zh-TW" altLang="en-US" sz="2000" dirty="0"/>
-              </a:p>
-            </p:txBody>
-          </p:sp>
-        </mc:Choice>
-        <mc:Fallback>
-          <p:sp>
-            <p:nvSpPr>
-              <p:cNvPr id="90" name="矩形 89">
-                <a:extLst>
-                  <a:ext uri="{FF2B5EF4-FFF2-40B4-BE49-F238E27FC236}">
-                    <a16:creationId xmlns:a16="http://schemas.microsoft.com/office/drawing/2014/main" id="{5BF5F099-3A22-4BFC-A027-FC0142CC1E2B}"/>
-                  </a:ext>
-                </a:extLst>
-              </p:cNvPr>
-              <p:cNvSpPr>
-                <a:spLocks noRot="1" noChangeAspect="1" noMove="1" noResize="1" noEditPoints="1" noAdjustHandles="1" noChangeArrowheads="1" noChangeShapeType="1" noTextEdit="1"/>
-              </p:cNvSpPr>
-              <p:nvPr/>
-            </p:nvSpPr>
-            <p:spPr>
-              <a:xfrm>
-                <a:off x="6181811" y="1255417"/>
-                <a:ext cx="1198533" cy="555152"/>
-              </a:xfrm>
-              <a:prstGeom prst="rect">
-                <a:avLst/>
-              </a:prstGeom>
-              <a:blipFill>
-                <a:blip r:embed="rId14"/>
-                <a:stretch>
-                  <a:fillRect/>
-                </a:stretch>
-              </a:blipFill>
-            </p:spPr>
-            <p:txBody>
-              <a:bodyPr/>
-              <a:lstStyle/>
-              <a:p>
-                <a:r>
-                  <a:rPr lang="zh-TW" altLang="en-US">
-                    <a:noFill/>
-                  </a:rPr>
-                  <a:t> </a:t>
-                </a:r>
-              </a:p>
-            </p:txBody>
-          </p:sp>
-        </mc:Fallback>
-      </mc:AlternateContent>
-      <mc:AlternateContent xmlns:mc="http://schemas.openxmlformats.org/markup-compatibility/2006" xmlns:a14="http://schemas.microsoft.com/office/drawing/2010/main">
-        <mc:Choice Requires="a14">
-          <p:sp>
-            <p:nvSpPr>
-              <p:cNvPr id="96" name="矩形 95">
-                <a:extLst>
-                  <a:ext uri="{FF2B5EF4-FFF2-40B4-BE49-F238E27FC236}">
-                    <a16:creationId xmlns:a16="http://schemas.microsoft.com/office/drawing/2014/main" id="{CDD52277-6DCF-44D8-B79C-3E27229C58B6}"/>
-                  </a:ext>
-                </a:extLst>
-              </p:cNvPr>
-              <p:cNvSpPr/>
-              <p:nvPr/>
-            </p:nvSpPr>
-            <p:spPr>
-              <a:xfrm>
-                <a:off x="7697250" y="1262143"/>
-                <a:ext cx="2287870" cy="528030"/>
-              </a:xfrm>
-              <a:prstGeom prst="rect">
-                <a:avLst/>
-              </a:prstGeom>
-            </p:spPr>
-            <p:txBody>
-              <a:bodyPr wrap="none">
-                <a:spAutoFit/>
-              </a:bodyPr>
-              <a:lstStyle/>
-              <a:p>
-                <a:pPr/>
-                <a14:m>
-                  <m:oMathPara xmlns:m="http://schemas.openxmlformats.org/officeDocument/2006/math">
-                    <m:oMathParaPr>
-                      <m:jc m:val="centerGroup"/>
-                    </m:oMathParaPr>
-                    <m:oMath xmlns:m="http://schemas.openxmlformats.org/officeDocument/2006/math">
-                      <m:sSup>
-                        <m:sSupPr>
-                          <m:ctrlPr>
-                            <a:rPr lang="en-US" altLang="zh-TW" sz="2000" i="1" dirty="0" smtClean="0">
-                              <a:latin typeface="Cambria Math" panose="02040503050406030204" pitchFamily="18" charset="0"/>
-                              <a:ea typeface="Cambria Math" panose="02040503050406030204" pitchFamily="18" charset="0"/>
-                            </a:rPr>
-                          </m:ctrlPr>
-                        </m:sSupPr>
-                        <m:e>
-                          <m:d>
-                            <m:dPr>
-                              <m:begChr m:val="|"/>
-                              <m:endChr m:val="|"/>
-                              <m:ctrlPr>
-                                <a:rPr lang="en-US" altLang="zh-TW" sz="2000" i="1" dirty="0">
-                                  <a:latin typeface="Cambria Math" panose="02040503050406030204" pitchFamily="18" charset="0"/>
-                                  <a:ea typeface="Cambria Math" panose="02040503050406030204" pitchFamily="18" charset="0"/>
-                                </a:rPr>
-                              </m:ctrlPr>
-                            </m:dPr>
-                            <m:e>
-                              <m:sSubSup>
-                                <m:sSubSupPr>
-                                  <m:ctrlPr>
-                                    <a:rPr lang="en-US" altLang="zh-TW" sz="2000" i="1">
-                                      <a:latin typeface="Cambria Math" panose="02040503050406030204" pitchFamily="18" charset="0"/>
-                                    </a:rPr>
-                                  </m:ctrlPr>
-                                </m:sSubSupPr>
-                                <m:e>
-                                  <m:r>
-                                    <a:rPr lang="en-US" altLang="zh-TW" sz="2000" i="1">
-                                      <a:latin typeface="Cambria Math" panose="02040503050406030204" pitchFamily="18" charset="0"/>
-                                    </a:rPr>
-                                    <m:t>𝑓</m:t>
-                                  </m:r>
-                                </m:e>
-                                <m:sub>
-                                  <m:r>
-                                    <a:rPr lang="en-US" altLang="zh-TW" sz="2000" i="1">
-                                      <a:latin typeface="Cambria Math" panose="02040503050406030204" pitchFamily="18" charset="0"/>
-                                    </a:rPr>
-                                    <m:t>𝑆</m:t>
-                                  </m:r>
-                                </m:sub>
-                                <m:sup>
-                                  <m:acc>
-                                    <m:accPr>
-                                      <m:chr m:val="̂"/>
-                                      <m:ctrlPr>
-                                        <a:rPr lang="en-US" altLang="zh-TW" sz="2000" b="1" i="1">
-                                          <a:latin typeface="Cambria Math" panose="02040503050406030204" pitchFamily="18" charset="0"/>
-                                        </a:rPr>
-                                      </m:ctrlPr>
-                                    </m:accPr>
-                                    <m:e>
-                                      <m:r>
-                                        <a:rPr lang="zh-TW" altLang="en-US" sz="2000" b="1" i="1">
-                                          <a:latin typeface="Cambria Math" panose="02040503050406030204" pitchFamily="18" charset="0"/>
-                                        </a:rPr>
-                                        <m:t>𝜺</m:t>
-                                      </m:r>
-                                    </m:e>
-                                  </m:acc>
-                                  <m:r>
-                                    <a:rPr lang="en-US" altLang="zh-TW" sz="2000" i="1">
-                                      <a:latin typeface="Cambria Math" panose="02040503050406030204" pitchFamily="18" charset="0"/>
-                                    </a:rPr>
-                                    <m:t>,</m:t>
-                                  </m:r>
-                                  <m:r>
-                                    <a:rPr lang="en-US" altLang="zh-TW" sz="2000" b="0" i="1" smtClean="0">
-                                      <a:latin typeface="Cambria Math" panose="02040503050406030204" pitchFamily="18" charset="0"/>
-                                    </a:rPr>
-                                    <m:t>±1</m:t>
-                                  </m:r>
-                                </m:sup>
-                              </m:sSubSup>
-                              <m:d>
-                                <m:dPr>
-                                  <m:ctrlPr>
-                                    <a:rPr lang="en-US" altLang="zh-TW" sz="2000" i="1">
-                                      <a:latin typeface="Cambria Math" panose="02040503050406030204" pitchFamily="18" charset="0"/>
-                                    </a:rPr>
-                                  </m:ctrlPr>
-                                </m:dPr>
-                                <m:e>
-                                  <m:sSub>
-                                    <m:sSubPr>
-                                      <m:ctrlPr>
-                                        <a:rPr lang="en-US" altLang="zh-TW" sz="2000" i="1">
-                                          <a:latin typeface="Cambria Math" panose="02040503050406030204" pitchFamily="18" charset="0"/>
-                                        </a:rPr>
-                                      </m:ctrlPr>
-                                    </m:sSubPr>
-                                    <m:e>
-                                      <m:r>
-                                        <a:rPr lang="en-US" altLang="zh-TW" sz="2000" b="1" i="1">
-                                          <a:latin typeface="Cambria Math" panose="02040503050406030204" pitchFamily="18" charset="0"/>
-                                        </a:rPr>
-                                        <m:t>𝑹</m:t>
-                                      </m:r>
-                                    </m:e>
-                                    <m:sub>
-                                      <m:r>
-                                        <a:rPr lang="en-US" altLang="zh-TW" sz="2000" i="1">
-                                          <a:latin typeface="Cambria Math" panose="02040503050406030204" pitchFamily="18" charset="0"/>
-                                        </a:rPr>
-                                        <m:t>𝑐</m:t>
-                                      </m:r>
-                                    </m:sub>
-                                  </m:sSub>
-                                  <m:r>
-                                    <a:rPr lang="en-US" altLang="zh-TW" sz="2000" i="1">
-                                      <a:latin typeface="Cambria Math" panose="02040503050406030204" pitchFamily="18" charset="0"/>
-                                    </a:rPr>
-                                    <m:t>, </m:t>
-                                  </m:r>
-                                  <m:r>
-                                    <a:rPr lang="en-US" altLang="zh-TW" sz="2000" b="1" i="1">
-                                      <a:latin typeface="Cambria Math" panose="02040503050406030204" pitchFamily="18" charset="0"/>
-                                    </a:rPr>
-                                    <m:t>𝒓</m:t>
-                                  </m:r>
-                                  <m:r>
-                                    <a:rPr lang="en-US" altLang="zh-TW" sz="2000" i="1">
-                                      <a:latin typeface="Cambria Math" panose="02040503050406030204" pitchFamily="18" charset="0"/>
-                                    </a:rPr>
-                                    <m:t>=0</m:t>
-                                  </m:r>
-                                </m:e>
-                              </m:d>
-                            </m:e>
-                          </m:d>
-                        </m:e>
-                        <m:sup>
-                          <m:r>
-                            <a:rPr lang="en-US" altLang="zh-TW" sz="2000" i="1" dirty="0">
-                              <a:latin typeface="Cambria Math" panose="02040503050406030204" pitchFamily="18" charset="0"/>
-                              <a:ea typeface="Cambria Math" panose="02040503050406030204" pitchFamily="18" charset="0"/>
-                            </a:rPr>
-                            <m:t>2</m:t>
-                          </m:r>
-                        </m:sup>
-                      </m:sSup>
-                    </m:oMath>
-                  </m:oMathPara>
-                </a14:m>
-                <a:endParaRPr lang="zh-TW" altLang="en-US" sz="2000" dirty="0"/>
-              </a:p>
-            </p:txBody>
-          </p:sp>
-        </mc:Choice>
-        <mc:Fallback xmlns="">
-          <p:sp>
-            <p:nvSpPr>
-              <p:cNvPr id="96" name="矩形 95">
-                <a:extLst>
-                  <a:ext uri="{FF2B5EF4-FFF2-40B4-BE49-F238E27FC236}">
-                    <a16:creationId xmlns:a16="http://schemas.microsoft.com/office/drawing/2014/main" id="{CDD52277-6DCF-44D8-B79C-3E27229C58B6}"/>
-                  </a:ext>
-                </a:extLst>
-              </p:cNvPr>
-              <p:cNvSpPr>
-                <a:spLocks noRot="1" noChangeAspect="1" noMove="1" noResize="1" noEditPoints="1" noAdjustHandles="1" noChangeArrowheads="1" noChangeShapeType="1" noTextEdit="1"/>
-              </p:cNvSpPr>
-              <p:nvPr/>
-            </p:nvSpPr>
-            <p:spPr>
-              <a:xfrm>
-                <a:off x="7697250" y="1262143"/>
-                <a:ext cx="2287870" cy="528030"/>
-              </a:xfrm>
-              <a:prstGeom prst="rect">
-                <a:avLst/>
-              </a:prstGeom>
-              <a:blipFill>
-                <a:blip r:embed="rId15"/>
-                <a:stretch>
-                  <a:fillRect/>
-                </a:stretch>
-              </a:blipFill>
-            </p:spPr>
-            <p:txBody>
-              <a:bodyPr/>
-              <a:lstStyle/>
-              <a:p>
-                <a:r>
-                  <a:rPr lang="zh-TW" altLang="en-US">
-                    <a:noFill/>
-                  </a:rPr>
-                  <a:t> </a:t>
-                </a:r>
-              </a:p>
-            </p:txBody>
-          </p:sp>
-        </mc:Fallback>
-      </mc:AlternateContent>
       <mc:AlternateContent xmlns:mc="http://schemas.openxmlformats.org/markup-compatibility/2006" xmlns:a14="http://schemas.microsoft.com/office/drawing/2010/main">
         <mc:Choice Requires="a14">
           <p:sp>
@@ -8785,589 +8179,6 @@
           </p:sp>
         </mc:Fallback>
       </mc:AlternateContent>
-      <p:sp>
-        <p:nvSpPr>
-          <p:cNvPr id="107" name="矩形: 圓角 106">
-            <a:extLst>
-              <a:ext uri="{FF2B5EF4-FFF2-40B4-BE49-F238E27FC236}">
-                <a16:creationId xmlns:a16="http://schemas.microsoft.com/office/drawing/2014/main" id="{7DA27A08-93FB-482D-9BD3-3230D7EA929D}"/>
-              </a:ext>
-            </a:extLst>
-          </p:cNvPr>
-          <p:cNvSpPr/>
-          <p:nvPr/>
-        </p:nvSpPr>
-        <p:spPr>
-          <a:xfrm>
-            <a:off x="-7163" y="5873376"/>
-            <a:ext cx="4950000" cy="4028171"/>
-          </a:xfrm>
-          <a:prstGeom prst="roundRect">
-            <a:avLst>
-              <a:gd name="adj" fmla="val 2129"/>
-            </a:avLst>
-          </a:prstGeom>
-          <a:gradFill flip="none" rotWithShape="1">
-            <a:gsLst>
-              <a:gs pos="0">
-                <a:schemeClr val="bg1">
-                  <a:lumMod val="95000"/>
-                </a:schemeClr>
-              </a:gs>
-              <a:gs pos="100000">
-                <a:schemeClr val="bg1">
-                  <a:lumMod val="85000"/>
-                </a:schemeClr>
-              </a:gs>
-            </a:gsLst>
-            <a:lin ang="5400000" scaled="1"/>
-            <a:tileRect/>
-          </a:gradFill>
-        </p:spPr>
-        <p:style>
-          <a:lnRef idx="1">
-            <a:schemeClr val="accent3"/>
-          </a:lnRef>
-          <a:fillRef idx="2">
-            <a:schemeClr val="accent3"/>
-          </a:fillRef>
-          <a:effectRef idx="1">
-            <a:schemeClr val="accent3"/>
-          </a:effectRef>
-          <a:fontRef idx="minor">
-            <a:schemeClr val="dk1"/>
-          </a:fontRef>
-        </p:style>
-        <p:txBody>
-          <a:bodyPr rot="0" spcFirstLastPara="0" vertOverflow="overflow" horzOverflow="overflow" vert="horz" wrap="square" lIns="37158" tIns="18579" rIns="37158" bIns="18579" numCol="1" spcCol="0" rtlCol="0" fromWordArt="0" anchor="ctr" anchorCtr="0" forceAA="0" compatLnSpc="1">
-            <a:prstTxWarp prst="textNoShape">
-              <a:avLst/>
-            </a:prstTxWarp>
-            <a:noAutofit/>
-          </a:bodyPr>
-          <a:lstStyle/>
-          <a:p>
-            <a:pPr algn="ctr"/>
-            <a:endParaRPr lang="zh-TW" altLang="en-US" sz="2000" dirty="0">
-              <a:latin typeface="Times New Roman" panose="02020603050405020304" pitchFamily="18" charset="0"/>
-              <a:cs typeface="Times New Roman" panose="02020603050405020304" pitchFamily="18" charset="0"/>
-            </a:endParaRPr>
-          </a:p>
-        </p:txBody>
-      </p:sp>
-      <p:sp>
-        <p:nvSpPr>
-          <p:cNvPr id="108" name="矩形: 圓角 107">
-            <a:extLst>
-              <a:ext uri="{FF2B5EF4-FFF2-40B4-BE49-F238E27FC236}">
-                <a16:creationId xmlns:a16="http://schemas.microsoft.com/office/drawing/2014/main" id="{5846A9D9-5944-4380-8E66-234F37EB6EE9}"/>
-              </a:ext>
-            </a:extLst>
-          </p:cNvPr>
-          <p:cNvSpPr/>
-          <p:nvPr/>
-        </p:nvSpPr>
-        <p:spPr>
-          <a:xfrm>
-            <a:off x="834913" y="6419073"/>
-            <a:ext cx="3932177" cy="3340786"/>
-          </a:xfrm>
-          <a:prstGeom prst="roundRect">
-            <a:avLst>
-              <a:gd name="adj" fmla="val 4125"/>
-            </a:avLst>
-          </a:prstGeom>
-          <a:gradFill flip="none" rotWithShape="1">
-            <a:gsLst>
-              <a:gs pos="100000">
-                <a:schemeClr val="bg1">
-                  <a:lumMod val="95000"/>
-                </a:schemeClr>
-              </a:gs>
-              <a:gs pos="0">
-                <a:schemeClr val="bg1">
-                  <a:lumMod val="85000"/>
-                </a:schemeClr>
-              </a:gs>
-            </a:gsLst>
-            <a:lin ang="5400000" scaled="1"/>
-            <a:tileRect/>
-          </a:gradFill>
-        </p:spPr>
-        <p:style>
-          <a:lnRef idx="1">
-            <a:schemeClr val="accent3"/>
-          </a:lnRef>
-          <a:fillRef idx="2">
-            <a:schemeClr val="accent3"/>
-          </a:fillRef>
-          <a:effectRef idx="1">
-            <a:schemeClr val="accent3"/>
-          </a:effectRef>
-          <a:fontRef idx="minor">
-            <a:schemeClr val="dk1"/>
-          </a:fontRef>
-        </p:style>
-        <p:txBody>
-          <a:bodyPr rot="0" spcFirstLastPara="0" vertOverflow="overflow" horzOverflow="overflow" vert="horz" wrap="square" lIns="37158" tIns="18579" rIns="37158" bIns="18579" numCol="1" spcCol="0" rtlCol="0" fromWordArt="0" anchor="ctr" anchorCtr="0" forceAA="0" compatLnSpc="1">
-            <a:prstTxWarp prst="textNoShape">
-              <a:avLst/>
-            </a:prstTxWarp>
-            <a:noAutofit/>
-          </a:bodyPr>
-          <a:lstStyle/>
-          <a:p>
-            <a:pPr algn="ctr"/>
-            <a:endParaRPr lang="zh-TW" altLang="en-US" sz="2000" dirty="0">
-              <a:latin typeface="Times New Roman" panose="02020603050405020304" pitchFamily="18" charset="0"/>
-              <a:cs typeface="Times New Roman" panose="02020603050405020304" pitchFamily="18" charset="0"/>
-            </a:endParaRPr>
-          </a:p>
-        </p:txBody>
-      </p:sp>
-      <mc:AlternateContent xmlns:mc="http://schemas.openxmlformats.org/markup-compatibility/2006">
-        <mc:Choice xmlns:a14="http://schemas.microsoft.com/office/drawing/2010/main" Requires="a14">
-          <p:sp>
-            <p:nvSpPr>
-              <p:cNvPr id="111" name="矩形 110">
-                <a:extLst>
-                  <a:ext uri="{FF2B5EF4-FFF2-40B4-BE49-F238E27FC236}">
-                    <a16:creationId xmlns:a16="http://schemas.microsoft.com/office/drawing/2014/main" id="{0739E403-493B-4716-A4EF-1A406EB47EB2}"/>
-                  </a:ext>
-                </a:extLst>
-              </p:cNvPr>
-              <p:cNvSpPr/>
-              <p:nvPr/>
-            </p:nvSpPr>
-            <p:spPr>
-              <a:xfrm>
-                <a:off x="1223301" y="5895147"/>
-                <a:ext cx="1198533" cy="555152"/>
-              </a:xfrm>
-              <a:prstGeom prst="rect">
-                <a:avLst/>
-              </a:prstGeom>
-            </p:spPr>
-            <p:txBody>
-              <a:bodyPr wrap="none">
-                <a:spAutoFit/>
-              </a:bodyPr>
-              <a:lstStyle/>
-              <a:p>
-                <a:pPr algn="r"/>
-                <a14:m>
-                  <m:oMathPara xmlns:m="http://schemas.openxmlformats.org/officeDocument/2006/math">
-                    <m:oMathParaPr>
-                      <m:jc m:val="centerGroup"/>
-                    </m:oMathParaPr>
-                    <m:oMath xmlns:m="http://schemas.openxmlformats.org/officeDocument/2006/math">
-                      <m:sSup>
-                        <m:sSupPr>
-                          <m:ctrlPr>
-                            <a:rPr lang="en-US" altLang="zh-TW" sz="2000" i="1" smtClean="0">
-                              <a:latin typeface="Cambria Math" panose="02040503050406030204" pitchFamily="18" charset="0"/>
-                            </a:rPr>
-                          </m:ctrlPr>
-                        </m:sSupPr>
-                        <m:e>
-                          <m:d>
-                            <m:dPr>
-                              <m:begChr m:val="|"/>
-                              <m:endChr m:val="|"/>
-                              <m:ctrlPr>
-                                <a:rPr lang="en-US" altLang="zh-TW" sz="2000" i="1">
-                                  <a:latin typeface="Cambria Math" panose="02040503050406030204" pitchFamily="18" charset="0"/>
-                                </a:rPr>
-                              </m:ctrlPr>
-                            </m:dPr>
-                            <m:e>
-                              <m:sSubSup>
-                                <m:sSubSupPr>
-                                  <m:ctrlPr>
-                                    <a:rPr lang="en-US" altLang="zh-TW" sz="2000" i="1">
-                                      <a:latin typeface="Cambria Math" panose="02040503050406030204" pitchFamily="18" charset="0"/>
-                                    </a:rPr>
-                                  </m:ctrlPr>
-                                </m:sSubSupPr>
-                                <m:e>
-                                  <m:acc>
-                                    <m:accPr>
-                                      <m:chr m:val="̃"/>
-                                      <m:ctrlPr>
-                                        <a:rPr lang="en-US" altLang="zh-TW" sz="2000" i="1">
-                                          <a:latin typeface="Cambria Math" panose="02040503050406030204" pitchFamily="18" charset="0"/>
-                                        </a:rPr>
-                                      </m:ctrlPr>
-                                    </m:accPr>
-                                    <m:e>
-                                      <m:r>
-                                        <a:rPr lang="en-US" altLang="zh-TW" sz="2000" i="1">
-                                          <a:latin typeface="Cambria Math" panose="02040503050406030204" pitchFamily="18" charset="0"/>
-                                        </a:rPr>
-                                        <m:t>𝑀</m:t>
-                                      </m:r>
-                                    </m:e>
-                                  </m:acc>
-                                </m:e>
-                                <m:sub>
-                                  <m:r>
-                                    <a:rPr lang="en-US" altLang="zh-TW" sz="2000" i="1">
-                                      <a:latin typeface="Cambria Math" panose="02040503050406030204" pitchFamily="18" charset="0"/>
-                                    </a:rPr>
-                                    <m:t>𝑆</m:t>
-                                  </m:r>
-                                  <m:r>
-                                    <a:rPr lang="en-US" altLang="zh-TW" sz="2000" i="1">
-                                      <a:latin typeface="Cambria Math" panose="02040503050406030204" pitchFamily="18" charset="0"/>
-                                    </a:rPr>
-                                    <m:t>,</m:t>
-                                  </m:r>
-                                  <m:r>
-                                    <a:rPr lang="en-US" altLang="zh-TW" sz="2000" b="1" i="1">
-                                      <a:latin typeface="Cambria Math" panose="02040503050406030204" pitchFamily="18" charset="0"/>
-                                    </a:rPr>
-                                    <m:t>𝑸</m:t>
-                                  </m:r>
-                                </m:sub>
-                                <m:sup>
-                                  <m:acc>
-                                    <m:accPr>
-                                      <m:chr m:val="̂"/>
-                                      <m:ctrlPr>
-                                        <a:rPr lang="en-US" altLang="zh-TW" sz="2000" b="1" i="1">
-                                          <a:latin typeface="Cambria Math" panose="02040503050406030204" pitchFamily="18" charset="0"/>
-                                        </a:rPr>
-                                      </m:ctrlPr>
-                                    </m:accPr>
-                                    <m:e>
-                                      <m:r>
-                                        <a:rPr lang="zh-TW" altLang="en-US" sz="2000" b="1" i="1">
-                                          <a:latin typeface="Cambria Math" panose="02040503050406030204" pitchFamily="18" charset="0"/>
-                                        </a:rPr>
-                                        <m:t>𝜺</m:t>
-                                      </m:r>
-                                    </m:e>
-                                  </m:acc>
-                                  <m:r>
-                                    <a:rPr lang="en-US" altLang="zh-TW" sz="2000" i="1">
-                                      <a:latin typeface="Cambria Math" panose="02040503050406030204" pitchFamily="18" charset="0"/>
-                                    </a:rPr>
-                                    <m:t>,</m:t>
-                                  </m:r>
-                                  <m:r>
-                                    <a:rPr lang="en-US" altLang="zh-TW" sz="2000" b="0" i="1" smtClean="0">
-                                      <a:latin typeface="Cambria Math" panose="02040503050406030204" pitchFamily="18" charset="0"/>
-                                    </a:rPr>
-                                    <m:t>±1</m:t>
-                                  </m:r>
-                                </m:sup>
-                              </m:sSubSup>
-                            </m:e>
-                          </m:d>
-                        </m:e>
-                        <m:sup>
-                          <m:r>
-                            <a:rPr lang="en-US" altLang="zh-TW" sz="2000" i="1">
-                              <a:latin typeface="Cambria Math" panose="02040503050406030204" pitchFamily="18" charset="0"/>
-                            </a:rPr>
-                            <m:t>2</m:t>
-                          </m:r>
-                        </m:sup>
-                      </m:sSup>
-                      <m:r>
-                        <a:rPr lang="en-US" altLang="zh-TW" sz="2000" i="1">
-                          <a:latin typeface="Cambria Math" panose="02040503050406030204" pitchFamily="18" charset="0"/>
-                        </a:rPr>
-                        <m:t> </m:t>
-                      </m:r>
-                    </m:oMath>
-                  </m:oMathPara>
-                </a14:m>
-                <a:endParaRPr lang="zh-TW" altLang="en-US" sz="2000" dirty="0"/>
-              </a:p>
-            </p:txBody>
-          </p:sp>
-        </mc:Choice>
-        <mc:Fallback>
-          <p:sp>
-            <p:nvSpPr>
-              <p:cNvPr id="111" name="矩形 110">
-                <a:extLst>
-                  <a:ext uri="{FF2B5EF4-FFF2-40B4-BE49-F238E27FC236}">
-                    <a16:creationId xmlns:a16="http://schemas.microsoft.com/office/drawing/2014/main" id="{0739E403-493B-4716-A4EF-1A406EB47EB2}"/>
-                  </a:ext>
-                </a:extLst>
-              </p:cNvPr>
-              <p:cNvSpPr>
-                <a:spLocks noRot="1" noChangeAspect="1" noMove="1" noResize="1" noEditPoints="1" noAdjustHandles="1" noChangeArrowheads="1" noChangeShapeType="1" noTextEdit="1"/>
-              </p:cNvSpPr>
-              <p:nvPr/>
-            </p:nvSpPr>
-            <p:spPr>
-              <a:xfrm>
-                <a:off x="1223301" y="5895147"/>
-                <a:ext cx="1198533" cy="555152"/>
-              </a:xfrm>
-              <a:prstGeom prst="rect">
-                <a:avLst/>
-              </a:prstGeom>
-              <a:blipFill>
-                <a:blip r:embed="rId18"/>
-                <a:stretch>
-                  <a:fillRect/>
-                </a:stretch>
-              </a:blipFill>
-            </p:spPr>
-            <p:txBody>
-              <a:bodyPr/>
-              <a:lstStyle/>
-              <a:p>
-                <a:r>
-                  <a:rPr lang="zh-TW" altLang="en-US">
-                    <a:noFill/>
-                  </a:rPr>
-                  <a:t> </a:t>
-                </a:r>
-              </a:p>
-            </p:txBody>
-          </p:sp>
-        </mc:Fallback>
-      </mc:AlternateContent>
-      <mc:AlternateContent xmlns:mc="http://schemas.openxmlformats.org/markup-compatibility/2006" xmlns:a14="http://schemas.microsoft.com/office/drawing/2010/main">
-        <mc:Choice Requires="a14">
-          <p:sp>
-            <p:nvSpPr>
-              <p:cNvPr id="117" name="矩形 116">
-                <a:extLst>
-                  <a:ext uri="{FF2B5EF4-FFF2-40B4-BE49-F238E27FC236}">
-                    <a16:creationId xmlns:a16="http://schemas.microsoft.com/office/drawing/2014/main" id="{18559E02-FD45-47FF-AFBF-4C061C7AFF54}"/>
-                  </a:ext>
-                </a:extLst>
-              </p:cNvPr>
-              <p:cNvSpPr/>
-              <p:nvPr/>
-            </p:nvSpPr>
-            <p:spPr>
-              <a:xfrm>
-                <a:off x="2738740" y="5901873"/>
-                <a:ext cx="2287870" cy="528030"/>
-              </a:xfrm>
-              <a:prstGeom prst="rect">
-                <a:avLst/>
-              </a:prstGeom>
-            </p:spPr>
-            <p:txBody>
-              <a:bodyPr wrap="none">
-                <a:spAutoFit/>
-              </a:bodyPr>
-              <a:lstStyle/>
-              <a:p>
-                <a:pPr/>
-                <a14:m>
-                  <m:oMathPara xmlns:m="http://schemas.openxmlformats.org/officeDocument/2006/math">
-                    <m:oMathParaPr>
-                      <m:jc m:val="centerGroup"/>
-                    </m:oMathParaPr>
-                    <m:oMath xmlns:m="http://schemas.openxmlformats.org/officeDocument/2006/math">
-                      <m:sSup>
-                        <m:sSupPr>
-                          <m:ctrlPr>
-                            <a:rPr lang="en-US" altLang="zh-TW" sz="2000" i="1" dirty="0" smtClean="0">
-                              <a:latin typeface="Cambria Math" panose="02040503050406030204" pitchFamily="18" charset="0"/>
-                              <a:ea typeface="Cambria Math" panose="02040503050406030204" pitchFamily="18" charset="0"/>
-                            </a:rPr>
-                          </m:ctrlPr>
-                        </m:sSupPr>
-                        <m:e>
-                          <m:d>
-                            <m:dPr>
-                              <m:begChr m:val="|"/>
-                              <m:endChr m:val="|"/>
-                              <m:ctrlPr>
-                                <a:rPr lang="en-US" altLang="zh-TW" sz="2000" i="1" dirty="0">
-                                  <a:latin typeface="Cambria Math" panose="02040503050406030204" pitchFamily="18" charset="0"/>
-                                  <a:ea typeface="Cambria Math" panose="02040503050406030204" pitchFamily="18" charset="0"/>
-                                </a:rPr>
-                              </m:ctrlPr>
-                            </m:dPr>
-                            <m:e>
-                              <m:sSubSup>
-                                <m:sSubSupPr>
-                                  <m:ctrlPr>
-                                    <a:rPr lang="en-US" altLang="zh-TW" sz="2000" i="1">
-                                      <a:latin typeface="Cambria Math" panose="02040503050406030204" pitchFamily="18" charset="0"/>
-                                    </a:rPr>
-                                  </m:ctrlPr>
-                                </m:sSubSupPr>
-                                <m:e>
-                                  <m:r>
-                                    <a:rPr lang="en-US" altLang="zh-TW" sz="2000" i="1">
-                                      <a:latin typeface="Cambria Math" panose="02040503050406030204" pitchFamily="18" charset="0"/>
-                                    </a:rPr>
-                                    <m:t>𝑓</m:t>
-                                  </m:r>
-                                </m:e>
-                                <m:sub>
-                                  <m:r>
-                                    <a:rPr lang="en-US" altLang="zh-TW" sz="2000" i="1">
-                                      <a:latin typeface="Cambria Math" panose="02040503050406030204" pitchFamily="18" charset="0"/>
-                                    </a:rPr>
-                                    <m:t>𝑆</m:t>
-                                  </m:r>
-                                </m:sub>
-                                <m:sup>
-                                  <m:acc>
-                                    <m:accPr>
-                                      <m:chr m:val="̂"/>
-                                      <m:ctrlPr>
-                                        <a:rPr lang="en-US" altLang="zh-TW" sz="2000" b="1" i="1">
-                                          <a:latin typeface="Cambria Math" panose="02040503050406030204" pitchFamily="18" charset="0"/>
-                                        </a:rPr>
-                                      </m:ctrlPr>
-                                    </m:accPr>
-                                    <m:e>
-                                      <m:r>
-                                        <a:rPr lang="zh-TW" altLang="en-US" sz="2000" b="1" i="1">
-                                          <a:latin typeface="Cambria Math" panose="02040503050406030204" pitchFamily="18" charset="0"/>
-                                        </a:rPr>
-                                        <m:t>𝜺</m:t>
-                                      </m:r>
-                                    </m:e>
-                                  </m:acc>
-                                  <m:r>
-                                    <a:rPr lang="en-US" altLang="zh-TW" sz="2000" i="1">
-                                      <a:latin typeface="Cambria Math" panose="02040503050406030204" pitchFamily="18" charset="0"/>
-                                    </a:rPr>
-                                    <m:t>,</m:t>
-                                  </m:r>
-                                  <m:r>
-                                    <a:rPr lang="en-US" altLang="zh-TW" sz="2000" b="0" i="1" smtClean="0">
-                                      <a:latin typeface="Cambria Math" panose="02040503050406030204" pitchFamily="18" charset="0"/>
-                                    </a:rPr>
-                                    <m:t>±1</m:t>
-                                  </m:r>
-                                </m:sup>
-                              </m:sSubSup>
-                              <m:d>
-                                <m:dPr>
-                                  <m:ctrlPr>
-                                    <a:rPr lang="en-US" altLang="zh-TW" sz="2000" i="1">
-                                      <a:latin typeface="Cambria Math" panose="02040503050406030204" pitchFamily="18" charset="0"/>
-                                    </a:rPr>
-                                  </m:ctrlPr>
-                                </m:dPr>
-                                <m:e>
-                                  <m:sSub>
-                                    <m:sSubPr>
-                                      <m:ctrlPr>
-                                        <a:rPr lang="en-US" altLang="zh-TW" sz="2000" i="1">
-                                          <a:latin typeface="Cambria Math" panose="02040503050406030204" pitchFamily="18" charset="0"/>
-                                        </a:rPr>
-                                      </m:ctrlPr>
-                                    </m:sSubPr>
-                                    <m:e>
-                                      <m:r>
-                                        <a:rPr lang="en-US" altLang="zh-TW" sz="2000" b="1" i="1">
-                                          <a:latin typeface="Cambria Math" panose="02040503050406030204" pitchFamily="18" charset="0"/>
-                                        </a:rPr>
-                                        <m:t>𝑹</m:t>
-                                      </m:r>
-                                    </m:e>
-                                    <m:sub>
-                                      <m:r>
-                                        <a:rPr lang="en-US" altLang="zh-TW" sz="2000" i="1">
-                                          <a:latin typeface="Cambria Math" panose="02040503050406030204" pitchFamily="18" charset="0"/>
-                                        </a:rPr>
-                                        <m:t>𝑐</m:t>
-                                      </m:r>
-                                    </m:sub>
-                                  </m:sSub>
-                                  <m:r>
-                                    <a:rPr lang="en-US" altLang="zh-TW" sz="2000" i="1">
-                                      <a:latin typeface="Cambria Math" panose="02040503050406030204" pitchFamily="18" charset="0"/>
-                                    </a:rPr>
-                                    <m:t>, </m:t>
-                                  </m:r>
-                                  <m:r>
-                                    <a:rPr lang="en-US" altLang="zh-TW" sz="2000" b="1" i="1">
-                                      <a:latin typeface="Cambria Math" panose="02040503050406030204" pitchFamily="18" charset="0"/>
-                                    </a:rPr>
-                                    <m:t>𝒓</m:t>
-                                  </m:r>
-                                  <m:r>
-                                    <a:rPr lang="en-US" altLang="zh-TW" sz="2000" i="1">
-                                      <a:latin typeface="Cambria Math" panose="02040503050406030204" pitchFamily="18" charset="0"/>
-                                    </a:rPr>
-                                    <m:t>=0</m:t>
-                                  </m:r>
-                                </m:e>
-                              </m:d>
-                            </m:e>
-                          </m:d>
-                        </m:e>
-                        <m:sup>
-                          <m:r>
-                            <a:rPr lang="en-US" altLang="zh-TW" sz="2000" i="1" dirty="0">
-                              <a:latin typeface="Cambria Math" panose="02040503050406030204" pitchFamily="18" charset="0"/>
-                              <a:ea typeface="Cambria Math" panose="02040503050406030204" pitchFamily="18" charset="0"/>
-                            </a:rPr>
-                            <m:t>2</m:t>
-                          </m:r>
-                        </m:sup>
-                      </m:sSup>
-                    </m:oMath>
-                  </m:oMathPara>
-                </a14:m>
-                <a:endParaRPr lang="zh-TW" altLang="en-US" sz="2000" dirty="0"/>
-              </a:p>
-            </p:txBody>
-          </p:sp>
-        </mc:Choice>
-        <mc:Fallback xmlns="">
-          <p:sp>
-            <p:nvSpPr>
-              <p:cNvPr id="117" name="矩形 116">
-                <a:extLst>
-                  <a:ext uri="{FF2B5EF4-FFF2-40B4-BE49-F238E27FC236}">
-                    <a16:creationId xmlns:a16="http://schemas.microsoft.com/office/drawing/2014/main" id="{18559E02-FD45-47FF-AFBF-4C061C7AFF54}"/>
-                  </a:ext>
-                </a:extLst>
-              </p:cNvPr>
-              <p:cNvSpPr>
-                <a:spLocks noRot="1" noChangeAspect="1" noMove="1" noResize="1" noEditPoints="1" noAdjustHandles="1" noChangeArrowheads="1" noChangeShapeType="1" noTextEdit="1"/>
-              </p:cNvSpPr>
-              <p:nvPr/>
-            </p:nvSpPr>
-            <p:spPr>
-              <a:xfrm>
-                <a:off x="2738740" y="5901873"/>
-                <a:ext cx="2287870" cy="528030"/>
-              </a:xfrm>
-              <a:prstGeom prst="rect">
-                <a:avLst/>
-              </a:prstGeom>
-              <a:blipFill>
-                <a:blip r:embed="rId19"/>
-                <a:stretch>
-                  <a:fillRect/>
-                </a:stretch>
-              </a:blipFill>
-            </p:spPr>
-            <p:txBody>
-              <a:bodyPr/>
-              <a:lstStyle/>
-              <a:p>
-                <a:r>
-                  <a:rPr lang="zh-TW" altLang="en-US">
-                    <a:noFill/>
-                  </a:rPr>
-                  <a:t> </a:t>
-                </a:r>
-              </a:p>
-            </p:txBody>
-          </p:sp>
-        </mc:Fallback>
-      </mc:AlternateContent>
       <mc:AlternateContent xmlns:mc="http://schemas.openxmlformats.org/markup-compatibility/2006" xmlns:a14="http://schemas.microsoft.com/office/drawing/2010/main">
         <mc:Choice Requires="a14">
           <p:sp>
@@ -9574,589 +8385,6 @@
               </a:prstGeom>
               <a:blipFill>
                 <a:blip r:embed="rId21"/>
-                <a:stretch>
-                  <a:fillRect/>
-                </a:stretch>
-              </a:blipFill>
-            </p:spPr>
-            <p:txBody>
-              <a:bodyPr/>
-              <a:lstStyle/>
-              <a:p>
-                <a:r>
-                  <a:rPr lang="zh-TW" altLang="en-US">
-                    <a:noFill/>
-                  </a:rPr>
-                  <a:t> </a:t>
-                </a:r>
-              </a:p>
-            </p:txBody>
-          </p:sp>
-        </mc:Fallback>
-      </mc:AlternateContent>
-      <p:sp>
-        <p:nvSpPr>
-          <p:cNvPr id="127" name="矩形: 圓角 126">
-            <a:extLst>
-              <a:ext uri="{FF2B5EF4-FFF2-40B4-BE49-F238E27FC236}">
-                <a16:creationId xmlns:a16="http://schemas.microsoft.com/office/drawing/2014/main" id="{D72C397B-56F1-4A0B-AB83-AB14833275AE}"/>
-              </a:ext>
-            </a:extLst>
-          </p:cNvPr>
-          <p:cNvSpPr/>
-          <p:nvPr/>
-        </p:nvSpPr>
-        <p:spPr>
-          <a:xfrm>
-            <a:off x="4951347" y="5870711"/>
-            <a:ext cx="4950000" cy="4028171"/>
-          </a:xfrm>
-          <a:prstGeom prst="roundRect">
-            <a:avLst>
-              <a:gd name="adj" fmla="val 2129"/>
-            </a:avLst>
-          </a:prstGeom>
-          <a:gradFill flip="none" rotWithShape="1">
-            <a:gsLst>
-              <a:gs pos="0">
-                <a:schemeClr val="bg1">
-                  <a:lumMod val="95000"/>
-                </a:schemeClr>
-              </a:gs>
-              <a:gs pos="100000">
-                <a:schemeClr val="bg1">
-                  <a:lumMod val="85000"/>
-                </a:schemeClr>
-              </a:gs>
-            </a:gsLst>
-            <a:lin ang="5400000" scaled="1"/>
-            <a:tileRect/>
-          </a:gradFill>
-        </p:spPr>
-        <p:style>
-          <a:lnRef idx="1">
-            <a:schemeClr val="accent3"/>
-          </a:lnRef>
-          <a:fillRef idx="2">
-            <a:schemeClr val="accent3"/>
-          </a:fillRef>
-          <a:effectRef idx="1">
-            <a:schemeClr val="accent3"/>
-          </a:effectRef>
-          <a:fontRef idx="minor">
-            <a:schemeClr val="dk1"/>
-          </a:fontRef>
-        </p:style>
-        <p:txBody>
-          <a:bodyPr rot="0" spcFirstLastPara="0" vertOverflow="overflow" horzOverflow="overflow" vert="horz" wrap="square" lIns="37158" tIns="18579" rIns="37158" bIns="18579" numCol="1" spcCol="0" rtlCol="0" fromWordArt="0" anchor="ctr" anchorCtr="0" forceAA="0" compatLnSpc="1">
-            <a:prstTxWarp prst="textNoShape">
-              <a:avLst/>
-            </a:prstTxWarp>
-            <a:noAutofit/>
-          </a:bodyPr>
-          <a:lstStyle/>
-          <a:p>
-            <a:pPr algn="ctr"/>
-            <a:endParaRPr lang="zh-TW" altLang="en-US" sz="2000" dirty="0">
-              <a:latin typeface="Times New Roman" panose="02020603050405020304" pitchFamily="18" charset="0"/>
-              <a:cs typeface="Times New Roman" panose="02020603050405020304" pitchFamily="18" charset="0"/>
-            </a:endParaRPr>
-          </a:p>
-        </p:txBody>
-      </p:sp>
-      <p:sp>
-        <p:nvSpPr>
-          <p:cNvPr id="128" name="矩形: 圓角 127">
-            <a:extLst>
-              <a:ext uri="{FF2B5EF4-FFF2-40B4-BE49-F238E27FC236}">
-                <a16:creationId xmlns:a16="http://schemas.microsoft.com/office/drawing/2014/main" id="{3E40BA28-B9B3-4967-98C6-C3DCA47C9B61}"/>
-              </a:ext>
-            </a:extLst>
-          </p:cNvPr>
-          <p:cNvSpPr/>
-          <p:nvPr/>
-        </p:nvSpPr>
-        <p:spPr>
-          <a:xfrm>
-            <a:off x="5793423" y="6416408"/>
-            <a:ext cx="3932177" cy="3340786"/>
-          </a:xfrm>
-          <a:prstGeom prst="roundRect">
-            <a:avLst>
-              <a:gd name="adj" fmla="val 4125"/>
-            </a:avLst>
-          </a:prstGeom>
-          <a:gradFill flip="none" rotWithShape="1">
-            <a:gsLst>
-              <a:gs pos="100000">
-                <a:schemeClr val="bg1">
-                  <a:lumMod val="95000"/>
-                </a:schemeClr>
-              </a:gs>
-              <a:gs pos="0">
-                <a:schemeClr val="bg1">
-                  <a:lumMod val="85000"/>
-                </a:schemeClr>
-              </a:gs>
-            </a:gsLst>
-            <a:lin ang="5400000" scaled="1"/>
-            <a:tileRect/>
-          </a:gradFill>
-        </p:spPr>
-        <p:style>
-          <a:lnRef idx="1">
-            <a:schemeClr val="accent3"/>
-          </a:lnRef>
-          <a:fillRef idx="2">
-            <a:schemeClr val="accent3"/>
-          </a:fillRef>
-          <a:effectRef idx="1">
-            <a:schemeClr val="accent3"/>
-          </a:effectRef>
-          <a:fontRef idx="minor">
-            <a:schemeClr val="dk1"/>
-          </a:fontRef>
-        </p:style>
-        <p:txBody>
-          <a:bodyPr rot="0" spcFirstLastPara="0" vertOverflow="overflow" horzOverflow="overflow" vert="horz" wrap="square" lIns="37158" tIns="18579" rIns="37158" bIns="18579" numCol="1" spcCol="0" rtlCol="0" fromWordArt="0" anchor="ctr" anchorCtr="0" forceAA="0" compatLnSpc="1">
-            <a:prstTxWarp prst="textNoShape">
-              <a:avLst/>
-            </a:prstTxWarp>
-            <a:noAutofit/>
-          </a:bodyPr>
-          <a:lstStyle/>
-          <a:p>
-            <a:pPr algn="ctr"/>
-            <a:endParaRPr lang="zh-TW" altLang="en-US" sz="2000" dirty="0">
-              <a:latin typeface="Times New Roman" panose="02020603050405020304" pitchFamily="18" charset="0"/>
-              <a:cs typeface="Times New Roman" panose="02020603050405020304" pitchFamily="18" charset="0"/>
-            </a:endParaRPr>
-          </a:p>
-        </p:txBody>
-      </p:sp>
-      <mc:AlternateContent xmlns:mc="http://schemas.openxmlformats.org/markup-compatibility/2006">
-        <mc:Choice xmlns:a14="http://schemas.microsoft.com/office/drawing/2010/main" Requires="a14">
-          <p:sp>
-            <p:nvSpPr>
-              <p:cNvPr id="131" name="矩形 130">
-                <a:extLst>
-                  <a:ext uri="{FF2B5EF4-FFF2-40B4-BE49-F238E27FC236}">
-                    <a16:creationId xmlns:a16="http://schemas.microsoft.com/office/drawing/2014/main" id="{17741671-43C6-40A1-A5C7-FA8E70D4A8EF}"/>
-                  </a:ext>
-                </a:extLst>
-              </p:cNvPr>
-              <p:cNvSpPr/>
-              <p:nvPr/>
-            </p:nvSpPr>
-            <p:spPr>
-              <a:xfrm>
-                <a:off x="6181811" y="5892482"/>
-                <a:ext cx="1198533" cy="555152"/>
-              </a:xfrm>
-              <a:prstGeom prst="rect">
-                <a:avLst/>
-              </a:prstGeom>
-            </p:spPr>
-            <p:txBody>
-              <a:bodyPr wrap="none">
-                <a:spAutoFit/>
-              </a:bodyPr>
-              <a:lstStyle/>
-              <a:p>
-                <a:pPr algn="r"/>
-                <a14:m>
-                  <m:oMathPara xmlns:m="http://schemas.openxmlformats.org/officeDocument/2006/math">
-                    <m:oMathParaPr>
-                      <m:jc m:val="centerGroup"/>
-                    </m:oMathParaPr>
-                    <m:oMath xmlns:m="http://schemas.openxmlformats.org/officeDocument/2006/math">
-                      <m:sSup>
-                        <m:sSupPr>
-                          <m:ctrlPr>
-                            <a:rPr lang="en-US" altLang="zh-TW" sz="2000" i="1" smtClean="0">
-                              <a:latin typeface="Cambria Math" panose="02040503050406030204" pitchFamily="18" charset="0"/>
-                            </a:rPr>
-                          </m:ctrlPr>
-                        </m:sSupPr>
-                        <m:e>
-                          <m:d>
-                            <m:dPr>
-                              <m:begChr m:val="|"/>
-                              <m:endChr m:val="|"/>
-                              <m:ctrlPr>
-                                <a:rPr lang="en-US" altLang="zh-TW" sz="2000" i="1">
-                                  <a:latin typeface="Cambria Math" panose="02040503050406030204" pitchFamily="18" charset="0"/>
-                                </a:rPr>
-                              </m:ctrlPr>
-                            </m:dPr>
-                            <m:e>
-                              <m:sSubSup>
-                                <m:sSubSupPr>
-                                  <m:ctrlPr>
-                                    <a:rPr lang="en-US" altLang="zh-TW" sz="2000" i="1">
-                                      <a:latin typeface="Cambria Math" panose="02040503050406030204" pitchFamily="18" charset="0"/>
-                                    </a:rPr>
-                                  </m:ctrlPr>
-                                </m:sSubSupPr>
-                                <m:e>
-                                  <m:acc>
-                                    <m:accPr>
-                                      <m:chr m:val="̃"/>
-                                      <m:ctrlPr>
-                                        <a:rPr lang="en-US" altLang="zh-TW" sz="2000" i="1">
-                                          <a:latin typeface="Cambria Math" panose="02040503050406030204" pitchFamily="18" charset="0"/>
-                                        </a:rPr>
-                                      </m:ctrlPr>
-                                    </m:accPr>
-                                    <m:e>
-                                      <m:r>
-                                        <a:rPr lang="en-US" altLang="zh-TW" sz="2000" i="1">
-                                          <a:latin typeface="Cambria Math" panose="02040503050406030204" pitchFamily="18" charset="0"/>
-                                        </a:rPr>
-                                        <m:t>𝑀</m:t>
-                                      </m:r>
-                                    </m:e>
-                                  </m:acc>
-                                </m:e>
-                                <m:sub>
-                                  <m:r>
-                                    <a:rPr lang="en-US" altLang="zh-TW" sz="2000" i="1">
-                                      <a:latin typeface="Cambria Math" panose="02040503050406030204" pitchFamily="18" charset="0"/>
-                                    </a:rPr>
-                                    <m:t>𝑆</m:t>
-                                  </m:r>
-                                  <m:r>
-                                    <a:rPr lang="en-US" altLang="zh-TW" sz="2000" i="1">
-                                      <a:latin typeface="Cambria Math" panose="02040503050406030204" pitchFamily="18" charset="0"/>
-                                    </a:rPr>
-                                    <m:t>,</m:t>
-                                  </m:r>
-                                  <m:r>
-                                    <a:rPr lang="en-US" altLang="zh-TW" sz="2000" b="1" i="1">
-                                      <a:latin typeface="Cambria Math" panose="02040503050406030204" pitchFamily="18" charset="0"/>
-                                    </a:rPr>
-                                    <m:t>𝑸</m:t>
-                                  </m:r>
-                                </m:sub>
-                                <m:sup>
-                                  <m:acc>
-                                    <m:accPr>
-                                      <m:chr m:val="̂"/>
-                                      <m:ctrlPr>
-                                        <a:rPr lang="en-US" altLang="zh-TW" sz="2000" b="1" i="1">
-                                          <a:latin typeface="Cambria Math" panose="02040503050406030204" pitchFamily="18" charset="0"/>
-                                        </a:rPr>
-                                      </m:ctrlPr>
-                                    </m:accPr>
-                                    <m:e>
-                                      <m:r>
-                                        <a:rPr lang="zh-TW" altLang="en-US" sz="2000" b="1" i="1">
-                                          <a:latin typeface="Cambria Math" panose="02040503050406030204" pitchFamily="18" charset="0"/>
-                                        </a:rPr>
-                                        <m:t>𝜺</m:t>
-                                      </m:r>
-                                    </m:e>
-                                  </m:acc>
-                                  <m:r>
-                                    <a:rPr lang="en-US" altLang="zh-TW" sz="2000" i="1">
-                                      <a:latin typeface="Cambria Math" panose="02040503050406030204" pitchFamily="18" charset="0"/>
-                                    </a:rPr>
-                                    <m:t>,</m:t>
-                                  </m:r>
-                                  <m:r>
-                                    <a:rPr lang="en-US" altLang="zh-TW" sz="2000" b="0" i="1" smtClean="0">
-                                      <a:latin typeface="Cambria Math" panose="02040503050406030204" pitchFamily="18" charset="0"/>
-                                    </a:rPr>
-                                    <m:t>±1</m:t>
-                                  </m:r>
-                                </m:sup>
-                              </m:sSubSup>
-                            </m:e>
-                          </m:d>
-                        </m:e>
-                        <m:sup>
-                          <m:r>
-                            <a:rPr lang="en-US" altLang="zh-TW" sz="2000" i="1">
-                              <a:latin typeface="Cambria Math" panose="02040503050406030204" pitchFamily="18" charset="0"/>
-                            </a:rPr>
-                            <m:t>2</m:t>
-                          </m:r>
-                        </m:sup>
-                      </m:sSup>
-                      <m:r>
-                        <a:rPr lang="en-US" altLang="zh-TW" sz="2000" i="1">
-                          <a:latin typeface="Cambria Math" panose="02040503050406030204" pitchFamily="18" charset="0"/>
-                        </a:rPr>
-                        <m:t> </m:t>
-                      </m:r>
-                    </m:oMath>
-                  </m:oMathPara>
-                </a14:m>
-                <a:endParaRPr lang="zh-TW" altLang="en-US" sz="2000" dirty="0"/>
-              </a:p>
-            </p:txBody>
-          </p:sp>
-        </mc:Choice>
-        <mc:Fallback>
-          <p:sp>
-            <p:nvSpPr>
-              <p:cNvPr id="131" name="矩形 130">
-                <a:extLst>
-                  <a:ext uri="{FF2B5EF4-FFF2-40B4-BE49-F238E27FC236}">
-                    <a16:creationId xmlns:a16="http://schemas.microsoft.com/office/drawing/2014/main" id="{17741671-43C6-40A1-A5C7-FA8E70D4A8EF}"/>
-                  </a:ext>
-                </a:extLst>
-              </p:cNvPr>
-              <p:cNvSpPr>
-                <a:spLocks noRot="1" noChangeAspect="1" noMove="1" noResize="1" noEditPoints="1" noAdjustHandles="1" noChangeArrowheads="1" noChangeShapeType="1" noTextEdit="1"/>
-              </p:cNvSpPr>
-              <p:nvPr/>
-            </p:nvSpPr>
-            <p:spPr>
-              <a:xfrm>
-                <a:off x="6181811" y="5892482"/>
-                <a:ext cx="1198533" cy="555152"/>
-              </a:xfrm>
-              <a:prstGeom prst="rect">
-                <a:avLst/>
-              </a:prstGeom>
-              <a:blipFill>
-                <a:blip r:embed="rId22"/>
-                <a:stretch>
-                  <a:fillRect/>
-                </a:stretch>
-              </a:blipFill>
-            </p:spPr>
-            <p:txBody>
-              <a:bodyPr/>
-              <a:lstStyle/>
-              <a:p>
-                <a:r>
-                  <a:rPr lang="zh-TW" altLang="en-US">
-                    <a:noFill/>
-                  </a:rPr>
-                  <a:t> </a:t>
-                </a:r>
-              </a:p>
-            </p:txBody>
-          </p:sp>
-        </mc:Fallback>
-      </mc:AlternateContent>
-      <mc:AlternateContent xmlns:mc="http://schemas.openxmlformats.org/markup-compatibility/2006" xmlns:a14="http://schemas.microsoft.com/office/drawing/2010/main">
-        <mc:Choice Requires="a14">
-          <p:sp>
-            <p:nvSpPr>
-              <p:cNvPr id="137" name="矩形 136">
-                <a:extLst>
-                  <a:ext uri="{FF2B5EF4-FFF2-40B4-BE49-F238E27FC236}">
-                    <a16:creationId xmlns:a16="http://schemas.microsoft.com/office/drawing/2014/main" id="{778139C7-0D2D-4EEB-8A6F-2E9519499325}"/>
-                  </a:ext>
-                </a:extLst>
-              </p:cNvPr>
-              <p:cNvSpPr/>
-              <p:nvPr/>
-            </p:nvSpPr>
-            <p:spPr>
-              <a:xfrm>
-                <a:off x="7697250" y="5899208"/>
-                <a:ext cx="2287870" cy="528030"/>
-              </a:xfrm>
-              <a:prstGeom prst="rect">
-                <a:avLst/>
-              </a:prstGeom>
-            </p:spPr>
-            <p:txBody>
-              <a:bodyPr wrap="none">
-                <a:spAutoFit/>
-              </a:bodyPr>
-              <a:lstStyle/>
-              <a:p>
-                <a:pPr/>
-                <a14:m>
-                  <m:oMathPara xmlns:m="http://schemas.openxmlformats.org/officeDocument/2006/math">
-                    <m:oMathParaPr>
-                      <m:jc m:val="centerGroup"/>
-                    </m:oMathParaPr>
-                    <m:oMath xmlns:m="http://schemas.openxmlformats.org/officeDocument/2006/math">
-                      <m:sSup>
-                        <m:sSupPr>
-                          <m:ctrlPr>
-                            <a:rPr lang="en-US" altLang="zh-TW" sz="2000" i="1" dirty="0" smtClean="0">
-                              <a:latin typeface="Cambria Math" panose="02040503050406030204" pitchFamily="18" charset="0"/>
-                              <a:ea typeface="Cambria Math" panose="02040503050406030204" pitchFamily="18" charset="0"/>
-                            </a:rPr>
-                          </m:ctrlPr>
-                        </m:sSupPr>
-                        <m:e>
-                          <m:d>
-                            <m:dPr>
-                              <m:begChr m:val="|"/>
-                              <m:endChr m:val="|"/>
-                              <m:ctrlPr>
-                                <a:rPr lang="en-US" altLang="zh-TW" sz="2000" i="1" dirty="0">
-                                  <a:latin typeface="Cambria Math" panose="02040503050406030204" pitchFamily="18" charset="0"/>
-                                  <a:ea typeface="Cambria Math" panose="02040503050406030204" pitchFamily="18" charset="0"/>
-                                </a:rPr>
-                              </m:ctrlPr>
-                            </m:dPr>
-                            <m:e>
-                              <m:sSubSup>
-                                <m:sSubSupPr>
-                                  <m:ctrlPr>
-                                    <a:rPr lang="en-US" altLang="zh-TW" sz="2000" i="1">
-                                      <a:latin typeface="Cambria Math" panose="02040503050406030204" pitchFamily="18" charset="0"/>
-                                    </a:rPr>
-                                  </m:ctrlPr>
-                                </m:sSubSupPr>
-                                <m:e>
-                                  <m:r>
-                                    <a:rPr lang="en-US" altLang="zh-TW" sz="2000" i="1">
-                                      <a:latin typeface="Cambria Math" panose="02040503050406030204" pitchFamily="18" charset="0"/>
-                                    </a:rPr>
-                                    <m:t>𝑓</m:t>
-                                  </m:r>
-                                </m:e>
-                                <m:sub>
-                                  <m:r>
-                                    <a:rPr lang="en-US" altLang="zh-TW" sz="2000" i="1">
-                                      <a:latin typeface="Cambria Math" panose="02040503050406030204" pitchFamily="18" charset="0"/>
-                                    </a:rPr>
-                                    <m:t>𝑆</m:t>
-                                  </m:r>
-                                </m:sub>
-                                <m:sup>
-                                  <m:acc>
-                                    <m:accPr>
-                                      <m:chr m:val="̂"/>
-                                      <m:ctrlPr>
-                                        <a:rPr lang="en-US" altLang="zh-TW" sz="2000" b="1" i="1">
-                                          <a:latin typeface="Cambria Math" panose="02040503050406030204" pitchFamily="18" charset="0"/>
-                                        </a:rPr>
-                                      </m:ctrlPr>
-                                    </m:accPr>
-                                    <m:e>
-                                      <m:r>
-                                        <a:rPr lang="zh-TW" altLang="en-US" sz="2000" b="1" i="1">
-                                          <a:latin typeface="Cambria Math" panose="02040503050406030204" pitchFamily="18" charset="0"/>
-                                        </a:rPr>
-                                        <m:t>𝜺</m:t>
-                                      </m:r>
-                                    </m:e>
-                                  </m:acc>
-                                  <m:r>
-                                    <a:rPr lang="en-US" altLang="zh-TW" sz="2000" i="1">
-                                      <a:latin typeface="Cambria Math" panose="02040503050406030204" pitchFamily="18" charset="0"/>
-                                    </a:rPr>
-                                    <m:t>,</m:t>
-                                  </m:r>
-                                  <m:r>
-                                    <a:rPr lang="en-US" altLang="zh-TW" sz="2000" b="0" i="1" smtClean="0">
-                                      <a:latin typeface="Cambria Math" panose="02040503050406030204" pitchFamily="18" charset="0"/>
-                                    </a:rPr>
-                                    <m:t>±1</m:t>
-                                  </m:r>
-                                </m:sup>
-                              </m:sSubSup>
-                              <m:d>
-                                <m:dPr>
-                                  <m:ctrlPr>
-                                    <a:rPr lang="en-US" altLang="zh-TW" sz="2000" i="1">
-                                      <a:latin typeface="Cambria Math" panose="02040503050406030204" pitchFamily="18" charset="0"/>
-                                    </a:rPr>
-                                  </m:ctrlPr>
-                                </m:dPr>
-                                <m:e>
-                                  <m:sSub>
-                                    <m:sSubPr>
-                                      <m:ctrlPr>
-                                        <a:rPr lang="en-US" altLang="zh-TW" sz="2000" i="1">
-                                          <a:latin typeface="Cambria Math" panose="02040503050406030204" pitchFamily="18" charset="0"/>
-                                        </a:rPr>
-                                      </m:ctrlPr>
-                                    </m:sSubPr>
-                                    <m:e>
-                                      <m:r>
-                                        <a:rPr lang="en-US" altLang="zh-TW" sz="2000" b="1" i="1">
-                                          <a:latin typeface="Cambria Math" panose="02040503050406030204" pitchFamily="18" charset="0"/>
-                                        </a:rPr>
-                                        <m:t>𝑹</m:t>
-                                      </m:r>
-                                    </m:e>
-                                    <m:sub>
-                                      <m:r>
-                                        <a:rPr lang="en-US" altLang="zh-TW" sz="2000" i="1">
-                                          <a:latin typeface="Cambria Math" panose="02040503050406030204" pitchFamily="18" charset="0"/>
-                                        </a:rPr>
-                                        <m:t>𝑐</m:t>
-                                      </m:r>
-                                    </m:sub>
-                                  </m:sSub>
-                                  <m:r>
-                                    <a:rPr lang="en-US" altLang="zh-TW" sz="2000" i="1">
-                                      <a:latin typeface="Cambria Math" panose="02040503050406030204" pitchFamily="18" charset="0"/>
-                                    </a:rPr>
-                                    <m:t>, </m:t>
-                                  </m:r>
-                                  <m:r>
-                                    <a:rPr lang="en-US" altLang="zh-TW" sz="2000" b="1" i="1">
-                                      <a:latin typeface="Cambria Math" panose="02040503050406030204" pitchFamily="18" charset="0"/>
-                                    </a:rPr>
-                                    <m:t>𝒓</m:t>
-                                  </m:r>
-                                  <m:r>
-                                    <a:rPr lang="en-US" altLang="zh-TW" sz="2000" i="1">
-                                      <a:latin typeface="Cambria Math" panose="02040503050406030204" pitchFamily="18" charset="0"/>
-                                    </a:rPr>
-                                    <m:t>=0</m:t>
-                                  </m:r>
-                                </m:e>
-                              </m:d>
-                            </m:e>
-                          </m:d>
-                        </m:e>
-                        <m:sup>
-                          <m:r>
-                            <a:rPr lang="en-US" altLang="zh-TW" sz="2000" i="1" dirty="0">
-                              <a:latin typeface="Cambria Math" panose="02040503050406030204" pitchFamily="18" charset="0"/>
-                              <a:ea typeface="Cambria Math" panose="02040503050406030204" pitchFamily="18" charset="0"/>
-                            </a:rPr>
-                            <m:t>2</m:t>
-                          </m:r>
-                        </m:sup>
-                      </m:sSup>
-                    </m:oMath>
-                  </m:oMathPara>
-                </a14:m>
-                <a:endParaRPr lang="zh-TW" altLang="en-US" sz="2000" dirty="0"/>
-              </a:p>
-            </p:txBody>
-          </p:sp>
-        </mc:Choice>
-        <mc:Fallback xmlns="">
-          <p:sp>
-            <p:nvSpPr>
-              <p:cNvPr id="137" name="矩形 136">
-                <a:extLst>
-                  <a:ext uri="{FF2B5EF4-FFF2-40B4-BE49-F238E27FC236}">
-                    <a16:creationId xmlns:a16="http://schemas.microsoft.com/office/drawing/2014/main" id="{778139C7-0D2D-4EEB-8A6F-2E9519499325}"/>
-                  </a:ext>
-                </a:extLst>
-              </p:cNvPr>
-              <p:cNvSpPr>
-                <a:spLocks noRot="1" noChangeAspect="1" noMove="1" noResize="1" noEditPoints="1" noAdjustHandles="1" noChangeArrowheads="1" noChangeShapeType="1" noTextEdit="1"/>
-              </p:cNvSpPr>
-              <p:nvPr/>
-            </p:nvSpPr>
-            <p:spPr>
-              <a:xfrm>
-                <a:off x="7697250" y="5899208"/>
-                <a:ext cx="2287870" cy="528030"/>
-              </a:xfrm>
-              <a:prstGeom prst="rect">
-                <a:avLst/>
-              </a:prstGeom>
-              <a:blipFill>
-                <a:blip r:embed="rId23"/>
                 <a:stretch>
                   <a:fillRect/>
                 </a:stretch>
@@ -10611,8 +8839,8 @@
           </a:p>
         </p:txBody>
       </p:sp>
-      <mc:AlternateContent xmlns:mc="http://schemas.openxmlformats.org/markup-compatibility/2006" xmlns:a14="http://schemas.microsoft.com/office/drawing/2010/main">
-        <mc:Choice Requires="a14">
+      <mc:AlternateContent xmlns:mc="http://schemas.openxmlformats.org/markup-compatibility/2006">
+        <mc:Choice xmlns:a14="http://schemas.microsoft.com/office/drawing/2010/main" Requires="a14">
           <p:sp>
             <p:nvSpPr>
               <p:cNvPr id="49" name="矩形: 圓角 48">
@@ -10628,7 +8856,7 @@
             <p:spPr>
               <a:xfrm>
                 <a:off x="4956000" y="5330731"/>
-                <a:ext cx="1702800" cy="604800"/>
+                <a:ext cx="2068914" cy="604800"/>
               </a:xfrm>
               <a:prstGeom prst="roundRect">
                 <a:avLst>
@@ -10686,7 +8914,7 @@
                         <m:accPr>
                           <m:chr m:val="̂"/>
                           <m:ctrlPr>
-                            <a:rPr lang="en-US" altLang="zh-TW" sz="2000" b="1" i="1">
+                            <a:rPr lang="en-US" altLang="zh-TW" sz="2000" b="1" i="1" smtClean="0">
                               <a:latin typeface="Cambria Math" panose="02040503050406030204" pitchFamily="18" charset="0"/>
                             </a:rPr>
                           </m:ctrlPr>
@@ -10706,54 +8934,90 @@
                         </a:rPr>
                         <m:t>=</m:t>
                       </m:r>
-                      <m:acc>
-                        <m:accPr>
-                          <m:chr m:val="̂"/>
+                      <m:d>
+                        <m:dPr>
+                          <m:ctrlPr>
+                            <a:rPr lang="en-US" altLang="zh-TW" sz="2000" b="1" i="1" smtClean="0">
+                              <a:latin typeface="Cambria Math" panose="02040503050406030204" pitchFamily="18" charset="0"/>
+                            </a:rPr>
+                          </m:ctrlPr>
+                        </m:dPr>
+                        <m:e>
+                          <m:acc>
+                            <m:accPr>
+                              <m:chr m:val="̂"/>
+                              <m:ctrlPr>
+                                <a:rPr lang="en-US" altLang="zh-TW" sz="2000" b="1" i="1">
+                                  <a:latin typeface="Cambria Math" panose="02040503050406030204" pitchFamily="18" charset="0"/>
+                                </a:rPr>
+                              </m:ctrlPr>
+                            </m:accPr>
+                            <m:e>
+                              <m:r>
+                                <a:rPr lang="en-US" altLang="zh-TW" sz="2000" b="1" i="1">
+                                  <a:latin typeface="Cambria Math" panose="02040503050406030204" pitchFamily="18" charset="0"/>
+                                </a:rPr>
+                                <m:t>𝒙</m:t>
+                              </m:r>
+                            </m:e>
+                          </m:acc>
+                          <m:r>
+                            <a:rPr lang="en-US" altLang="zh-TW" sz="2000" i="1">
+                              <a:latin typeface="Cambria Math" panose="02040503050406030204" pitchFamily="18" charset="0"/>
+                            </a:rPr>
+                            <m:t>−</m:t>
+                          </m:r>
+                          <m:r>
+                            <a:rPr lang="en-US" altLang="zh-TW" sz="2000" i="1">
+                              <a:latin typeface="Cambria Math" panose="02040503050406030204" pitchFamily="18" charset="0"/>
+                            </a:rPr>
+                            <m:t>𝑖</m:t>
+                          </m:r>
+                          <m:acc>
+                            <m:accPr>
+                              <m:chr m:val="̂"/>
+                              <m:ctrlPr>
+                                <a:rPr lang="en-US" altLang="zh-TW" sz="2000" b="1" i="1">
+                                  <a:latin typeface="Cambria Math" panose="02040503050406030204" pitchFamily="18" charset="0"/>
+                                </a:rPr>
+                              </m:ctrlPr>
+                            </m:accPr>
+                            <m:e>
+                              <m:r>
+                                <a:rPr lang="en-US" altLang="zh-TW" sz="2000" b="1" i="1">
+                                  <a:latin typeface="Cambria Math" panose="02040503050406030204" pitchFamily="18" charset="0"/>
+                                </a:rPr>
+                                <m:t>𝒚</m:t>
+                              </m:r>
+                            </m:e>
+                          </m:acc>
+                        </m:e>
+                      </m:d>
+                      <m:r>
+                        <a:rPr lang="en-US" altLang="zh-TW" sz="2000" b="1" i="1">
+                          <a:latin typeface="Cambria Math" panose="02040503050406030204" pitchFamily="18" charset="0"/>
+                        </a:rPr>
+                        <m:t>/</m:t>
+                      </m:r>
+                      <m:rad>
+                        <m:radPr>
+                          <m:degHide m:val="on"/>
                           <m:ctrlPr>
                             <a:rPr lang="en-US" altLang="zh-TW" sz="2000" b="1" i="1">
                               <a:latin typeface="Cambria Math" panose="02040503050406030204" pitchFamily="18" charset="0"/>
                             </a:rPr>
                           </m:ctrlPr>
-                        </m:accPr>
+                        </m:radPr>
+                        <m:deg/>
                         <m:e>
                           <m:r>
                             <a:rPr lang="en-US" altLang="zh-TW" sz="2000" b="1" i="1">
                               <a:latin typeface="Cambria Math" panose="02040503050406030204" pitchFamily="18" charset="0"/>
                             </a:rPr>
-                            <m:t>𝒙</m:t>
+                            <m:t>𝟐</m:t>
                           </m:r>
                         </m:e>
-                      </m:acc>
-                      <m:r>
-                        <a:rPr lang="en-US" altLang="zh-TW" sz="2000" i="1">
-                          <a:latin typeface="Cambria Math" panose="02040503050406030204" pitchFamily="18" charset="0"/>
-                        </a:rPr>
-                        <m:t>−</m:t>
-                      </m:r>
-                      <m:r>
-                        <a:rPr lang="en-US" altLang="zh-TW" sz="2000" i="1">
-                          <a:latin typeface="Cambria Math" panose="02040503050406030204" pitchFamily="18" charset="0"/>
-                        </a:rPr>
-                        <m:t>𝑖</m:t>
-                      </m:r>
-                      <m:acc>
-                        <m:accPr>
-                          <m:chr m:val="̂"/>
-                          <m:ctrlPr>
-                            <a:rPr lang="en-US" altLang="zh-TW" sz="2000" b="1" i="1">
-                              <a:latin typeface="Cambria Math" panose="02040503050406030204" pitchFamily="18" charset="0"/>
-                            </a:rPr>
-                          </m:ctrlPr>
-                        </m:accPr>
-                        <m:e>
-                          <m:r>
-                            <a:rPr lang="en-US" altLang="zh-TW" sz="2000" b="1" i="1">
-                              <a:latin typeface="Cambria Math" panose="02040503050406030204" pitchFamily="18" charset="0"/>
-                            </a:rPr>
-                            <m:t>𝒚</m:t>
-                          </m:r>
-                        </m:e>
-                      </m:acc>
+                      </m:rad>
                     </m:oMath>
                   </m:oMathPara>
                 </a14:m>
@@ -10765,7 +9029,7 @@
             </p:txBody>
           </p:sp>
         </mc:Choice>
-        <mc:Fallback xmlns="">
+        <mc:Fallback>
           <p:sp>
             <p:nvSpPr>
               <p:cNvPr id="49" name="矩形: 圓角 48">
@@ -10783,7 +9047,7 @@
             <p:spPr>
               <a:xfrm>
                 <a:off x="4956000" y="5330731"/>
-                <a:ext cx="1702800" cy="604800"/>
+                <a:ext cx="2068914" cy="604800"/>
               </a:xfrm>
               <a:prstGeom prst="roundRect">
                 <a:avLst>
@@ -10793,7 +9057,7 @@
               <a:blipFill>
                 <a:blip r:embed="rId26"/>
                 <a:stretch>
-                  <a:fillRect r="-12857"/>
+                  <a:fillRect/>
                 </a:stretch>
               </a:blipFill>
             </p:spPr>
@@ -10812,8 +9076,8 @@
           </p:sp>
         </mc:Fallback>
       </mc:AlternateContent>
-      <mc:AlternateContent xmlns:mc="http://schemas.openxmlformats.org/markup-compatibility/2006" xmlns:a14="http://schemas.microsoft.com/office/drawing/2010/main">
-        <mc:Choice Requires="a14">
+      <mc:AlternateContent xmlns:mc="http://schemas.openxmlformats.org/markup-compatibility/2006">
+        <mc:Choice xmlns:a14="http://schemas.microsoft.com/office/drawing/2010/main" Requires="a14">
           <p:sp>
             <p:nvSpPr>
               <p:cNvPr id="25" name="矩形: 圓角 24">
@@ -10829,7 +9093,7 @@
             <p:spPr>
               <a:xfrm>
                 <a:off x="3000" y="5330731"/>
-                <a:ext cx="1702800" cy="604800"/>
+                <a:ext cx="2068914" cy="604800"/>
               </a:xfrm>
               <a:prstGeom prst="roundRect">
                 <a:avLst>
@@ -10887,7 +9151,7 @@
                         <m:accPr>
                           <m:chr m:val="̂"/>
                           <m:ctrlPr>
-                            <a:rPr lang="en-US" altLang="zh-TW" sz="2000" b="1" i="1">
+                            <a:rPr lang="en-US" altLang="zh-TW" sz="2000" b="1" i="1" smtClean="0">
                               <a:latin typeface="Cambria Math" panose="02040503050406030204" pitchFamily="18" charset="0"/>
                             </a:rPr>
                           </m:ctrlPr>
@@ -10907,54 +9171,90 @@
                         </a:rPr>
                         <m:t>=</m:t>
                       </m:r>
-                      <m:acc>
-                        <m:accPr>
-                          <m:chr m:val="̂"/>
+                      <m:d>
+                        <m:dPr>
                           <m:ctrlPr>
-                            <a:rPr lang="en-US" altLang="zh-TW" sz="2000" b="1" i="1">
+                            <a:rPr lang="en-US" altLang="zh-TW" sz="2000" b="1" i="1" smtClean="0">
                               <a:latin typeface="Cambria Math" panose="02040503050406030204" pitchFamily="18" charset="0"/>
                             </a:rPr>
                           </m:ctrlPr>
-                        </m:accPr>
+                        </m:dPr>
                         <m:e>
+                          <m:acc>
+                            <m:accPr>
+                              <m:chr m:val="̂"/>
+                              <m:ctrlPr>
+                                <a:rPr lang="en-US" altLang="zh-TW" sz="2000" b="1" i="1">
+                                  <a:latin typeface="Cambria Math" panose="02040503050406030204" pitchFamily="18" charset="0"/>
+                                </a:rPr>
+                              </m:ctrlPr>
+                            </m:accPr>
+                            <m:e>
+                              <m:r>
+                                <a:rPr lang="en-US" altLang="zh-TW" sz="2000" b="1" i="1">
+                                  <a:latin typeface="Cambria Math" panose="02040503050406030204" pitchFamily="18" charset="0"/>
+                                </a:rPr>
+                                <m:t>𝒙</m:t>
+                              </m:r>
+                            </m:e>
+                          </m:acc>
                           <m:r>
-                            <a:rPr lang="en-US" altLang="zh-TW" sz="2000" b="1" i="1">
+                            <a:rPr lang="en-US" altLang="zh-TW" sz="2000" i="1">
                               <a:latin typeface="Cambria Math" panose="02040503050406030204" pitchFamily="18" charset="0"/>
                             </a:rPr>
-                            <m:t>𝒙</m:t>
+                            <m:t>+</m:t>
                           </m:r>
+                          <m:r>
+                            <a:rPr lang="en-US" altLang="zh-TW" sz="2000" i="1">
+                              <a:latin typeface="Cambria Math" panose="02040503050406030204" pitchFamily="18" charset="0"/>
+                            </a:rPr>
+                            <m:t>𝑖</m:t>
+                          </m:r>
+                          <m:acc>
+                            <m:accPr>
+                              <m:chr m:val="̂"/>
+                              <m:ctrlPr>
+                                <a:rPr lang="en-US" altLang="zh-TW" sz="2000" b="1" i="1">
+                                  <a:latin typeface="Cambria Math" panose="02040503050406030204" pitchFamily="18" charset="0"/>
+                                </a:rPr>
+                              </m:ctrlPr>
+                            </m:accPr>
+                            <m:e>
+                              <m:r>
+                                <a:rPr lang="en-US" altLang="zh-TW" sz="2000" b="1" i="1">
+                                  <a:latin typeface="Cambria Math" panose="02040503050406030204" pitchFamily="18" charset="0"/>
+                                </a:rPr>
+                                <m:t>𝒚</m:t>
+                              </m:r>
+                            </m:e>
+                          </m:acc>
                         </m:e>
-                      </m:acc>
+                      </m:d>
                       <m:r>
-                        <a:rPr lang="en-US" altLang="zh-TW" sz="2000" i="1">
+                        <a:rPr lang="en-US" altLang="zh-TW" sz="2000" b="1" i="1" smtClean="0">
                           <a:latin typeface="Cambria Math" panose="02040503050406030204" pitchFamily="18" charset="0"/>
                         </a:rPr>
-                        <m:t>+</m:t>
+                        <m:t>/</m:t>
                       </m:r>
-                      <m:r>
-                        <a:rPr lang="en-US" altLang="zh-TW" sz="2000" i="1">
-                          <a:latin typeface="Cambria Math" panose="02040503050406030204" pitchFamily="18" charset="0"/>
-                        </a:rPr>
-                        <m:t>𝑖</m:t>
-                      </m:r>
-                      <m:acc>
-                        <m:accPr>
-                          <m:chr m:val="̂"/>
+                      <m:rad>
+                        <m:radPr>
+                          <m:degHide m:val="on"/>
                           <m:ctrlPr>
-                            <a:rPr lang="en-US" altLang="zh-TW" sz="2000" b="1" i="1">
+                            <a:rPr lang="en-US" altLang="zh-TW" sz="2000" b="1" i="1" smtClean="0">
                               <a:latin typeface="Cambria Math" panose="02040503050406030204" pitchFamily="18" charset="0"/>
                             </a:rPr>
                           </m:ctrlPr>
-                        </m:accPr>
+                        </m:radPr>
+                        <m:deg/>
                         <m:e>
                           <m:r>
-                            <a:rPr lang="en-US" altLang="zh-TW" sz="2000" b="1" i="1">
+                            <a:rPr lang="en-US" altLang="zh-TW" sz="2000" b="1" i="1" smtClean="0">
                               <a:latin typeface="Cambria Math" panose="02040503050406030204" pitchFamily="18" charset="0"/>
                             </a:rPr>
-                            <m:t>𝒚</m:t>
+                            <m:t>𝟐</m:t>
                           </m:r>
                         </m:e>
-                      </m:acc>
+                      </m:rad>
                     </m:oMath>
                   </m:oMathPara>
                 </a14:m>
@@ -10966,7 +9266,7 @@
             </p:txBody>
           </p:sp>
         </mc:Choice>
-        <mc:Fallback xmlns="">
+        <mc:Fallback>
           <p:sp>
             <p:nvSpPr>
               <p:cNvPr id="25" name="矩形: 圓角 24">
@@ -10984,7 +9284,7 @@
             <p:spPr>
               <a:xfrm>
                 <a:off x="3000" y="5330731"/>
-                <a:ext cx="1702800" cy="604800"/>
+                <a:ext cx="2068914" cy="604800"/>
               </a:xfrm>
               <a:prstGeom prst="roundRect">
                 <a:avLst>
@@ -10994,7 +9294,7 @@
               <a:blipFill>
                 <a:blip r:embed="rId27"/>
                 <a:stretch>
-                  <a:fillRect r="-12811"/>
+                  <a:fillRect/>
                 </a:stretch>
               </a:blipFill>
             </p:spPr>
@@ -11013,8 +9313,8 @@
           </p:sp>
         </mc:Fallback>
       </mc:AlternateContent>
-      <mc:AlternateContent xmlns:mc="http://schemas.openxmlformats.org/markup-compatibility/2006" xmlns:a14="http://schemas.microsoft.com/office/drawing/2010/main">
-        <mc:Choice Requires="a14">
+      <mc:AlternateContent xmlns:mc="http://schemas.openxmlformats.org/markup-compatibility/2006">
+        <mc:Choice xmlns:a14="http://schemas.microsoft.com/office/drawing/2010/main" Requires="a14">
           <p:sp>
             <p:nvSpPr>
               <p:cNvPr id="56" name="矩形: 圓角 55">
@@ -11030,7 +9330,7 @@
             <p:spPr>
               <a:xfrm>
                 <a:off x="4956000" y="695233"/>
-                <a:ext cx="1702800" cy="604800"/>
+                <a:ext cx="2068914" cy="604800"/>
               </a:xfrm>
               <a:prstGeom prst="roundRect">
                 <a:avLst>
@@ -11137,7 +9437,7 @@
             </p:txBody>
           </p:sp>
         </mc:Choice>
-        <mc:Fallback xmlns="">
+        <mc:Fallback>
           <p:sp>
             <p:nvSpPr>
               <p:cNvPr id="56" name="矩形: 圓角 55">
@@ -11155,7 +9455,7 @@
             <p:spPr>
               <a:xfrm>
                 <a:off x="4956000" y="695233"/>
-                <a:ext cx="1702800" cy="604800"/>
+                <a:ext cx="2068914" cy="604800"/>
               </a:xfrm>
               <a:prstGeom prst="roundRect">
                 <a:avLst>
@@ -11184,8 +9484,8 @@
           </p:sp>
         </mc:Fallback>
       </mc:AlternateContent>
-      <mc:AlternateContent xmlns:mc="http://schemas.openxmlformats.org/markup-compatibility/2006" xmlns:a14="http://schemas.microsoft.com/office/drawing/2010/main">
-        <mc:Choice Requires="a14">
+      <mc:AlternateContent xmlns:mc="http://schemas.openxmlformats.org/markup-compatibility/2006">
+        <mc:Choice xmlns:a14="http://schemas.microsoft.com/office/drawing/2010/main" Requires="a14">
           <p:sp>
             <p:nvSpPr>
               <p:cNvPr id="77" name="矩形: 圓角 76">
@@ -11201,7 +9501,7 @@
             <p:spPr>
               <a:xfrm>
                 <a:off x="3000" y="695841"/>
-                <a:ext cx="1702800" cy="604800"/>
+                <a:ext cx="2068914" cy="604800"/>
               </a:xfrm>
               <a:prstGeom prst="roundRect">
                 <a:avLst>
@@ -11308,7 +9608,7 @@
             </p:txBody>
           </p:sp>
         </mc:Choice>
-        <mc:Fallback xmlns="">
+        <mc:Fallback>
           <p:sp>
             <p:nvSpPr>
               <p:cNvPr id="77" name="矩形: 圓角 76">
@@ -11326,7 +9626,7 @@
             <p:spPr>
               <a:xfrm>
                 <a:off x="3000" y="695841"/>
-                <a:ext cx="1702800" cy="604800"/>
+                <a:ext cx="2068914" cy="604800"/>
               </a:xfrm>
               <a:prstGeom prst="roundRect">
                 <a:avLst>
@@ -11670,6 +9970,2034 @@
           </a:prstGeom>
         </p:spPr>
       </p:pic>
+      <mc:AlternateContent xmlns:mc="http://schemas.openxmlformats.org/markup-compatibility/2006">
+        <mc:Choice xmlns:a14="http://schemas.microsoft.com/office/drawing/2010/main" Requires="a14">
+          <p:sp>
+            <p:nvSpPr>
+              <p:cNvPr id="55" name="矩形 54">
+                <a:extLst>
+                  <a:ext uri="{FF2B5EF4-FFF2-40B4-BE49-F238E27FC236}">
+                    <a16:creationId xmlns:a16="http://schemas.microsoft.com/office/drawing/2014/main" id="{05426F10-216E-470C-94FF-8FBAC4B58B8E}"/>
+                  </a:ext>
+                </a:extLst>
+              </p:cNvPr>
+              <p:cNvSpPr/>
+              <p:nvPr/>
+            </p:nvSpPr>
+            <p:spPr>
+              <a:xfrm>
+                <a:off x="1230464" y="1352357"/>
+                <a:ext cx="1198533" cy="555152"/>
+              </a:xfrm>
+              <a:prstGeom prst="rect">
+                <a:avLst/>
+              </a:prstGeom>
+            </p:spPr>
+            <p:txBody>
+              <a:bodyPr wrap="none">
+                <a:spAutoFit/>
+              </a:bodyPr>
+              <a:lstStyle/>
+              <a:p>
+                <a:pPr algn="ctr"/>
+                <a14:m>
+                  <m:oMathPara xmlns:m="http://schemas.openxmlformats.org/officeDocument/2006/math">
+                    <m:oMathParaPr>
+                      <m:jc m:val="centerGroup"/>
+                    </m:oMathParaPr>
+                    <m:oMath xmlns:m="http://schemas.openxmlformats.org/officeDocument/2006/math">
+                      <m:sSup>
+                        <m:sSupPr>
+                          <m:ctrlPr>
+                            <a:rPr lang="en-US" altLang="zh-TW" sz="2000" i="1" smtClean="0">
+                              <a:latin typeface="Cambria Math" panose="02040503050406030204" pitchFamily="18" charset="0"/>
+                            </a:rPr>
+                          </m:ctrlPr>
+                        </m:sSupPr>
+                        <m:e>
+                          <m:d>
+                            <m:dPr>
+                              <m:begChr m:val="|"/>
+                              <m:endChr m:val="|"/>
+                              <m:ctrlPr>
+                                <a:rPr lang="en-US" altLang="zh-TW" sz="2000" i="1">
+                                  <a:latin typeface="Cambria Math" panose="02040503050406030204" pitchFamily="18" charset="0"/>
+                                </a:rPr>
+                              </m:ctrlPr>
+                            </m:dPr>
+                            <m:e>
+                              <m:sSubSup>
+                                <m:sSubSupPr>
+                                  <m:ctrlPr>
+                                    <a:rPr lang="en-US" altLang="zh-TW" sz="2000" i="1">
+                                      <a:latin typeface="Cambria Math" panose="02040503050406030204" pitchFamily="18" charset="0"/>
+                                    </a:rPr>
+                                  </m:ctrlPr>
+                                </m:sSubSupPr>
+                                <m:e>
+                                  <m:acc>
+                                    <m:accPr>
+                                      <m:chr m:val="̃"/>
+                                      <m:ctrlPr>
+                                        <a:rPr lang="en-US" altLang="zh-TW" sz="2000" i="1">
+                                          <a:latin typeface="Cambria Math" panose="02040503050406030204" pitchFamily="18" charset="0"/>
+                                        </a:rPr>
+                                      </m:ctrlPr>
+                                    </m:accPr>
+                                    <m:e>
+                                      <m:r>
+                                        <a:rPr lang="en-US" altLang="zh-TW" sz="2000" i="1">
+                                          <a:latin typeface="Cambria Math" panose="02040503050406030204" pitchFamily="18" charset="0"/>
+                                        </a:rPr>
+                                        <m:t>𝑀</m:t>
+                                      </m:r>
+                                    </m:e>
+                                  </m:acc>
+                                </m:e>
+                                <m:sub>
+                                  <m:r>
+                                    <a:rPr lang="en-US" altLang="zh-TW" sz="2000" i="1">
+                                      <a:latin typeface="Cambria Math" panose="02040503050406030204" pitchFamily="18" charset="0"/>
+                                    </a:rPr>
+                                    <m:t>𝑆</m:t>
+                                  </m:r>
+                                  <m:r>
+                                    <a:rPr lang="en-US" altLang="zh-TW" sz="2000" i="1">
+                                      <a:latin typeface="Cambria Math" panose="02040503050406030204" pitchFamily="18" charset="0"/>
+                                    </a:rPr>
+                                    <m:t>,</m:t>
+                                  </m:r>
+                                  <m:r>
+                                    <a:rPr lang="en-US" altLang="zh-TW" sz="2000" b="1" i="1">
+                                      <a:latin typeface="Cambria Math" panose="02040503050406030204" pitchFamily="18" charset="0"/>
+                                    </a:rPr>
+                                    <m:t>𝑸</m:t>
+                                  </m:r>
+                                </m:sub>
+                                <m:sup>
+                                  <m:acc>
+                                    <m:accPr>
+                                      <m:chr m:val="̂"/>
+                                      <m:ctrlPr>
+                                        <a:rPr lang="en-US" altLang="zh-TW" sz="2000" b="1" i="1">
+                                          <a:latin typeface="Cambria Math" panose="02040503050406030204" pitchFamily="18" charset="0"/>
+                                        </a:rPr>
+                                      </m:ctrlPr>
+                                    </m:accPr>
+                                    <m:e>
+                                      <m:r>
+                                        <a:rPr lang="zh-TW" altLang="en-US" sz="2000" b="1" i="1">
+                                          <a:latin typeface="Cambria Math" panose="02040503050406030204" pitchFamily="18" charset="0"/>
+                                        </a:rPr>
+                                        <m:t>𝜺</m:t>
+                                      </m:r>
+                                    </m:e>
+                                  </m:acc>
+                                  <m:r>
+                                    <a:rPr lang="en-US" altLang="zh-TW" sz="2000" i="1">
+                                      <a:latin typeface="Cambria Math" panose="02040503050406030204" pitchFamily="18" charset="0"/>
+                                    </a:rPr>
+                                    <m:t>,</m:t>
+                                  </m:r>
+                                  <m:r>
+                                    <a:rPr lang="en-US" altLang="zh-TW" sz="2000" b="0" i="1" smtClean="0">
+                                      <a:latin typeface="Cambria Math" panose="02040503050406030204" pitchFamily="18" charset="0"/>
+                                    </a:rPr>
+                                    <m:t>±1</m:t>
+                                  </m:r>
+                                </m:sup>
+                              </m:sSubSup>
+                            </m:e>
+                          </m:d>
+                        </m:e>
+                        <m:sup>
+                          <m:r>
+                            <a:rPr lang="en-US" altLang="zh-TW" sz="2000" i="1">
+                              <a:latin typeface="Cambria Math" panose="02040503050406030204" pitchFamily="18" charset="0"/>
+                            </a:rPr>
+                            <m:t>2</m:t>
+                          </m:r>
+                        </m:sup>
+                      </m:sSup>
+                      <m:r>
+                        <a:rPr lang="en-US" altLang="zh-TW" sz="2000" i="1">
+                          <a:latin typeface="Cambria Math" panose="02040503050406030204" pitchFamily="18" charset="0"/>
+                        </a:rPr>
+                        <m:t> </m:t>
+                      </m:r>
+                    </m:oMath>
+                  </m:oMathPara>
+                </a14:m>
+                <a:endParaRPr lang="zh-TW" altLang="en-US" sz="2000" dirty="0"/>
+              </a:p>
+            </p:txBody>
+          </p:sp>
+        </mc:Choice>
+        <mc:Fallback>
+          <p:sp>
+            <p:nvSpPr>
+              <p:cNvPr id="55" name="矩形 54">
+                <a:extLst>
+                  <a:ext uri="{FF2B5EF4-FFF2-40B4-BE49-F238E27FC236}">
+                    <a16:creationId xmlns:a16="http://schemas.microsoft.com/office/drawing/2014/main" id="{05426F10-216E-470C-94FF-8FBAC4B58B8E}"/>
+                  </a:ext>
+                </a:extLst>
+              </p:cNvPr>
+              <p:cNvSpPr>
+                <a:spLocks noRot="1" noChangeAspect="1" noMove="1" noResize="1" noEditPoints="1" noAdjustHandles="1" noChangeArrowheads="1" noChangeShapeType="1" noTextEdit="1"/>
+              </p:cNvSpPr>
+              <p:nvPr/>
+            </p:nvSpPr>
+            <p:spPr>
+              <a:xfrm>
+                <a:off x="1230464" y="1352357"/>
+                <a:ext cx="1198533" cy="555152"/>
+              </a:xfrm>
+              <a:prstGeom prst="rect">
+                <a:avLst/>
+              </a:prstGeom>
+              <a:blipFill>
+                <a:blip r:embed="rId36"/>
+                <a:stretch>
+                  <a:fillRect/>
+                </a:stretch>
+              </a:blipFill>
+            </p:spPr>
+            <p:txBody>
+              <a:bodyPr/>
+              <a:lstStyle/>
+              <a:p>
+                <a:r>
+                  <a:rPr lang="zh-TW" altLang="en-US">
+                    <a:noFill/>
+                  </a:rPr>
+                  <a:t> </a:t>
+                </a:r>
+              </a:p>
+            </p:txBody>
+          </p:sp>
+        </mc:Fallback>
+      </mc:AlternateContent>
+      <mc:AlternateContent xmlns:mc="http://schemas.openxmlformats.org/markup-compatibility/2006">
+        <mc:Choice xmlns:a14="http://schemas.microsoft.com/office/drawing/2010/main" Requires="a14">
+          <p:sp>
+            <p:nvSpPr>
+              <p:cNvPr id="57" name="矩形 56">
+                <a:extLst>
+                  <a:ext uri="{FF2B5EF4-FFF2-40B4-BE49-F238E27FC236}">
+                    <a16:creationId xmlns:a16="http://schemas.microsoft.com/office/drawing/2014/main" id="{71DF72DB-AC6D-44CF-9900-BC2A68F4814C}"/>
+                  </a:ext>
+                </a:extLst>
+              </p:cNvPr>
+              <p:cNvSpPr/>
+              <p:nvPr/>
+            </p:nvSpPr>
+            <p:spPr>
+              <a:xfrm>
+                <a:off x="3017747" y="1218731"/>
+                <a:ext cx="1906932" cy="688778"/>
+              </a:xfrm>
+              <a:prstGeom prst="rect">
+                <a:avLst/>
+              </a:prstGeom>
+            </p:spPr>
+            <p:txBody>
+              <a:bodyPr wrap="none">
+                <a:spAutoFit/>
+              </a:bodyPr>
+              <a:lstStyle/>
+              <a:p>
+                <a:pPr algn="ctr"/>
+                <a14:m>
+                  <m:oMathPara xmlns:m="http://schemas.openxmlformats.org/officeDocument/2006/math">
+                    <m:oMathParaPr>
+                      <m:jc m:val="centerGroup"/>
+                    </m:oMathParaPr>
+                    <m:oMath xmlns:m="http://schemas.openxmlformats.org/officeDocument/2006/math">
+                      <m:sSup>
+                        <m:sSupPr>
+                          <m:ctrlPr>
+                            <a:rPr lang="en-US" altLang="zh-TW" sz="1600" i="1" dirty="0" smtClean="0">
+                              <a:latin typeface="Cambria Math" panose="02040503050406030204" pitchFamily="18" charset="0"/>
+                              <a:ea typeface="Cambria Math" panose="02040503050406030204" pitchFamily="18" charset="0"/>
+                            </a:rPr>
+                          </m:ctrlPr>
+                        </m:sSupPr>
+                        <m:e>
+                          <m:d>
+                            <m:dPr>
+                              <m:begChr m:val="|"/>
+                              <m:endChr m:val="|"/>
+                              <m:ctrlPr>
+                                <a:rPr lang="en-US" altLang="zh-TW" sz="1600" i="1" dirty="0">
+                                  <a:latin typeface="Cambria Math" panose="02040503050406030204" pitchFamily="18" charset="0"/>
+                                  <a:ea typeface="Cambria Math" panose="02040503050406030204" pitchFamily="18" charset="0"/>
+                                </a:rPr>
+                              </m:ctrlPr>
+                            </m:dPr>
+                            <m:e>
+                              <m:nary>
+                                <m:naryPr>
+                                  <m:chr m:val="∑"/>
+                                  <m:limLoc m:val="subSup"/>
+                                  <m:supHide m:val="on"/>
+                                  <m:ctrlPr>
+                                    <a:rPr lang="en-US" altLang="zh-TW" sz="1600" i="1" dirty="0" smtClean="0">
+                                      <a:latin typeface="Cambria Math" panose="02040503050406030204" pitchFamily="18" charset="0"/>
+                                      <a:ea typeface="Cambria Math" panose="02040503050406030204" pitchFamily="18" charset="0"/>
+                                    </a:rPr>
+                                  </m:ctrlPr>
+                                </m:naryPr>
+                                <m:sub>
+                                  <m:r>
+                                    <a:rPr lang="en-US" altLang="zh-TW" sz="1600" b="1" i="1">
+                                      <a:latin typeface="Cambria Math" panose="02040503050406030204" pitchFamily="18" charset="0"/>
+                                    </a:rPr>
+                                    <m:t>𝑸</m:t>
+                                  </m:r>
+                                </m:sub>
+                                <m:sup/>
+                                <m:e>
+                                  <m:sSubSup>
+                                    <m:sSubSupPr>
+                                      <m:ctrlPr>
+                                        <a:rPr lang="en-US" altLang="zh-TW" sz="1600" i="1">
+                                          <a:latin typeface="Cambria Math" panose="02040503050406030204" pitchFamily="18" charset="0"/>
+                                        </a:rPr>
+                                      </m:ctrlPr>
+                                    </m:sSubSupPr>
+                                    <m:e>
+                                      <m:acc>
+                                        <m:accPr>
+                                          <m:chr m:val="̃"/>
+                                          <m:ctrlPr>
+                                            <a:rPr lang="en-US" altLang="zh-TW" sz="1600" i="1">
+                                              <a:latin typeface="Cambria Math" panose="02040503050406030204" pitchFamily="18" charset="0"/>
+                                            </a:rPr>
+                                          </m:ctrlPr>
+                                        </m:accPr>
+                                        <m:e>
+                                          <m:r>
+                                            <a:rPr lang="en-US" altLang="zh-TW" sz="1600" i="1">
+                                              <a:latin typeface="Cambria Math" panose="02040503050406030204" pitchFamily="18" charset="0"/>
+                                            </a:rPr>
+                                            <m:t>𝑀</m:t>
+                                          </m:r>
+                                        </m:e>
+                                      </m:acc>
+                                    </m:e>
+                                    <m:sub>
+                                      <m:r>
+                                        <a:rPr lang="en-US" altLang="zh-TW" sz="1600" i="1">
+                                          <a:latin typeface="Cambria Math" panose="02040503050406030204" pitchFamily="18" charset="0"/>
+                                        </a:rPr>
+                                        <m:t>𝑆</m:t>
+                                      </m:r>
+                                      <m:r>
+                                        <a:rPr lang="en-US" altLang="zh-TW" sz="1600" i="1">
+                                          <a:latin typeface="Cambria Math" panose="02040503050406030204" pitchFamily="18" charset="0"/>
+                                        </a:rPr>
+                                        <m:t>,</m:t>
+                                      </m:r>
+                                      <m:r>
+                                        <a:rPr lang="en-US" altLang="zh-TW" sz="1600" b="1" i="1">
+                                          <a:latin typeface="Cambria Math" panose="02040503050406030204" pitchFamily="18" charset="0"/>
+                                        </a:rPr>
+                                        <m:t>𝑸</m:t>
+                                      </m:r>
+                                    </m:sub>
+                                    <m:sup>
+                                      <m:acc>
+                                        <m:accPr>
+                                          <m:chr m:val="̂"/>
+                                          <m:ctrlPr>
+                                            <a:rPr lang="en-US" altLang="zh-TW" sz="1600" b="1" i="1">
+                                              <a:latin typeface="Cambria Math" panose="02040503050406030204" pitchFamily="18" charset="0"/>
+                                            </a:rPr>
+                                          </m:ctrlPr>
+                                        </m:accPr>
+                                        <m:e>
+                                          <m:r>
+                                            <a:rPr lang="zh-TW" altLang="en-US" sz="1600" b="1" i="1">
+                                              <a:latin typeface="Cambria Math" panose="02040503050406030204" pitchFamily="18" charset="0"/>
+                                            </a:rPr>
+                                            <m:t>𝜺</m:t>
+                                          </m:r>
+                                        </m:e>
+                                      </m:acc>
+                                      <m:r>
+                                        <a:rPr lang="en-US" altLang="zh-TW" sz="1600" i="1">
+                                          <a:latin typeface="Cambria Math" panose="02040503050406030204" pitchFamily="18" charset="0"/>
+                                        </a:rPr>
+                                        <m:t>,</m:t>
+                                      </m:r>
+                                      <m:r>
+                                        <a:rPr lang="en-US" altLang="zh-TW" sz="1600" b="0" i="1" smtClean="0">
+                                          <a:latin typeface="Cambria Math" panose="02040503050406030204" pitchFamily="18" charset="0"/>
+                                        </a:rPr>
+                                        <m:t>±1</m:t>
+                                      </m:r>
+                                    </m:sup>
+                                  </m:sSubSup>
+                                </m:e>
+                              </m:nary>
+                              <m:sSup>
+                                <m:sSupPr>
+                                  <m:ctrlPr>
+                                    <a:rPr lang="en-US" altLang="zh-TW" sz="1600" b="0" i="1" dirty="0" smtClean="0">
+                                      <a:latin typeface="Cambria Math" panose="02040503050406030204" pitchFamily="18" charset="0"/>
+                                      <a:ea typeface="Cambria Math" panose="02040503050406030204" pitchFamily="18" charset="0"/>
+                                    </a:rPr>
+                                  </m:ctrlPr>
+                                </m:sSupPr>
+                                <m:e>
+                                  <m:r>
+                                    <a:rPr lang="en-US" altLang="zh-TW" sz="1600" b="0" i="1" dirty="0" smtClean="0">
+                                      <a:latin typeface="Cambria Math" panose="02040503050406030204" pitchFamily="18" charset="0"/>
+                                      <a:ea typeface="Cambria Math" panose="02040503050406030204" pitchFamily="18" charset="0"/>
+                                    </a:rPr>
+                                    <m:t>𝑒</m:t>
+                                  </m:r>
+                                </m:e>
+                                <m:sup>
+                                  <m:r>
+                                    <a:rPr lang="en-US" altLang="zh-TW" sz="1600" b="0" i="1" dirty="0" smtClean="0">
+                                      <a:latin typeface="Cambria Math" panose="02040503050406030204" pitchFamily="18" charset="0"/>
+                                      <a:ea typeface="Cambria Math" panose="02040503050406030204" pitchFamily="18" charset="0"/>
+                                    </a:rPr>
+                                    <m:t>𝑖</m:t>
+                                  </m:r>
+                                  <m:r>
+                                    <a:rPr lang="en-US" altLang="zh-TW" sz="1600" b="1" i="1" dirty="0" smtClean="0">
+                                      <a:latin typeface="Cambria Math" panose="02040503050406030204" pitchFamily="18" charset="0"/>
+                                      <a:ea typeface="Cambria Math" panose="02040503050406030204" pitchFamily="18" charset="0"/>
+                                    </a:rPr>
+                                    <m:t>𝑸</m:t>
+                                  </m:r>
+                                  <m:r>
+                                    <a:rPr lang="en-US" altLang="zh-TW" sz="1600" b="0" i="1" dirty="0" smtClean="0">
+                                      <a:latin typeface="Cambria Math" panose="02040503050406030204" pitchFamily="18" charset="0"/>
+                                      <a:ea typeface="Cambria Math" panose="02040503050406030204" pitchFamily="18" charset="0"/>
+                                    </a:rPr>
+                                    <m:t>⋅</m:t>
+                                  </m:r>
+                                  <m:sSub>
+                                    <m:sSubPr>
+                                      <m:ctrlPr>
+                                        <a:rPr lang="en-US" altLang="zh-TW" sz="1600" b="0" i="1" dirty="0" smtClean="0">
+                                          <a:latin typeface="Cambria Math" panose="02040503050406030204" pitchFamily="18" charset="0"/>
+                                          <a:ea typeface="Cambria Math" panose="02040503050406030204" pitchFamily="18" charset="0"/>
+                                        </a:rPr>
+                                      </m:ctrlPr>
+                                    </m:sSubPr>
+                                    <m:e>
+                                      <m:r>
+                                        <a:rPr lang="en-US" altLang="zh-TW" sz="1600" b="1" i="1" dirty="0" smtClean="0">
+                                          <a:latin typeface="Cambria Math" panose="02040503050406030204" pitchFamily="18" charset="0"/>
+                                          <a:ea typeface="Cambria Math" panose="02040503050406030204" pitchFamily="18" charset="0"/>
+                                        </a:rPr>
+                                        <m:t>𝑹</m:t>
+                                      </m:r>
+                                    </m:e>
+                                    <m:sub>
+                                      <m:r>
+                                        <a:rPr lang="en-US" altLang="zh-TW" sz="1600" b="0" i="1" dirty="0" smtClean="0">
+                                          <a:latin typeface="Cambria Math" panose="02040503050406030204" pitchFamily="18" charset="0"/>
+                                          <a:ea typeface="Cambria Math" panose="02040503050406030204" pitchFamily="18" charset="0"/>
+                                        </a:rPr>
+                                        <m:t>𝑐</m:t>
+                                      </m:r>
+                                    </m:sub>
+                                  </m:sSub>
+                                </m:sup>
+                              </m:sSup>
+                            </m:e>
+                          </m:d>
+                        </m:e>
+                        <m:sup>
+                          <m:r>
+                            <a:rPr lang="en-US" altLang="zh-TW" sz="1600" i="1" dirty="0">
+                              <a:latin typeface="Cambria Math" panose="02040503050406030204" pitchFamily="18" charset="0"/>
+                              <a:ea typeface="Cambria Math" panose="02040503050406030204" pitchFamily="18" charset="0"/>
+                            </a:rPr>
+                            <m:t>2</m:t>
+                          </m:r>
+                        </m:sup>
+                      </m:sSup>
+                    </m:oMath>
+                  </m:oMathPara>
+                </a14:m>
+                <a:endParaRPr lang="zh-TW" altLang="en-US" sz="1600" dirty="0"/>
+              </a:p>
+            </p:txBody>
+          </p:sp>
+        </mc:Choice>
+        <mc:Fallback>
+          <p:sp>
+            <p:nvSpPr>
+              <p:cNvPr id="57" name="矩形 56">
+                <a:extLst>
+                  <a:ext uri="{FF2B5EF4-FFF2-40B4-BE49-F238E27FC236}">
+                    <a16:creationId xmlns:a16="http://schemas.microsoft.com/office/drawing/2014/main" id="{71DF72DB-AC6D-44CF-9900-BC2A68F4814C}"/>
+                  </a:ext>
+                </a:extLst>
+              </p:cNvPr>
+              <p:cNvSpPr>
+                <a:spLocks noRot="1" noChangeAspect="1" noMove="1" noResize="1" noEditPoints="1" noAdjustHandles="1" noChangeArrowheads="1" noChangeShapeType="1" noTextEdit="1"/>
+              </p:cNvSpPr>
+              <p:nvPr/>
+            </p:nvSpPr>
+            <p:spPr>
+              <a:xfrm>
+                <a:off x="3017747" y="1218731"/>
+                <a:ext cx="1906932" cy="688778"/>
+              </a:xfrm>
+              <a:prstGeom prst="rect">
+                <a:avLst/>
+              </a:prstGeom>
+              <a:blipFill>
+                <a:blip r:embed="rId37"/>
+                <a:stretch>
+                  <a:fillRect/>
+                </a:stretch>
+              </a:blipFill>
+            </p:spPr>
+            <p:txBody>
+              <a:bodyPr/>
+              <a:lstStyle/>
+              <a:p>
+                <a:r>
+                  <a:rPr lang="zh-TW" altLang="en-US">
+                    <a:noFill/>
+                  </a:rPr>
+                  <a:t> </a:t>
+                </a:r>
+              </a:p>
+            </p:txBody>
+          </p:sp>
+        </mc:Fallback>
+      </mc:AlternateContent>
+      <mc:AlternateContent xmlns:mc="http://schemas.openxmlformats.org/markup-compatibility/2006">
+        <mc:Choice xmlns:a14="http://schemas.microsoft.com/office/drawing/2010/main" Requires="a14">
+          <p:sp>
+            <p:nvSpPr>
+              <p:cNvPr id="58" name="矩形 57">
+                <a:extLst>
+                  <a:ext uri="{FF2B5EF4-FFF2-40B4-BE49-F238E27FC236}">
+                    <a16:creationId xmlns:a16="http://schemas.microsoft.com/office/drawing/2014/main" id="{9DF4A951-F53E-4E34-84BC-C798BE6D74C9}"/>
+                  </a:ext>
+                </a:extLst>
+              </p:cNvPr>
+              <p:cNvSpPr/>
+              <p:nvPr/>
+            </p:nvSpPr>
+            <p:spPr>
+              <a:xfrm>
+                <a:off x="1230464" y="5965307"/>
+                <a:ext cx="1198533" cy="555152"/>
+              </a:xfrm>
+              <a:prstGeom prst="rect">
+                <a:avLst/>
+              </a:prstGeom>
+            </p:spPr>
+            <p:txBody>
+              <a:bodyPr wrap="none">
+                <a:spAutoFit/>
+              </a:bodyPr>
+              <a:lstStyle/>
+              <a:p>
+                <a:pPr algn="ctr"/>
+                <a14:m>
+                  <m:oMathPara xmlns:m="http://schemas.openxmlformats.org/officeDocument/2006/math">
+                    <m:oMathParaPr>
+                      <m:jc m:val="centerGroup"/>
+                    </m:oMathParaPr>
+                    <m:oMath xmlns:m="http://schemas.openxmlformats.org/officeDocument/2006/math">
+                      <m:sSup>
+                        <m:sSupPr>
+                          <m:ctrlPr>
+                            <a:rPr lang="en-US" altLang="zh-TW" sz="2000" i="1" smtClean="0">
+                              <a:latin typeface="Cambria Math" panose="02040503050406030204" pitchFamily="18" charset="0"/>
+                            </a:rPr>
+                          </m:ctrlPr>
+                        </m:sSupPr>
+                        <m:e>
+                          <m:d>
+                            <m:dPr>
+                              <m:begChr m:val="|"/>
+                              <m:endChr m:val="|"/>
+                              <m:ctrlPr>
+                                <a:rPr lang="en-US" altLang="zh-TW" sz="2000" i="1">
+                                  <a:latin typeface="Cambria Math" panose="02040503050406030204" pitchFamily="18" charset="0"/>
+                                </a:rPr>
+                              </m:ctrlPr>
+                            </m:dPr>
+                            <m:e>
+                              <m:sSubSup>
+                                <m:sSubSupPr>
+                                  <m:ctrlPr>
+                                    <a:rPr lang="en-US" altLang="zh-TW" sz="2000" i="1">
+                                      <a:latin typeface="Cambria Math" panose="02040503050406030204" pitchFamily="18" charset="0"/>
+                                    </a:rPr>
+                                  </m:ctrlPr>
+                                </m:sSubSupPr>
+                                <m:e>
+                                  <m:acc>
+                                    <m:accPr>
+                                      <m:chr m:val="̃"/>
+                                      <m:ctrlPr>
+                                        <a:rPr lang="en-US" altLang="zh-TW" sz="2000" i="1">
+                                          <a:latin typeface="Cambria Math" panose="02040503050406030204" pitchFamily="18" charset="0"/>
+                                        </a:rPr>
+                                      </m:ctrlPr>
+                                    </m:accPr>
+                                    <m:e>
+                                      <m:r>
+                                        <a:rPr lang="en-US" altLang="zh-TW" sz="2000" i="1">
+                                          <a:latin typeface="Cambria Math" panose="02040503050406030204" pitchFamily="18" charset="0"/>
+                                        </a:rPr>
+                                        <m:t>𝑀</m:t>
+                                      </m:r>
+                                    </m:e>
+                                  </m:acc>
+                                </m:e>
+                                <m:sub>
+                                  <m:r>
+                                    <a:rPr lang="en-US" altLang="zh-TW" sz="2000" i="1">
+                                      <a:latin typeface="Cambria Math" panose="02040503050406030204" pitchFamily="18" charset="0"/>
+                                    </a:rPr>
+                                    <m:t>𝑆</m:t>
+                                  </m:r>
+                                  <m:r>
+                                    <a:rPr lang="en-US" altLang="zh-TW" sz="2000" i="1">
+                                      <a:latin typeface="Cambria Math" panose="02040503050406030204" pitchFamily="18" charset="0"/>
+                                    </a:rPr>
+                                    <m:t>,</m:t>
+                                  </m:r>
+                                  <m:r>
+                                    <a:rPr lang="en-US" altLang="zh-TW" sz="2000" b="1" i="1">
+                                      <a:latin typeface="Cambria Math" panose="02040503050406030204" pitchFamily="18" charset="0"/>
+                                    </a:rPr>
+                                    <m:t>𝑸</m:t>
+                                  </m:r>
+                                </m:sub>
+                                <m:sup>
+                                  <m:acc>
+                                    <m:accPr>
+                                      <m:chr m:val="̂"/>
+                                      <m:ctrlPr>
+                                        <a:rPr lang="en-US" altLang="zh-TW" sz="2000" b="1" i="1">
+                                          <a:latin typeface="Cambria Math" panose="02040503050406030204" pitchFamily="18" charset="0"/>
+                                        </a:rPr>
+                                      </m:ctrlPr>
+                                    </m:accPr>
+                                    <m:e>
+                                      <m:r>
+                                        <a:rPr lang="zh-TW" altLang="en-US" sz="2000" b="1" i="1">
+                                          <a:latin typeface="Cambria Math" panose="02040503050406030204" pitchFamily="18" charset="0"/>
+                                        </a:rPr>
+                                        <m:t>𝜺</m:t>
+                                      </m:r>
+                                    </m:e>
+                                  </m:acc>
+                                  <m:r>
+                                    <a:rPr lang="en-US" altLang="zh-TW" sz="2000" i="1">
+                                      <a:latin typeface="Cambria Math" panose="02040503050406030204" pitchFamily="18" charset="0"/>
+                                    </a:rPr>
+                                    <m:t>,</m:t>
+                                  </m:r>
+                                  <m:r>
+                                    <a:rPr lang="en-US" altLang="zh-TW" sz="2000" b="0" i="1" smtClean="0">
+                                      <a:latin typeface="Cambria Math" panose="02040503050406030204" pitchFamily="18" charset="0"/>
+                                    </a:rPr>
+                                    <m:t>±1</m:t>
+                                  </m:r>
+                                </m:sup>
+                              </m:sSubSup>
+                            </m:e>
+                          </m:d>
+                        </m:e>
+                        <m:sup>
+                          <m:r>
+                            <a:rPr lang="en-US" altLang="zh-TW" sz="2000" i="1">
+                              <a:latin typeface="Cambria Math" panose="02040503050406030204" pitchFamily="18" charset="0"/>
+                            </a:rPr>
+                            <m:t>2</m:t>
+                          </m:r>
+                        </m:sup>
+                      </m:sSup>
+                      <m:r>
+                        <a:rPr lang="en-US" altLang="zh-TW" sz="2000" i="1">
+                          <a:latin typeface="Cambria Math" panose="02040503050406030204" pitchFamily="18" charset="0"/>
+                        </a:rPr>
+                        <m:t> </m:t>
+                      </m:r>
+                    </m:oMath>
+                  </m:oMathPara>
+                </a14:m>
+                <a:endParaRPr lang="zh-TW" altLang="en-US" sz="2000" dirty="0"/>
+              </a:p>
+            </p:txBody>
+          </p:sp>
+        </mc:Choice>
+        <mc:Fallback>
+          <p:sp>
+            <p:nvSpPr>
+              <p:cNvPr id="58" name="矩形 57">
+                <a:extLst>
+                  <a:ext uri="{FF2B5EF4-FFF2-40B4-BE49-F238E27FC236}">
+                    <a16:creationId xmlns:a16="http://schemas.microsoft.com/office/drawing/2014/main" id="{9DF4A951-F53E-4E34-84BC-C798BE6D74C9}"/>
+                  </a:ext>
+                </a:extLst>
+              </p:cNvPr>
+              <p:cNvSpPr>
+                <a:spLocks noRot="1" noChangeAspect="1" noMove="1" noResize="1" noEditPoints="1" noAdjustHandles="1" noChangeArrowheads="1" noChangeShapeType="1" noTextEdit="1"/>
+              </p:cNvSpPr>
+              <p:nvPr/>
+            </p:nvSpPr>
+            <p:spPr>
+              <a:xfrm>
+                <a:off x="1230464" y="5965307"/>
+                <a:ext cx="1198533" cy="555152"/>
+              </a:xfrm>
+              <a:prstGeom prst="rect">
+                <a:avLst/>
+              </a:prstGeom>
+              <a:blipFill>
+                <a:blip r:embed="rId38"/>
+                <a:stretch>
+                  <a:fillRect/>
+                </a:stretch>
+              </a:blipFill>
+            </p:spPr>
+            <p:txBody>
+              <a:bodyPr/>
+              <a:lstStyle/>
+              <a:p>
+                <a:r>
+                  <a:rPr lang="zh-TW" altLang="en-US">
+                    <a:noFill/>
+                  </a:rPr>
+                  <a:t> </a:t>
+                </a:r>
+              </a:p>
+            </p:txBody>
+          </p:sp>
+        </mc:Fallback>
+      </mc:AlternateContent>
+      <mc:AlternateContent xmlns:mc="http://schemas.openxmlformats.org/markup-compatibility/2006">
+        <mc:Choice xmlns:a14="http://schemas.microsoft.com/office/drawing/2010/main" Requires="a14">
+          <p:sp>
+            <p:nvSpPr>
+              <p:cNvPr id="59" name="矩形 58">
+                <a:extLst>
+                  <a:ext uri="{FF2B5EF4-FFF2-40B4-BE49-F238E27FC236}">
+                    <a16:creationId xmlns:a16="http://schemas.microsoft.com/office/drawing/2014/main" id="{415D0778-1766-4C6A-B255-91539B9DC750}"/>
+                  </a:ext>
+                </a:extLst>
+              </p:cNvPr>
+              <p:cNvSpPr/>
+              <p:nvPr/>
+            </p:nvSpPr>
+            <p:spPr>
+              <a:xfrm>
+                <a:off x="3017747" y="5831681"/>
+                <a:ext cx="1906932" cy="688778"/>
+              </a:xfrm>
+              <a:prstGeom prst="rect">
+                <a:avLst/>
+              </a:prstGeom>
+            </p:spPr>
+            <p:txBody>
+              <a:bodyPr wrap="none">
+                <a:spAutoFit/>
+              </a:bodyPr>
+              <a:lstStyle/>
+              <a:p>
+                <a:pPr algn="ctr"/>
+                <a14:m>
+                  <m:oMathPara xmlns:m="http://schemas.openxmlformats.org/officeDocument/2006/math">
+                    <m:oMathParaPr>
+                      <m:jc m:val="centerGroup"/>
+                    </m:oMathParaPr>
+                    <m:oMath xmlns:m="http://schemas.openxmlformats.org/officeDocument/2006/math">
+                      <m:sSup>
+                        <m:sSupPr>
+                          <m:ctrlPr>
+                            <a:rPr lang="en-US" altLang="zh-TW" sz="1600" i="1" dirty="0" smtClean="0">
+                              <a:latin typeface="Cambria Math" panose="02040503050406030204" pitchFamily="18" charset="0"/>
+                              <a:ea typeface="Cambria Math" panose="02040503050406030204" pitchFamily="18" charset="0"/>
+                            </a:rPr>
+                          </m:ctrlPr>
+                        </m:sSupPr>
+                        <m:e>
+                          <m:d>
+                            <m:dPr>
+                              <m:begChr m:val="|"/>
+                              <m:endChr m:val="|"/>
+                              <m:ctrlPr>
+                                <a:rPr lang="en-US" altLang="zh-TW" sz="1600" i="1" dirty="0">
+                                  <a:latin typeface="Cambria Math" panose="02040503050406030204" pitchFamily="18" charset="0"/>
+                                  <a:ea typeface="Cambria Math" panose="02040503050406030204" pitchFamily="18" charset="0"/>
+                                </a:rPr>
+                              </m:ctrlPr>
+                            </m:dPr>
+                            <m:e>
+                              <m:nary>
+                                <m:naryPr>
+                                  <m:chr m:val="∑"/>
+                                  <m:limLoc m:val="subSup"/>
+                                  <m:supHide m:val="on"/>
+                                  <m:ctrlPr>
+                                    <a:rPr lang="en-US" altLang="zh-TW" sz="1600" i="1" dirty="0" smtClean="0">
+                                      <a:latin typeface="Cambria Math" panose="02040503050406030204" pitchFamily="18" charset="0"/>
+                                      <a:ea typeface="Cambria Math" panose="02040503050406030204" pitchFamily="18" charset="0"/>
+                                    </a:rPr>
+                                  </m:ctrlPr>
+                                </m:naryPr>
+                                <m:sub>
+                                  <m:r>
+                                    <a:rPr lang="en-US" altLang="zh-TW" sz="1600" b="1" i="1">
+                                      <a:latin typeface="Cambria Math" panose="02040503050406030204" pitchFamily="18" charset="0"/>
+                                    </a:rPr>
+                                    <m:t>𝑸</m:t>
+                                  </m:r>
+                                </m:sub>
+                                <m:sup/>
+                                <m:e>
+                                  <m:sSubSup>
+                                    <m:sSubSupPr>
+                                      <m:ctrlPr>
+                                        <a:rPr lang="en-US" altLang="zh-TW" sz="1600" i="1">
+                                          <a:latin typeface="Cambria Math" panose="02040503050406030204" pitchFamily="18" charset="0"/>
+                                        </a:rPr>
+                                      </m:ctrlPr>
+                                    </m:sSubSupPr>
+                                    <m:e>
+                                      <m:acc>
+                                        <m:accPr>
+                                          <m:chr m:val="̃"/>
+                                          <m:ctrlPr>
+                                            <a:rPr lang="en-US" altLang="zh-TW" sz="1600" i="1">
+                                              <a:latin typeface="Cambria Math" panose="02040503050406030204" pitchFamily="18" charset="0"/>
+                                            </a:rPr>
+                                          </m:ctrlPr>
+                                        </m:accPr>
+                                        <m:e>
+                                          <m:r>
+                                            <a:rPr lang="en-US" altLang="zh-TW" sz="1600" i="1">
+                                              <a:latin typeface="Cambria Math" panose="02040503050406030204" pitchFamily="18" charset="0"/>
+                                            </a:rPr>
+                                            <m:t>𝑀</m:t>
+                                          </m:r>
+                                        </m:e>
+                                      </m:acc>
+                                    </m:e>
+                                    <m:sub>
+                                      <m:r>
+                                        <a:rPr lang="en-US" altLang="zh-TW" sz="1600" i="1">
+                                          <a:latin typeface="Cambria Math" panose="02040503050406030204" pitchFamily="18" charset="0"/>
+                                        </a:rPr>
+                                        <m:t>𝑆</m:t>
+                                      </m:r>
+                                      <m:r>
+                                        <a:rPr lang="en-US" altLang="zh-TW" sz="1600" i="1">
+                                          <a:latin typeface="Cambria Math" panose="02040503050406030204" pitchFamily="18" charset="0"/>
+                                        </a:rPr>
+                                        <m:t>,</m:t>
+                                      </m:r>
+                                      <m:r>
+                                        <a:rPr lang="en-US" altLang="zh-TW" sz="1600" b="1" i="1">
+                                          <a:latin typeface="Cambria Math" panose="02040503050406030204" pitchFamily="18" charset="0"/>
+                                        </a:rPr>
+                                        <m:t>𝑸</m:t>
+                                      </m:r>
+                                    </m:sub>
+                                    <m:sup>
+                                      <m:acc>
+                                        <m:accPr>
+                                          <m:chr m:val="̂"/>
+                                          <m:ctrlPr>
+                                            <a:rPr lang="en-US" altLang="zh-TW" sz="1600" b="1" i="1">
+                                              <a:latin typeface="Cambria Math" panose="02040503050406030204" pitchFamily="18" charset="0"/>
+                                            </a:rPr>
+                                          </m:ctrlPr>
+                                        </m:accPr>
+                                        <m:e>
+                                          <m:r>
+                                            <a:rPr lang="zh-TW" altLang="en-US" sz="1600" b="1" i="1">
+                                              <a:latin typeface="Cambria Math" panose="02040503050406030204" pitchFamily="18" charset="0"/>
+                                            </a:rPr>
+                                            <m:t>𝜺</m:t>
+                                          </m:r>
+                                        </m:e>
+                                      </m:acc>
+                                      <m:r>
+                                        <a:rPr lang="en-US" altLang="zh-TW" sz="1600" i="1">
+                                          <a:latin typeface="Cambria Math" panose="02040503050406030204" pitchFamily="18" charset="0"/>
+                                        </a:rPr>
+                                        <m:t>,</m:t>
+                                      </m:r>
+                                      <m:r>
+                                        <a:rPr lang="en-US" altLang="zh-TW" sz="1600" b="0" i="1" smtClean="0">
+                                          <a:latin typeface="Cambria Math" panose="02040503050406030204" pitchFamily="18" charset="0"/>
+                                        </a:rPr>
+                                        <m:t>±1</m:t>
+                                      </m:r>
+                                    </m:sup>
+                                  </m:sSubSup>
+                                </m:e>
+                              </m:nary>
+                              <m:sSup>
+                                <m:sSupPr>
+                                  <m:ctrlPr>
+                                    <a:rPr lang="en-US" altLang="zh-TW" sz="1600" b="0" i="1" dirty="0" smtClean="0">
+                                      <a:latin typeface="Cambria Math" panose="02040503050406030204" pitchFamily="18" charset="0"/>
+                                      <a:ea typeface="Cambria Math" panose="02040503050406030204" pitchFamily="18" charset="0"/>
+                                    </a:rPr>
+                                  </m:ctrlPr>
+                                </m:sSupPr>
+                                <m:e>
+                                  <m:r>
+                                    <a:rPr lang="en-US" altLang="zh-TW" sz="1600" b="0" i="1" dirty="0" smtClean="0">
+                                      <a:latin typeface="Cambria Math" panose="02040503050406030204" pitchFamily="18" charset="0"/>
+                                      <a:ea typeface="Cambria Math" panose="02040503050406030204" pitchFamily="18" charset="0"/>
+                                    </a:rPr>
+                                    <m:t>𝑒</m:t>
+                                  </m:r>
+                                </m:e>
+                                <m:sup>
+                                  <m:r>
+                                    <a:rPr lang="en-US" altLang="zh-TW" sz="1600" b="0" i="1" dirty="0" smtClean="0">
+                                      <a:latin typeface="Cambria Math" panose="02040503050406030204" pitchFamily="18" charset="0"/>
+                                      <a:ea typeface="Cambria Math" panose="02040503050406030204" pitchFamily="18" charset="0"/>
+                                    </a:rPr>
+                                    <m:t>𝑖</m:t>
+                                  </m:r>
+                                  <m:r>
+                                    <a:rPr lang="en-US" altLang="zh-TW" sz="1600" b="1" i="1" dirty="0" smtClean="0">
+                                      <a:latin typeface="Cambria Math" panose="02040503050406030204" pitchFamily="18" charset="0"/>
+                                      <a:ea typeface="Cambria Math" panose="02040503050406030204" pitchFamily="18" charset="0"/>
+                                    </a:rPr>
+                                    <m:t>𝑸</m:t>
+                                  </m:r>
+                                  <m:r>
+                                    <a:rPr lang="en-US" altLang="zh-TW" sz="1600" b="0" i="1" dirty="0" smtClean="0">
+                                      <a:latin typeface="Cambria Math" panose="02040503050406030204" pitchFamily="18" charset="0"/>
+                                      <a:ea typeface="Cambria Math" panose="02040503050406030204" pitchFamily="18" charset="0"/>
+                                    </a:rPr>
+                                    <m:t>⋅</m:t>
+                                  </m:r>
+                                  <m:sSub>
+                                    <m:sSubPr>
+                                      <m:ctrlPr>
+                                        <a:rPr lang="en-US" altLang="zh-TW" sz="1600" b="0" i="1" dirty="0" smtClean="0">
+                                          <a:latin typeface="Cambria Math" panose="02040503050406030204" pitchFamily="18" charset="0"/>
+                                          <a:ea typeface="Cambria Math" panose="02040503050406030204" pitchFamily="18" charset="0"/>
+                                        </a:rPr>
+                                      </m:ctrlPr>
+                                    </m:sSubPr>
+                                    <m:e>
+                                      <m:r>
+                                        <a:rPr lang="en-US" altLang="zh-TW" sz="1600" b="1" i="1" dirty="0" smtClean="0">
+                                          <a:latin typeface="Cambria Math" panose="02040503050406030204" pitchFamily="18" charset="0"/>
+                                          <a:ea typeface="Cambria Math" panose="02040503050406030204" pitchFamily="18" charset="0"/>
+                                        </a:rPr>
+                                        <m:t>𝑹</m:t>
+                                      </m:r>
+                                    </m:e>
+                                    <m:sub>
+                                      <m:r>
+                                        <a:rPr lang="en-US" altLang="zh-TW" sz="1600" b="0" i="1" dirty="0" smtClean="0">
+                                          <a:latin typeface="Cambria Math" panose="02040503050406030204" pitchFamily="18" charset="0"/>
+                                          <a:ea typeface="Cambria Math" panose="02040503050406030204" pitchFamily="18" charset="0"/>
+                                        </a:rPr>
+                                        <m:t>𝑐</m:t>
+                                      </m:r>
+                                    </m:sub>
+                                  </m:sSub>
+                                </m:sup>
+                              </m:sSup>
+                            </m:e>
+                          </m:d>
+                        </m:e>
+                        <m:sup>
+                          <m:r>
+                            <a:rPr lang="en-US" altLang="zh-TW" sz="1600" i="1" dirty="0">
+                              <a:latin typeface="Cambria Math" panose="02040503050406030204" pitchFamily="18" charset="0"/>
+                              <a:ea typeface="Cambria Math" panose="02040503050406030204" pitchFamily="18" charset="0"/>
+                            </a:rPr>
+                            <m:t>2</m:t>
+                          </m:r>
+                        </m:sup>
+                      </m:sSup>
+                    </m:oMath>
+                  </m:oMathPara>
+                </a14:m>
+                <a:endParaRPr lang="zh-TW" altLang="en-US" sz="1600" dirty="0"/>
+              </a:p>
+            </p:txBody>
+          </p:sp>
+        </mc:Choice>
+        <mc:Fallback>
+          <p:sp>
+            <p:nvSpPr>
+              <p:cNvPr id="59" name="矩形 58">
+                <a:extLst>
+                  <a:ext uri="{FF2B5EF4-FFF2-40B4-BE49-F238E27FC236}">
+                    <a16:creationId xmlns:a16="http://schemas.microsoft.com/office/drawing/2014/main" id="{415D0778-1766-4C6A-B255-91539B9DC750}"/>
+                  </a:ext>
+                </a:extLst>
+              </p:cNvPr>
+              <p:cNvSpPr>
+                <a:spLocks noRot="1" noChangeAspect="1" noMove="1" noResize="1" noEditPoints="1" noAdjustHandles="1" noChangeArrowheads="1" noChangeShapeType="1" noTextEdit="1"/>
+              </p:cNvSpPr>
+              <p:nvPr/>
+            </p:nvSpPr>
+            <p:spPr>
+              <a:xfrm>
+                <a:off x="3017747" y="5831681"/>
+                <a:ext cx="1906932" cy="688778"/>
+              </a:xfrm>
+              <a:prstGeom prst="rect">
+                <a:avLst/>
+              </a:prstGeom>
+              <a:blipFill>
+                <a:blip r:embed="rId39"/>
+                <a:stretch>
+                  <a:fillRect/>
+                </a:stretch>
+              </a:blipFill>
+            </p:spPr>
+            <p:txBody>
+              <a:bodyPr/>
+              <a:lstStyle/>
+              <a:p>
+                <a:r>
+                  <a:rPr lang="zh-TW" altLang="en-US">
+                    <a:noFill/>
+                  </a:rPr>
+                  <a:t> </a:t>
+                </a:r>
+              </a:p>
+            </p:txBody>
+          </p:sp>
+        </mc:Fallback>
+      </mc:AlternateContent>
+      <mc:AlternateContent xmlns:mc="http://schemas.openxmlformats.org/markup-compatibility/2006">
+        <mc:Choice xmlns:a14="http://schemas.microsoft.com/office/drawing/2010/main" Requires="a14">
+          <p:sp>
+            <p:nvSpPr>
+              <p:cNvPr id="60" name="矩形 59">
+                <a:extLst>
+                  <a:ext uri="{FF2B5EF4-FFF2-40B4-BE49-F238E27FC236}">
+                    <a16:creationId xmlns:a16="http://schemas.microsoft.com/office/drawing/2014/main" id="{0DC73882-D7C0-495A-8FBD-35C62FAFD30A}"/>
+                  </a:ext>
+                </a:extLst>
+              </p:cNvPr>
+              <p:cNvSpPr/>
+              <p:nvPr/>
+            </p:nvSpPr>
+            <p:spPr>
+              <a:xfrm>
+                <a:off x="6112097" y="1352357"/>
+                <a:ext cx="1198533" cy="555152"/>
+              </a:xfrm>
+              <a:prstGeom prst="rect">
+                <a:avLst/>
+              </a:prstGeom>
+            </p:spPr>
+            <p:txBody>
+              <a:bodyPr wrap="none">
+                <a:spAutoFit/>
+              </a:bodyPr>
+              <a:lstStyle/>
+              <a:p>
+                <a:pPr algn="ctr"/>
+                <a14:m>
+                  <m:oMathPara xmlns:m="http://schemas.openxmlformats.org/officeDocument/2006/math">
+                    <m:oMathParaPr>
+                      <m:jc m:val="centerGroup"/>
+                    </m:oMathParaPr>
+                    <m:oMath xmlns:m="http://schemas.openxmlformats.org/officeDocument/2006/math">
+                      <m:sSup>
+                        <m:sSupPr>
+                          <m:ctrlPr>
+                            <a:rPr lang="en-US" altLang="zh-TW" sz="2000" i="1" smtClean="0">
+                              <a:latin typeface="Cambria Math" panose="02040503050406030204" pitchFamily="18" charset="0"/>
+                            </a:rPr>
+                          </m:ctrlPr>
+                        </m:sSupPr>
+                        <m:e>
+                          <m:d>
+                            <m:dPr>
+                              <m:begChr m:val="|"/>
+                              <m:endChr m:val="|"/>
+                              <m:ctrlPr>
+                                <a:rPr lang="en-US" altLang="zh-TW" sz="2000" i="1">
+                                  <a:latin typeface="Cambria Math" panose="02040503050406030204" pitchFamily="18" charset="0"/>
+                                </a:rPr>
+                              </m:ctrlPr>
+                            </m:dPr>
+                            <m:e>
+                              <m:sSubSup>
+                                <m:sSubSupPr>
+                                  <m:ctrlPr>
+                                    <a:rPr lang="en-US" altLang="zh-TW" sz="2000" i="1">
+                                      <a:latin typeface="Cambria Math" panose="02040503050406030204" pitchFamily="18" charset="0"/>
+                                    </a:rPr>
+                                  </m:ctrlPr>
+                                </m:sSubSupPr>
+                                <m:e>
+                                  <m:acc>
+                                    <m:accPr>
+                                      <m:chr m:val="̃"/>
+                                      <m:ctrlPr>
+                                        <a:rPr lang="en-US" altLang="zh-TW" sz="2000" i="1">
+                                          <a:latin typeface="Cambria Math" panose="02040503050406030204" pitchFamily="18" charset="0"/>
+                                        </a:rPr>
+                                      </m:ctrlPr>
+                                    </m:accPr>
+                                    <m:e>
+                                      <m:r>
+                                        <a:rPr lang="en-US" altLang="zh-TW" sz="2000" i="1">
+                                          <a:latin typeface="Cambria Math" panose="02040503050406030204" pitchFamily="18" charset="0"/>
+                                        </a:rPr>
+                                        <m:t>𝑀</m:t>
+                                      </m:r>
+                                    </m:e>
+                                  </m:acc>
+                                </m:e>
+                                <m:sub>
+                                  <m:r>
+                                    <a:rPr lang="en-US" altLang="zh-TW" sz="2000" i="1">
+                                      <a:latin typeface="Cambria Math" panose="02040503050406030204" pitchFamily="18" charset="0"/>
+                                    </a:rPr>
+                                    <m:t>𝑆</m:t>
+                                  </m:r>
+                                  <m:r>
+                                    <a:rPr lang="en-US" altLang="zh-TW" sz="2000" i="1">
+                                      <a:latin typeface="Cambria Math" panose="02040503050406030204" pitchFamily="18" charset="0"/>
+                                    </a:rPr>
+                                    <m:t>,</m:t>
+                                  </m:r>
+                                  <m:r>
+                                    <a:rPr lang="en-US" altLang="zh-TW" sz="2000" b="1" i="1">
+                                      <a:latin typeface="Cambria Math" panose="02040503050406030204" pitchFamily="18" charset="0"/>
+                                    </a:rPr>
+                                    <m:t>𝑸</m:t>
+                                  </m:r>
+                                </m:sub>
+                                <m:sup>
+                                  <m:acc>
+                                    <m:accPr>
+                                      <m:chr m:val="̂"/>
+                                      <m:ctrlPr>
+                                        <a:rPr lang="en-US" altLang="zh-TW" sz="2000" b="1" i="1">
+                                          <a:latin typeface="Cambria Math" panose="02040503050406030204" pitchFamily="18" charset="0"/>
+                                        </a:rPr>
+                                      </m:ctrlPr>
+                                    </m:accPr>
+                                    <m:e>
+                                      <m:r>
+                                        <a:rPr lang="zh-TW" altLang="en-US" sz="2000" b="1" i="1">
+                                          <a:latin typeface="Cambria Math" panose="02040503050406030204" pitchFamily="18" charset="0"/>
+                                        </a:rPr>
+                                        <m:t>𝜺</m:t>
+                                      </m:r>
+                                    </m:e>
+                                  </m:acc>
+                                  <m:r>
+                                    <a:rPr lang="en-US" altLang="zh-TW" sz="2000" i="1">
+                                      <a:latin typeface="Cambria Math" panose="02040503050406030204" pitchFamily="18" charset="0"/>
+                                    </a:rPr>
+                                    <m:t>,</m:t>
+                                  </m:r>
+                                  <m:r>
+                                    <a:rPr lang="en-US" altLang="zh-TW" sz="2000" b="0" i="1" smtClean="0">
+                                      <a:latin typeface="Cambria Math" panose="02040503050406030204" pitchFamily="18" charset="0"/>
+                                    </a:rPr>
+                                    <m:t>±1</m:t>
+                                  </m:r>
+                                </m:sup>
+                              </m:sSubSup>
+                            </m:e>
+                          </m:d>
+                        </m:e>
+                        <m:sup>
+                          <m:r>
+                            <a:rPr lang="en-US" altLang="zh-TW" sz="2000" i="1">
+                              <a:latin typeface="Cambria Math" panose="02040503050406030204" pitchFamily="18" charset="0"/>
+                            </a:rPr>
+                            <m:t>2</m:t>
+                          </m:r>
+                        </m:sup>
+                      </m:sSup>
+                      <m:r>
+                        <a:rPr lang="en-US" altLang="zh-TW" sz="2000" i="1">
+                          <a:latin typeface="Cambria Math" panose="02040503050406030204" pitchFamily="18" charset="0"/>
+                        </a:rPr>
+                        <m:t> </m:t>
+                      </m:r>
+                    </m:oMath>
+                  </m:oMathPara>
+                </a14:m>
+                <a:endParaRPr lang="zh-TW" altLang="en-US" sz="2000" dirty="0"/>
+              </a:p>
+            </p:txBody>
+          </p:sp>
+        </mc:Choice>
+        <mc:Fallback>
+          <p:sp>
+            <p:nvSpPr>
+              <p:cNvPr id="60" name="矩形 59">
+                <a:extLst>
+                  <a:ext uri="{FF2B5EF4-FFF2-40B4-BE49-F238E27FC236}">
+                    <a16:creationId xmlns:a16="http://schemas.microsoft.com/office/drawing/2014/main" id="{0DC73882-D7C0-495A-8FBD-35C62FAFD30A}"/>
+                  </a:ext>
+                </a:extLst>
+              </p:cNvPr>
+              <p:cNvSpPr>
+                <a:spLocks noRot="1" noChangeAspect="1" noMove="1" noResize="1" noEditPoints="1" noAdjustHandles="1" noChangeArrowheads="1" noChangeShapeType="1" noTextEdit="1"/>
+              </p:cNvSpPr>
+              <p:nvPr/>
+            </p:nvSpPr>
+            <p:spPr>
+              <a:xfrm>
+                <a:off x="6112097" y="1352357"/>
+                <a:ext cx="1198533" cy="555152"/>
+              </a:xfrm>
+              <a:prstGeom prst="rect">
+                <a:avLst/>
+              </a:prstGeom>
+              <a:blipFill>
+                <a:blip r:embed="rId40"/>
+                <a:stretch>
+                  <a:fillRect/>
+                </a:stretch>
+              </a:blipFill>
+            </p:spPr>
+            <p:txBody>
+              <a:bodyPr/>
+              <a:lstStyle/>
+              <a:p>
+                <a:r>
+                  <a:rPr lang="zh-TW" altLang="en-US">
+                    <a:noFill/>
+                  </a:rPr>
+                  <a:t> </a:t>
+                </a:r>
+              </a:p>
+            </p:txBody>
+          </p:sp>
+        </mc:Fallback>
+      </mc:AlternateContent>
+      <mc:AlternateContent xmlns:mc="http://schemas.openxmlformats.org/markup-compatibility/2006">
+        <mc:Choice xmlns:a14="http://schemas.microsoft.com/office/drawing/2010/main" Requires="a14">
+          <p:sp>
+            <p:nvSpPr>
+              <p:cNvPr id="61" name="矩形 60">
+                <a:extLst>
+                  <a:ext uri="{FF2B5EF4-FFF2-40B4-BE49-F238E27FC236}">
+                    <a16:creationId xmlns:a16="http://schemas.microsoft.com/office/drawing/2014/main" id="{296049B3-A4D4-40D0-9353-CD7B3CEFE673}"/>
+                  </a:ext>
+                </a:extLst>
+              </p:cNvPr>
+              <p:cNvSpPr/>
+              <p:nvPr/>
+            </p:nvSpPr>
+            <p:spPr>
+              <a:xfrm>
+                <a:off x="7899380" y="1218731"/>
+                <a:ext cx="1906932" cy="688778"/>
+              </a:xfrm>
+              <a:prstGeom prst="rect">
+                <a:avLst/>
+              </a:prstGeom>
+            </p:spPr>
+            <p:txBody>
+              <a:bodyPr wrap="none">
+                <a:spAutoFit/>
+              </a:bodyPr>
+              <a:lstStyle/>
+              <a:p>
+                <a:pPr algn="ctr"/>
+                <a14:m>
+                  <m:oMathPara xmlns:m="http://schemas.openxmlformats.org/officeDocument/2006/math">
+                    <m:oMathParaPr>
+                      <m:jc m:val="centerGroup"/>
+                    </m:oMathParaPr>
+                    <m:oMath xmlns:m="http://schemas.openxmlformats.org/officeDocument/2006/math">
+                      <m:sSup>
+                        <m:sSupPr>
+                          <m:ctrlPr>
+                            <a:rPr lang="en-US" altLang="zh-TW" sz="1600" i="1" dirty="0" smtClean="0">
+                              <a:latin typeface="Cambria Math" panose="02040503050406030204" pitchFamily="18" charset="0"/>
+                              <a:ea typeface="Cambria Math" panose="02040503050406030204" pitchFamily="18" charset="0"/>
+                            </a:rPr>
+                          </m:ctrlPr>
+                        </m:sSupPr>
+                        <m:e>
+                          <m:d>
+                            <m:dPr>
+                              <m:begChr m:val="|"/>
+                              <m:endChr m:val="|"/>
+                              <m:ctrlPr>
+                                <a:rPr lang="en-US" altLang="zh-TW" sz="1600" i="1" dirty="0">
+                                  <a:latin typeface="Cambria Math" panose="02040503050406030204" pitchFamily="18" charset="0"/>
+                                  <a:ea typeface="Cambria Math" panose="02040503050406030204" pitchFamily="18" charset="0"/>
+                                </a:rPr>
+                              </m:ctrlPr>
+                            </m:dPr>
+                            <m:e>
+                              <m:nary>
+                                <m:naryPr>
+                                  <m:chr m:val="∑"/>
+                                  <m:limLoc m:val="subSup"/>
+                                  <m:supHide m:val="on"/>
+                                  <m:ctrlPr>
+                                    <a:rPr lang="en-US" altLang="zh-TW" sz="1600" i="1" dirty="0" smtClean="0">
+                                      <a:latin typeface="Cambria Math" panose="02040503050406030204" pitchFamily="18" charset="0"/>
+                                      <a:ea typeface="Cambria Math" panose="02040503050406030204" pitchFamily="18" charset="0"/>
+                                    </a:rPr>
+                                  </m:ctrlPr>
+                                </m:naryPr>
+                                <m:sub>
+                                  <m:r>
+                                    <a:rPr lang="en-US" altLang="zh-TW" sz="1600" b="1" i="1">
+                                      <a:latin typeface="Cambria Math" panose="02040503050406030204" pitchFamily="18" charset="0"/>
+                                    </a:rPr>
+                                    <m:t>𝑸</m:t>
+                                  </m:r>
+                                </m:sub>
+                                <m:sup/>
+                                <m:e>
+                                  <m:sSubSup>
+                                    <m:sSubSupPr>
+                                      <m:ctrlPr>
+                                        <a:rPr lang="en-US" altLang="zh-TW" sz="1600" i="1">
+                                          <a:latin typeface="Cambria Math" panose="02040503050406030204" pitchFamily="18" charset="0"/>
+                                        </a:rPr>
+                                      </m:ctrlPr>
+                                    </m:sSubSupPr>
+                                    <m:e>
+                                      <m:acc>
+                                        <m:accPr>
+                                          <m:chr m:val="̃"/>
+                                          <m:ctrlPr>
+                                            <a:rPr lang="en-US" altLang="zh-TW" sz="1600" i="1">
+                                              <a:latin typeface="Cambria Math" panose="02040503050406030204" pitchFamily="18" charset="0"/>
+                                            </a:rPr>
+                                          </m:ctrlPr>
+                                        </m:accPr>
+                                        <m:e>
+                                          <m:r>
+                                            <a:rPr lang="en-US" altLang="zh-TW" sz="1600" i="1">
+                                              <a:latin typeface="Cambria Math" panose="02040503050406030204" pitchFamily="18" charset="0"/>
+                                            </a:rPr>
+                                            <m:t>𝑀</m:t>
+                                          </m:r>
+                                        </m:e>
+                                      </m:acc>
+                                    </m:e>
+                                    <m:sub>
+                                      <m:r>
+                                        <a:rPr lang="en-US" altLang="zh-TW" sz="1600" i="1">
+                                          <a:latin typeface="Cambria Math" panose="02040503050406030204" pitchFamily="18" charset="0"/>
+                                        </a:rPr>
+                                        <m:t>𝑆</m:t>
+                                      </m:r>
+                                      <m:r>
+                                        <a:rPr lang="en-US" altLang="zh-TW" sz="1600" i="1">
+                                          <a:latin typeface="Cambria Math" panose="02040503050406030204" pitchFamily="18" charset="0"/>
+                                        </a:rPr>
+                                        <m:t>,</m:t>
+                                      </m:r>
+                                      <m:r>
+                                        <a:rPr lang="en-US" altLang="zh-TW" sz="1600" b="1" i="1">
+                                          <a:latin typeface="Cambria Math" panose="02040503050406030204" pitchFamily="18" charset="0"/>
+                                        </a:rPr>
+                                        <m:t>𝑸</m:t>
+                                      </m:r>
+                                    </m:sub>
+                                    <m:sup>
+                                      <m:acc>
+                                        <m:accPr>
+                                          <m:chr m:val="̂"/>
+                                          <m:ctrlPr>
+                                            <a:rPr lang="en-US" altLang="zh-TW" sz="1600" b="1" i="1">
+                                              <a:latin typeface="Cambria Math" panose="02040503050406030204" pitchFamily="18" charset="0"/>
+                                            </a:rPr>
+                                          </m:ctrlPr>
+                                        </m:accPr>
+                                        <m:e>
+                                          <m:r>
+                                            <a:rPr lang="zh-TW" altLang="en-US" sz="1600" b="1" i="1">
+                                              <a:latin typeface="Cambria Math" panose="02040503050406030204" pitchFamily="18" charset="0"/>
+                                            </a:rPr>
+                                            <m:t>𝜺</m:t>
+                                          </m:r>
+                                        </m:e>
+                                      </m:acc>
+                                      <m:r>
+                                        <a:rPr lang="en-US" altLang="zh-TW" sz="1600" i="1">
+                                          <a:latin typeface="Cambria Math" panose="02040503050406030204" pitchFamily="18" charset="0"/>
+                                        </a:rPr>
+                                        <m:t>,</m:t>
+                                      </m:r>
+                                      <m:r>
+                                        <a:rPr lang="en-US" altLang="zh-TW" sz="1600" b="0" i="1" smtClean="0">
+                                          <a:latin typeface="Cambria Math" panose="02040503050406030204" pitchFamily="18" charset="0"/>
+                                        </a:rPr>
+                                        <m:t>±1</m:t>
+                                      </m:r>
+                                    </m:sup>
+                                  </m:sSubSup>
+                                </m:e>
+                              </m:nary>
+                              <m:sSup>
+                                <m:sSupPr>
+                                  <m:ctrlPr>
+                                    <a:rPr lang="en-US" altLang="zh-TW" sz="1600" b="0" i="1" dirty="0" smtClean="0">
+                                      <a:latin typeface="Cambria Math" panose="02040503050406030204" pitchFamily="18" charset="0"/>
+                                      <a:ea typeface="Cambria Math" panose="02040503050406030204" pitchFamily="18" charset="0"/>
+                                    </a:rPr>
+                                  </m:ctrlPr>
+                                </m:sSupPr>
+                                <m:e>
+                                  <m:r>
+                                    <a:rPr lang="en-US" altLang="zh-TW" sz="1600" b="0" i="1" dirty="0" smtClean="0">
+                                      <a:latin typeface="Cambria Math" panose="02040503050406030204" pitchFamily="18" charset="0"/>
+                                      <a:ea typeface="Cambria Math" panose="02040503050406030204" pitchFamily="18" charset="0"/>
+                                    </a:rPr>
+                                    <m:t>𝑒</m:t>
+                                  </m:r>
+                                </m:e>
+                                <m:sup>
+                                  <m:r>
+                                    <a:rPr lang="en-US" altLang="zh-TW" sz="1600" b="0" i="1" dirty="0" smtClean="0">
+                                      <a:latin typeface="Cambria Math" panose="02040503050406030204" pitchFamily="18" charset="0"/>
+                                      <a:ea typeface="Cambria Math" panose="02040503050406030204" pitchFamily="18" charset="0"/>
+                                    </a:rPr>
+                                    <m:t>𝑖</m:t>
+                                  </m:r>
+                                  <m:r>
+                                    <a:rPr lang="en-US" altLang="zh-TW" sz="1600" b="1" i="1" dirty="0" smtClean="0">
+                                      <a:latin typeface="Cambria Math" panose="02040503050406030204" pitchFamily="18" charset="0"/>
+                                      <a:ea typeface="Cambria Math" panose="02040503050406030204" pitchFamily="18" charset="0"/>
+                                    </a:rPr>
+                                    <m:t>𝑸</m:t>
+                                  </m:r>
+                                  <m:r>
+                                    <a:rPr lang="en-US" altLang="zh-TW" sz="1600" b="0" i="1" dirty="0" smtClean="0">
+                                      <a:latin typeface="Cambria Math" panose="02040503050406030204" pitchFamily="18" charset="0"/>
+                                      <a:ea typeface="Cambria Math" panose="02040503050406030204" pitchFamily="18" charset="0"/>
+                                    </a:rPr>
+                                    <m:t>⋅</m:t>
+                                  </m:r>
+                                  <m:sSub>
+                                    <m:sSubPr>
+                                      <m:ctrlPr>
+                                        <a:rPr lang="en-US" altLang="zh-TW" sz="1600" b="0" i="1" dirty="0" smtClean="0">
+                                          <a:latin typeface="Cambria Math" panose="02040503050406030204" pitchFamily="18" charset="0"/>
+                                          <a:ea typeface="Cambria Math" panose="02040503050406030204" pitchFamily="18" charset="0"/>
+                                        </a:rPr>
+                                      </m:ctrlPr>
+                                    </m:sSubPr>
+                                    <m:e>
+                                      <m:r>
+                                        <a:rPr lang="en-US" altLang="zh-TW" sz="1600" b="1" i="1" dirty="0" smtClean="0">
+                                          <a:latin typeface="Cambria Math" panose="02040503050406030204" pitchFamily="18" charset="0"/>
+                                          <a:ea typeface="Cambria Math" panose="02040503050406030204" pitchFamily="18" charset="0"/>
+                                        </a:rPr>
+                                        <m:t>𝑹</m:t>
+                                      </m:r>
+                                    </m:e>
+                                    <m:sub>
+                                      <m:r>
+                                        <a:rPr lang="en-US" altLang="zh-TW" sz="1600" b="0" i="1" dirty="0" smtClean="0">
+                                          <a:latin typeface="Cambria Math" panose="02040503050406030204" pitchFamily="18" charset="0"/>
+                                          <a:ea typeface="Cambria Math" panose="02040503050406030204" pitchFamily="18" charset="0"/>
+                                        </a:rPr>
+                                        <m:t>𝑐</m:t>
+                                      </m:r>
+                                    </m:sub>
+                                  </m:sSub>
+                                </m:sup>
+                              </m:sSup>
+                            </m:e>
+                          </m:d>
+                        </m:e>
+                        <m:sup>
+                          <m:r>
+                            <a:rPr lang="en-US" altLang="zh-TW" sz="1600" i="1" dirty="0">
+                              <a:latin typeface="Cambria Math" panose="02040503050406030204" pitchFamily="18" charset="0"/>
+                              <a:ea typeface="Cambria Math" panose="02040503050406030204" pitchFamily="18" charset="0"/>
+                            </a:rPr>
+                            <m:t>2</m:t>
+                          </m:r>
+                        </m:sup>
+                      </m:sSup>
+                    </m:oMath>
+                  </m:oMathPara>
+                </a14:m>
+                <a:endParaRPr lang="zh-TW" altLang="en-US" sz="1600" dirty="0"/>
+              </a:p>
+            </p:txBody>
+          </p:sp>
+        </mc:Choice>
+        <mc:Fallback>
+          <p:sp>
+            <p:nvSpPr>
+              <p:cNvPr id="61" name="矩形 60">
+                <a:extLst>
+                  <a:ext uri="{FF2B5EF4-FFF2-40B4-BE49-F238E27FC236}">
+                    <a16:creationId xmlns:a16="http://schemas.microsoft.com/office/drawing/2014/main" id="{296049B3-A4D4-40D0-9353-CD7B3CEFE673}"/>
+                  </a:ext>
+                </a:extLst>
+              </p:cNvPr>
+              <p:cNvSpPr>
+                <a:spLocks noRot="1" noChangeAspect="1" noMove="1" noResize="1" noEditPoints="1" noAdjustHandles="1" noChangeArrowheads="1" noChangeShapeType="1" noTextEdit="1"/>
+              </p:cNvSpPr>
+              <p:nvPr/>
+            </p:nvSpPr>
+            <p:spPr>
+              <a:xfrm>
+                <a:off x="7899380" y="1218731"/>
+                <a:ext cx="1906932" cy="688778"/>
+              </a:xfrm>
+              <a:prstGeom prst="rect">
+                <a:avLst/>
+              </a:prstGeom>
+              <a:blipFill>
+                <a:blip r:embed="rId41"/>
+                <a:stretch>
+                  <a:fillRect/>
+                </a:stretch>
+              </a:blipFill>
+            </p:spPr>
+            <p:txBody>
+              <a:bodyPr/>
+              <a:lstStyle/>
+              <a:p>
+                <a:r>
+                  <a:rPr lang="zh-TW" altLang="en-US">
+                    <a:noFill/>
+                  </a:rPr>
+                  <a:t> </a:t>
+                </a:r>
+              </a:p>
+            </p:txBody>
+          </p:sp>
+        </mc:Fallback>
+      </mc:AlternateContent>
+      <mc:AlternateContent xmlns:mc="http://schemas.openxmlformats.org/markup-compatibility/2006">
+        <mc:Choice xmlns:a14="http://schemas.microsoft.com/office/drawing/2010/main" Requires="a14">
+          <p:sp>
+            <p:nvSpPr>
+              <p:cNvPr id="63" name="矩形 62">
+                <a:extLst>
+                  <a:ext uri="{FF2B5EF4-FFF2-40B4-BE49-F238E27FC236}">
+                    <a16:creationId xmlns:a16="http://schemas.microsoft.com/office/drawing/2014/main" id="{94DBB4D2-B0DA-40D5-8EBF-987CE5F3C1B9}"/>
+                  </a:ext>
+                </a:extLst>
+              </p:cNvPr>
+              <p:cNvSpPr/>
+              <p:nvPr/>
+            </p:nvSpPr>
+            <p:spPr>
+              <a:xfrm>
+                <a:off x="6112097" y="5965307"/>
+                <a:ext cx="1198533" cy="555152"/>
+              </a:xfrm>
+              <a:prstGeom prst="rect">
+                <a:avLst/>
+              </a:prstGeom>
+            </p:spPr>
+            <p:txBody>
+              <a:bodyPr wrap="none">
+                <a:spAutoFit/>
+              </a:bodyPr>
+              <a:lstStyle/>
+              <a:p>
+                <a:pPr algn="ctr"/>
+                <a14:m>
+                  <m:oMathPara xmlns:m="http://schemas.openxmlformats.org/officeDocument/2006/math">
+                    <m:oMathParaPr>
+                      <m:jc m:val="centerGroup"/>
+                    </m:oMathParaPr>
+                    <m:oMath xmlns:m="http://schemas.openxmlformats.org/officeDocument/2006/math">
+                      <m:sSup>
+                        <m:sSupPr>
+                          <m:ctrlPr>
+                            <a:rPr lang="en-US" altLang="zh-TW" sz="2000" i="1" smtClean="0">
+                              <a:latin typeface="Cambria Math" panose="02040503050406030204" pitchFamily="18" charset="0"/>
+                            </a:rPr>
+                          </m:ctrlPr>
+                        </m:sSupPr>
+                        <m:e>
+                          <m:d>
+                            <m:dPr>
+                              <m:begChr m:val="|"/>
+                              <m:endChr m:val="|"/>
+                              <m:ctrlPr>
+                                <a:rPr lang="en-US" altLang="zh-TW" sz="2000" i="1">
+                                  <a:latin typeface="Cambria Math" panose="02040503050406030204" pitchFamily="18" charset="0"/>
+                                </a:rPr>
+                              </m:ctrlPr>
+                            </m:dPr>
+                            <m:e>
+                              <m:sSubSup>
+                                <m:sSubSupPr>
+                                  <m:ctrlPr>
+                                    <a:rPr lang="en-US" altLang="zh-TW" sz="2000" i="1">
+                                      <a:latin typeface="Cambria Math" panose="02040503050406030204" pitchFamily="18" charset="0"/>
+                                    </a:rPr>
+                                  </m:ctrlPr>
+                                </m:sSubSupPr>
+                                <m:e>
+                                  <m:acc>
+                                    <m:accPr>
+                                      <m:chr m:val="̃"/>
+                                      <m:ctrlPr>
+                                        <a:rPr lang="en-US" altLang="zh-TW" sz="2000" i="1">
+                                          <a:latin typeface="Cambria Math" panose="02040503050406030204" pitchFamily="18" charset="0"/>
+                                        </a:rPr>
+                                      </m:ctrlPr>
+                                    </m:accPr>
+                                    <m:e>
+                                      <m:r>
+                                        <a:rPr lang="en-US" altLang="zh-TW" sz="2000" i="1">
+                                          <a:latin typeface="Cambria Math" panose="02040503050406030204" pitchFamily="18" charset="0"/>
+                                        </a:rPr>
+                                        <m:t>𝑀</m:t>
+                                      </m:r>
+                                    </m:e>
+                                  </m:acc>
+                                </m:e>
+                                <m:sub>
+                                  <m:r>
+                                    <a:rPr lang="en-US" altLang="zh-TW" sz="2000" i="1">
+                                      <a:latin typeface="Cambria Math" panose="02040503050406030204" pitchFamily="18" charset="0"/>
+                                    </a:rPr>
+                                    <m:t>𝑆</m:t>
+                                  </m:r>
+                                  <m:r>
+                                    <a:rPr lang="en-US" altLang="zh-TW" sz="2000" i="1">
+                                      <a:latin typeface="Cambria Math" panose="02040503050406030204" pitchFamily="18" charset="0"/>
+                                    </a:rPr>
+                                    <m:t>,</m:t>
+                                  </m:r>
+                                  <m:r>
+                                    <a:rPr lang="en-US" altLang="zh-TW" sz="2000" b="1" i="1">
+                                      <a:latin typeface="Cambria Math" panose="02040503050406030204" pitchFamily="18" charset="0"/>
+                                    </a:rPr>
+                                    <m:t>𝑸</m:t>
+                                  </m:r>
+                                </m:sub>
+                                <m:sup>
+                                  <m:acc>
+                                    <m:accPr>
+                                      <m:chr m:val="̂"/>
+                                      <m:ctrlPr>
+                                        <a:rPr lang="en-US" altLang="zh-TW" sz="2000" b="1" i="1">
+                                          <a:latin typeface="Cambria Math" panose="02040503050406030204" pitchFamily="18" charset="0"/>
+                                        </a:rPr>
+                                      </m:ctrlPr>
+                                    </m:accPr>
+                                    <m:e>
+                                      <m:r>
+                                        <a:rPr lang="zh-TW" altLang="en-US" sz="2000" b="1" i="1">
+                                          <a:latin typeface="Cambria Math" panose="02040503050406030204" pitchFamily="18" charset="0"/>
+                                        </a:rPr>
+                                        <m:t>𝜺</m:t>
+                                      </m:r>
+                                    </m:e>
+                                  </m:acc>
+                                  <m:r>
+                                    <a:rPr lang="en-US" altLang="zh-TW" sz="2000" i="1">
+                                      <a:latin typeface="Cambria Math" panose="02040503050406030204" pitchFamily="18" charset="0"/>
+                                    </a:rPr>
+                                    <m:t>,</m:t>
+                                  </m:r>
+                                  <m:r>
+                                    <a:rPr lang="en-US" altLang="zh-TW" sz="2000" b="0" i="1" smtClean="0">
+                                      <a:latin typeface="Cambria Math" panose="02040503050406030204" pitchFamily="18" charset="0"/>
+                                    </a:rPr>
+                                    <m:t>±1</m:t>
+                                  </m:r>
+                                </m:sup>
+                              </m:sSubSup>
+                            </m:e>
+                          </m:d>
+                        </m:e>
+                        <m:sup>
+                          <m:r>
+                            <a:rPr lang="en-US" altLang="zh-TW" sz="2000" i="1">
+                              <a:latin typeface="Cambria Math" panose="02040503050406030204" pitchFamily="18" charset="0"/>
+                            </a:rPr>
+                            <m:t>2</m:t>
+                          </m:r>
+                        </m:sup>
+                      </m:sSup>
+                      <m:r>
+                        <a:rPr lang="en-US" altLang="zh-TW" sz="2000" i="1">
+                          <a:latin typeface="Cambria Math" panose="02040503050406030204" pitchFamily="18" charset="0"/>
+                        </a:rPr>
+                        <m:t> </m:t>
+                      </m:r>
+                    </m:oMath>
+                  </m:oMathPara>
+                </a14:m>
+                <a:endParaRPr lang="zh-TW" altLang="en-US" sz="2000" dirty="0"/>
+              </a:p>
+            </p:txBody>
+          </p:sp>
+        </mc:Choice>
+        <mc:Fallback>
+          <p:sp>
+            <p:nvSpPr>
+              <p:cNvPr id="63" name="矩形 62">
+                <a:extLst>
+                  <a:ext uri="{FF2B5EF4-FFF2-40B4-BE49-F238E27FC236}">
+                    <a16:creationId xmlns:a16="http://schemas.microsoft.com/office/drawing/2014/main" id="{94DBB4D2-B0DA-40D5-8EBF-987CE5F3C1B9}"/>
+                  </a:ext>
+                </a:extLst>
+              </p:cNvPr>
+              <p:cNvSpPr>
+                <a:spLocks noRot="1" noChangeAspect="1" noMove="1" noResize="1" noEditPoints="1" noAdjustHandles="1" noChangeArrowheads="1" noChangeShapeType="1" noTextEdit="1"/>
+              </p:cNvSpPr>
+              <p:nvPr/>
+            </p:nvSpPr>
+            <p:spPr>
+              <a:xfrm>
+                <a:off x="6112097" y="5965307"/>
+                <a:ext cx="1198533" cy="555152"/>
+              </a:xfrm>
+              <a:prstGeom prst="rect">
+                <a:avLst/>
+              </a:prstGeom>
+              <a:blipFill>
+                <a:blip r:embed="rId42"/>
+                <a:stretch>
+                  <a:fillRect/>
+                </a:stretch>
+              </a:blipFill>
+            </p:spPr>
+            <p:txBody>
+              <a:bodyPr/>
+              <a:lstStyle/>
+              <a:p>
+                <a:r>
+                  <a:rPr lang="zh-TW" altLang="en-US">
+                    <a:noFill/>
+                  </a:rPr>
+                  <a:t> </a:t>
+                </a:r>
+              </a:p>
+            </p:txBody>
+          </p:sp>
+        </mc:Fallback>
+      </mc:AlternateContent>
+      <mc:AlternateContent xmlns:mc="http://schemas.openxmlformats.org/markup-compatibility/2006">
+        <mc:Choice xmlns:a14="http://schemas.microsoft.com/office/drawing/2010/main" Requires="a14">
+          <p:sp>
+            <p:nvSpPr>
+              <p:cNvPr id="64" name="矩形 63">
+                <a:extLst>
+                  <a:ext uri="{FF2B5EF4-FFF2-40B4-BE49-F238E27FC236}">
+                    <a16:creationId xmlns:a16="http://schemas.microsoft.com/office/drawing/2014/main" id="{86DCE3E2-7B4F-4618-939E-F776EED7617B}"/>
+                  </a:ext>
+                </a:extLst>
+              </p:cNvPr>
+              <p:cNvSpPr/>
+              <p:nvPr/>
+            </p:nvSpPr>
+            <p:spPr>
+              <a:xfrm>
+                <a:off x="7899380" y="5831681"/>
+                <a:ext cx="1906932" cy="688778"/>
+              </a:xfrm>
+              <a:prstGeom prst="rect">
+                <a:avLst/>
+              </a:prstGeom>
+            </p:spPr>
+            <p:txBody>
+              <a:bodyPr wrap="none">
+                <a:spAutoFit/>
+              </a:bodyPr>
+              <a:lstStyle/>
+              <a:p>
+                <a:pPr algn="ctr"/>
+                <a14:m>
+                  <m:oMathPara xmlns:m="http://schemas.openxmlformats.org/officeDocument/2006/math">
+                    <m:oMathParaPr>
+                      <m:jc m:val="centerGroup"/>
+                    </m:oMathParaPr>
+                    <m:oMath xmlns:m="http://schemas.openxmlformats.org/officeDocument/2006/math">
+                      <m:sSup>
+                        <m:sSupPr>
+                          <m:ctrlPr>
+                            <a:rPr lang="en-US" altLang="zh-TW" sz="1600" i="1" dirty="0" smtClean="0">
+                              <a:latin typeface="Cambria Math" panose="02040503050406030204" pitchFamily="18" charset="0"/>
+                              <a:ea typeface="Cambria Math" panose="02040503050406030204" pitchFamily="18" charset="0"/>
+                            </a:rPr>
+                          </m:ctrlPr>
+                        </m:sSupPr>
+                        <m:e>
+                          <m:d>
+                            <m:dPr>
+                              <m:begChr m:val="|"/>
+                              <m:endChr m:val="|"/>
+                              <m:ctrlPr>
+                                <a:rPr lang="en-US" altLang="zh-TW" sz="1600" i="1" dirty="0">
+                                  <a:latin typeface="Cambria Math" panose="02040503050406030204" pitchFamily="18" charset="0"/>
+                                  <a:ea typeface="Cambria Math" panose="02040503050406030204" pitchFamily="18" charset="0"/>
+                                </a:rPr>
+                              </m:ctrlPr>
+                            </m:dPr>
+                            <m:e>
+                              <m:nary>
+                                <m:naryPr>
+                                  <m:chr m:val="∑"/>
+                                  <m:limLoc m:val="subSup"/>
+                                  <m:supHide m:val="on"/>
+                                  <m:ctrlPr>
+                                    <a:rPr lang="en-US" altLang="zh-TW" sz="1600" i="1" dirty="0" smtClean="0">
+                                      <a:latin typeface="Cambria Math" panose="02040503050406030204" pitchFamily="18" charset="0"/>
+                                      <a:ea typeface="Cambria Math" panose="02040503050406030204" pitchFamily="18" charset="0"/>
+                                    </a:rPr>
+                                  </m:ctrlPr>
+                                </m:naryPr>
+                                <m:sub>
+                                  <m:r>
+                                    <a:rPr lang="en-US" altLang="zh-TW" sz="1600" b="1" i="1">
+                                      <a:latin typeface="Cambria Math" panose="02040503050406030204" pitchFamily="18" charset="0"/>
+                                    </a:rPr>
+                                    <m:t>𝑸</m:t>
+                                  </m:r>
+                                </m:sub>
+                                <m:sup/>
+                                <m:e>
+                                  <m:sSubSup>
+                                    <m:sSubSupPr>
+                                      <m:ctrlPr>
+                                        <a:rPr lang="en-US" altLang="zh-TW" sz="1600" i="1">
+                                          <a:latin typeface="Cambria Math" panose="02040503050406030204" pitchFamily="18" charset="0"/>
+                                        </a:rPr>
+                                      </m:ctrlPr>
+                                    </m:sSubSupPr>
+                                    <m:e>
+                                      <m:acc>
+                                        <m:accPr>
+                                          <m:chr m:val="̃"/>
+                                          <m:ctrlPr>
+                                            <a:rPr lang="en-US" altLang="zh-TW" sz="1600" i="1">
+                                              <a:latin typeface="Cambria Math" panose="02040503050406030204" pitchFamily="18" charset="0"/>
+                                            </a:rPr>
+                                          </m:ctrlPr>
+                                        </m:accPr>
+                                        <m:e>
+                                          <m:r>
+                                            <a:rPr lang="en-US" altLang="zh-TW" sz="1600" i="1">
+                                              <a:latin typeface="Cambria Math" panose="02040503050406030204" pitchFamily="18" charset="0"/>
+                                            </a:rPr>
+                                            <m:t>𝑀</m:t>
+                                          </m:r>
+                                        </m:e>
+                                      </m:acc>
+                                    </m:e>
+                                    <m:sub>
+                                      <m:r>
+                                        <a:rPr lang="en-US" altLang="zh-TW" sz="1600" i="1">
+                                          <a:latin typeface="Cambria Math" panose="02040503050406030204" pitchFamily="18" charset="0"/>
+                                        </a:rPr>
+                                        <m:t>𝑆</m:t>
+                                      </m:r>
+                                      <m:r>
+                                        <a:rPr lang="en-US" altLang="zh-TW" sz="1600" i="1">
+                                          <a:latin typeface="Cambria Math" panose="02040503050406030204" pitchFamily="18" charset="0"/>
+                                        </a:rPr>
+                                        <m:t>,</m:t>
+                                      </m:r>
+                                      <m:r>
+                                        <a:rPr lang="en-US" altLang="zh-TW" sz="1600" b="1" i="1">
+                                          <a:latin typeface="Cambria Math" panose="02040503050406030204" pitchFamily="18" charset="0"/>
+                                        </a:rPr>
+                                        <m:t>𝑸</m:t>
+                                      </m:r>
+                                    </m:sub>
+                                    <m:sup>
+                                      <m:acc>
+                                        <m:accPr>
+                                          <m:chr m:val="̂"/>
+                                          <m:ctrlPr>
+                                            <a:rPr lang="en-US" altLang="zh-TW" sz="1600" b="1" i="1">
+                                              <a:latin typeface="Cambria Math" panose="02040503050406030204" pitchFamily="18" charset="0"/>
+                                            </a:rPr>
+                                          </m:ctrlPr>
+                                        </m:accPr>
+                                        <m:e>
+                                          <m:r>
+                                            <a:rPr lang="zh-TW" altLang="en-US" sz="1600" b="1" i="1">
+                                              <a:latin typeface="Cambria Math" panose="02040503050406030204" pitchFamily="18" charset="0"/>
+                                            </a:rPr>
+                                            <m:t>𝜺</m:t>
+                                          </m:r>
+                                        </m:e>
+                                      </m:acc>
+                                      <m:r>
+                                        <a:rPr lang="en-US" altLang="zh-TW" sz="1600" i="1">
+                                          <a:latin typeface="Cambria Math" panose="02040503050406030204" pitchFamily="18" charset="0"/>
+                                        </a:rPr>
+                                        <m:t>,</m:t>
+                                      </m:r>
+                                      <m:r>
+                                        <a:rPr lang="en-US" altLang="zh-TW" sz="1600" b="0" i="1" smtClean="0">
+                                          <a:latin typeface="Cambria Math" panose="02040503050406030204" pitchFamily="18" charset="0"/>
+                                        </a:rPr>
+                                        <m:t>±1</m:t>
+                                      </m:r>
+                                    </m:sup>
+                                  </m:sSubSup>
+                                </m:e>
+                              </m:nary>
+                              <m:sSup>
+                                <m:sSupPr>
+                                  <m:ctrlPr>
+                                    <a:rPr lang="en-US" altLang="zh-TW" sz="1600" b="0" i="1" dirty="0" smtClean="0">
+                                      <a:latin typeface="Cambria Math" panose="02040503050406030204" pitchFamily="18" charset="0"/>
+                                      <a:ea typeface="Cambria Math" panose="02040503050406030204" pitchFamily="18" charset="0"/>
+                                    </a:rPr>
+                                  </m:ctrlPr>
+                                </m:sSupPr>
+                                <m:e>
+                                  <m:r>
+                                    <a:rPr lang="en-US" altLang="zh-TW" sz="1600" b="0" i="1" dirty="0" smtClean="0">
+                                      <a:latin typeface="Cambria Math" panose="02040503050406030204" pitchFamily="18" charset="0"/>
+                                      <a:ea typeface="Cambria Math" panose="02040503050406030204" pitchFamily="18" charset="0"/>
+                                    </a:rPr>
+                                    <m:t>𝑒</m:t>
+                                  </m:r>
+                                </m:e>
+                                <m:sup>
+                                  <m:r>
+                                    <a:rPr lang="en-US" altLang="zh-TW" sz="1600" b="0" i="1" dirty="0" smtClean="0">
+                                      <a:latin typeface="Cambria Math" panose="02040503050406030204" pitchFamily="18" charset="0"/>
+                                      <a:ea typeface="Cambria Math" panose="02040503050406030204" pitchFamily="18" charset="0"/>
+                                    </a:rPr>
+                                    <m:t>𝑖</m:t>
+                                  </m:r>
+                                  <m:r>
+                                    <a:rPr lang="en-US" altLang="zh-TW" sz="1600" b="1" i="1" dirty="0" smtClean="0">
+                                      <a:latin typeface="Cambria Math" panose="02040503050406030204" pitchFamily="18" charset="0"/>
+                                      <a:ea typeface="Cambria Math" panose="02040503050406030204" pitchFamily="18" charset="0"/>
+                                    </a:rPr>
+                                    <m:t>𝑸</m:t>
+                                  </m:r>
+                                  <m:r>
+                                    <a:rPr lang="en-US" altLang="zh-TW" sz="1600" b="0" i="1" dirty="0" smtClean="0">
+                                      <a:latin typeface="Cambria Math" panose="02040503050406030204" pitchFamily="18" charset="0"/>
+                                      <a:ea typeface="Cambria Math" panose="02040503050406030204" pitchFamily="18" charset="0"/>
+                                    </a:rPr>
+                                    <m:t>⋅</m:t>
+                                  </m:r>
+                                  <m:sSub>
+                                    <m:sSubPr>
+                                      <m:ctrlPr>
+                                        <a:rPr lang="en-US" altLang="zh-TW" sz="1600" b="0" i="1" dirty="0" smtClean="0">
+                                          <a:latin typeface="Cambria Math" panose="02040503050406030204" pitchFamily="18" charset="0"/>
+                                          <a:ea typeface="Cambria Math" panose="02040503050406030204" pitchFamily="18" charset="0"/>
+                                        </a:rPr>
+                                      </m:ctrlPr>
+                                    </m:sSubPr>
+                                    <m:e>
+                                      <m:r>
+                                        <a:rPr lang="en-US" altLang="zh-TW" sz="1600" b="1" i="1" dirty="0" smtClean="0">
+                                          <a:latin typeface="Cambria Math" panose="02040503050406030204" pitchFamily="18" charset="0"/>
+                                          <a:ea typeface="Cambria Math" panose="02040503050406030204" pitchFamily="18" charset="0"/>
+                                        </a:rPr>
+                                        <m:t>𝑹</m:t>
+                                      </m:r>
+                                    </m:e>
+                                    <m:sub>
+                                      <m:r>
+                                        <a:rPr lang="en-US" altLang="zh-TW" sz="1600" b="0" i="1" dirty="0" smtClean="0">
+                                          <a:latin typeface="Cambria Math" panose="02040503050406030204" pitchFamily="18" charset="0"/>
+                                          <a:ea typeface="Cambria Math" panose="02040503050406030204" pitchFamily="18" charset="0"/>
+                                        </a:rPr>
+                                        <m:t>𝑐</m:t>
+                                      </m:r>
+                                    </m:sub>
+                                  </m:sSub>
+                                </m:sup>
+                              </m:sSup>
+                            </m:e>
+                          </m:d>
+                        </m:e>
+                        <m:sup>
+                          <m:r>
+                            <a:rPr lang="en-US" altLang="zh-TW" sz="1600" i="1" dirty="0">
+                              <a:latin typeface="Cambria Math" panose="02040503050406030204" pitchFamily="18" charset="0"/>
+                              <a:ea typeface="Cambria Math" panose="02040503050406030204" pitchFamily="18" charset="0"/>
+                            </a:rPr>
+                            <m:t>2</m:t>
+                          </m:r>
+                        </m:sup>
+                      </m:sSup>
+                    </m:oMath>
+                  </m:oMathPara>
+                </a14:m>
+                <a:endParaRPr lang="zh-TW" altLang="en-US" sz="1600" dirty="0"/>
+              </a:p>
+            </p:txBody>
+          </p:sp>
+        </mc:Choice>
+        <mc:Fallback>
+          <p:sp>
+            <p:nvSpPr>
+              <p:cNvPr id="64" name="矩形 63">
+                <a:extLst>
+                  <a:ext uri="{FF2B5EF4-FFF2-40B4-BE49-F238E27FC236}">
+                    <a16:creationId xmlns:a16="http://schemas.microsoft.com/office/drawing/2014/main" id="{86DCE3E2-7B4F-4618-939E-F776EED7617B}"/>
+                  </a:ext>
+                </a:extLst>
+              </p:cNvPr>
+              <p:cNvSpPr>
+                <a:spLocks noRot="1" noChangeAspect="1" noMove="1" noResize="1" noEditPoints="1" noAdjustHandles="1" noChangeArrowheads="1" noChangeShapeType="1" noTextEdit="1"/>
+              </p:cNvSpPr>
+              <p:nvPr/>
+            </p:nvSpPr>
+            <p:spPr>
+              <a:xfrm>
+                <a:off x="7899380" y="5831681"/>
+                <a:ext cx="1906932" cy="688778"/>
+              </a:xfrm>
+              <a:prstGeom prst="rect">
+                <a:avLst/>
+              </a:prstGeom>
+              <a:blipFill>
+                <a:blip r:embed="rId43"/>
+                <a:stretch>
+                  <a:fillRect/>
+                </a:stretch>
+              </a:blipFill>
+            </p:spPr>
+            <p:txBody>
+              <a:bodyPr/>
+              <a:lstStyle/>
+              <a:p>
+                <a:r>
+                  <a:rPr lang="zh-TW" altLang="en-US">
+                    <a:noFill/>
+                  </a:rPr>
+                  <a:t> </a:t>
+                </a:r>
+              </a:p>
+            </p:txBody>
+          </p:sp>
+        </mc:Fallback>
+      </mc:AlternateContent>
     </p:spTree>
     <p:extLst>
       <p:ext uri="{BB962C8B-B14F-4D97-AF65-F5344CB8AC3E}">

--- a/Final/Figures/wavepacket_l=1.pptx
+++ b/Final/Figures/wavepacket_l=1.pptx
@@ -254,7 +254,7 @@
           <a:p>
             <a:fld id="{B4A272A4-1B6B-4C0A-B74D-70EF2D8C7D55}" type="datetimeFigureOut">
               <a:rPr lang="zh-TW" altLang="en-US" smtClean="0"/>
-              <a:t>2026/5/27</a:t>
+              <a:t>2026/7/1</a:t>
             </a:fld>
             <a:endParaRPr lang="zh-TW" altLang="en-US"/>
           </a:p>
@@ -424,7 +424,7 @@
           <a:p>
             <a:fld id="{B4A272A4-1B6B-4C0A-B74D-70EF2D8C7D55}" type="datetimeFigureOut">
               <a:rPr lang="zh-TW" altLang="en-US" smtClean="0"/>
-              <a:t>2026/5/27</a:t>
+              <a:t>2026/7/1</a:t>
             </a:fld>
             <a:endParaRPr lang="zh-TW" altLang="en-US"/>
           </a:p>
@@ -604,7 +604,7 @@
           <a:p>
             <a:fld id="{B4A272A4-1B6B-4C0A-B74D-70EF2D8C7D55}" type="datetimeFigureOut">
               <a:rPr lang="zh-TW" altLang="en-US" smtClean="0"/>
-              <a:t>2026/5/27</a:t>
+              <a:t>2026/7/1</a:t>
             </a:fld>
             <a:endParaRPr lang="zh-TW" altLang="en-US"/>
           </a:p>
@@ -774,7 +774,7 @@
           <a:p>
             <a:fld id="{B4A272A4-1B6B-4C0A-B74D-70EF2D8C7D55}" type="datetimeFigureOut">
               <a:rPr lang="zh-TW" altLang="en-US" smtClean="0"/>
-              <a:t>2026/5/27</a:t>
+              <a:t>2026/7/1</a:t>
             </a:fld>
             <a:endParaRPr lang="zh-TW" altLang="en-US"/>
           </a:p>
@@ -1018,7 +1018,7 @@
           <a:p>
             <a:fld id="{B4A272A4-1B6B-4C0A-B74D-70EF2D8C7D55}" type="datetimeFigureOut">
               <a:rPr lang="zh-TW" altLang="en-US" smtClean="0"/>
-              <a:t>2026/5/27</a:t>
+              <a:t>2026/7/1</a:t>
             </a:fld>
             <a:endParaRPr lang="zh-TW" altLang="en-US"/>
           </a:p>
@@ -1250,7 +1250,7 @@
           <a:p>
             <a:fld id="{B4A272A4-1B6B-4C0A-B74D-70EF2D8C7D55}" type="datetimeFigureOut">
               <a:rPr lang="zh-TW" altLang="en-US" smtClean="0"/>
-              <a:t>2026/5/27</a:t>
+              <a:t>2026/7/1</a:t>
             </a:fld>
             <a:endParaRPr lang="zh-TW" altLang="en-US"/>
           </a:p>
@@ -1617,7 +1617,7 @@
           <a:p>
             <a:fld id="{B4A272A4-1B6B-4C0A-B74D-70EF2D8C7D55}" type="datetimeFigureOut">
               <a:rPr lang="zh-TW" altLang="en-US" smtClean="0"/>
-              <a:t>2026/5/27</a:t>
+              <a:t>2026/7/1</a:t>
             </a:fld>
             <a:endParaRPr lang="zh-TW" altLang="en-US"/>
           </a:p>
@@ -1735,7 +1735,7 @@
           <a:p>
             <a:fld id="{B4A272A4-1B6B-4C0A-B74D-70EF2D8C7D55}" type="datetimeFigureOut">
               <a:rPr lang="zh-TW" altLang="en-US" smtClean="0"/>
-              <a:t>2026/5/27</a:t>
+              <a:t>2026/7/1</a:t>
             </a:fld>
             <a:endParaRPr lang="zh-TW" altLang="en-US"/>
           </a:p>
@@ -1830,7 +1830,7 @@
           <a:p>
             <a:fld id="{B4A272A4-1B6B-4C0A-B74D-70EF2D8C7D55}" type="datetimeFigureOut">
               <a:rPr lang="zh-TW" altLang="en-US" smtClean="0"/>
-              <a:t>2026/5/27</a:t>
+              <a:t>2026/7/1</a:t>
             </a:fld>
             <a:endParaRPr lang="zh-TW" altLang="en-US"/>
           </a:p>
@@ -2107,7 +2107,7 @@
           <a:p>
             <a:fld id="{B4A272A4-1B6B-4C0A-B74D-70EF2D8C7D55}" type="datetimeFigureOut">
               <a:rPr lang="zh-TW" altLang="en-US" smtClean="0"/>
-              <a:t>2026/5/27</a:t>
+              <a:t>2026/7/1</a:t>
             </a:fld>
             <a:endParaRPr lang="zh-TW" altLang="en-US"/>
           </a:p>
@@ -2364,7 +2364,7 @@
           <a:p>
             <a:fld id="{B4A272A4-1B6B-4C0A-B74D-70EF2D8C7D55}" type="datetimeFigureOut">
               <a:rPr lang="zh-TW" altLang="en-US" smtClean="0"/>
-              <a:t>2026/5/27</a:t>
+              <a:t>2026/7/1</a:t>
             </a:fld>
             <a:endParaRPr lang="zh-TW" altLang="en-US"/>
           </a:p>
@@ -2577,7 +2577,7 @@
           <a:p>
             <a:fld id="{B4A272A4-1B6B-4C0A-B74D-70EF2D8C7D55}" type="datetimeFigureOut">
               <a:rPr lang="zh-TW" altLang="en-US" smtClean="0"/>
-              <a:t>2026/5/27</a:t>
+              <a:t>2026/7/1</a:t>
             </a:fld>
             <a:endParaRPr lang="zh-TW" altLang="en-US"/>
           </a:p>
@@ -8839,8 +8839,8 @@
           </a:p>
         </p:txBody>
       </p:sp>
-      <mc:AlternateContent xmlns:mc="http://schemas.openxmlformats.org/markup-compatibility/2006">
-        <mc:Choice xmlns:a14="http://schemas.microsoft.com/office/drawing/2010/main" Requires="a14">
+      <mc:AlternateContent xmlns:mc="http://schemas.openxmlformats.org/markup-compatibility/2006" xmlns:a14="http://schemas.microsoft.com/office/drawing/2010/main">
+        <mc:Choice Requires="a14">
           <p:sp>
             <p:nvSpPr>
               <p:cNvPr id="49" name="矩形: 圓角 48">
@@ -9029,7 +9029,7 @@
             </p:txBody>
           </p:sp>
         </mc:Choice>
-        <mc:Fallback>
+        <mc:Fallback xmlns="">
           <p:sp>
             <p:nvSpPr>
               <p:cNvPr id="49" name="矩形: 圓角 48">
@@ -9076,8 +9076,8 @@
           </p:sp>
         </mc:Fallback>
       </mc:AlternateContent>
-      <mc:AlternateContent xmlns:mc="http://schemas.openxmlformats.org/markup-compatibility/2006">
-        <mc:Choice xmlns:a14="http://schemas.microsoft.com/office/drawing/2010/main" Requires="a14">
+      <mc:AlternateContent xmlns:mc="http://schemas.openxmlformats.org/markup-compatibility/2006" xmlns:a14="http://schemas.microsoft.com/office/drawing/2010/main">
+        <mc:Choice Requires="a14">
           <p:sp>
             <p:nvSpPr>
               <p:cNvPr id="25" name="矩形: 圓角 24">
@@ -9266,7 +9266,7 @@
             </p:txBody>
           </p:sp>
         </mc:Choice>
-        <mc:Fallback>
+        <mc:Fallback xmlns="">
           <p:sp>
             <p:nvSpPr>
               <p:cNvPr id="25" name="矩形: 圓角 24">
@@ -9313,8 +9313,8 @@
           </p:sp>
         </mc:Fallback>
       </mc:AlternateContent>
-      <mc:AlternateContent xmlns:mc="http://schemas.openxmlformats.org/markup-compatibility/2006">
-        <mc:Choice xmlns:a14="http://schemas.microsoft.com/office/drawing/2010/main" Requires="a14">
+      <mc:AlternateContent xmlns:mc="http://schemas.openxmlformats.org/markup-compatibility/2006" xmlns:a14="http://schemas.microsoft.com/office/drawing/2010/main">
+        <mc:Choice Requires="a14">
           <p:sp>
             <p:nvSpPr>
               <p:cNvPr id="56" name="矩形: 圓角 55">
@@ -9437,7 +9437,7 @@
             </p:txBody>
           </p:sp>
         </mc:Choice>
-        <mc:Fallback>
+        <mc:Fallback xmlns="">
           <p:sp>
             <p:nvSpPr>
               <p:cNvPr id="56" name="矩形: 圓角 55">
@@ -9484,8 +9484,8 @@
           </p:sp>
         </mc:Fallback>
       </mc:AlternateContent>
-      <mc:AlternateContent xmlns:mc="http://schemas.openxmlformats.org/markup-compatibility/2006">
-        <mc:Choice xmlns:a14="http://schemas.microsoft.com/office/drawing/2010/main" Requires="a14">
+      <mc:AlternateContent xmlns:mc="http://schemas.openxmlformats.org/markup-compatibility/2006" xmlns:a14="http://schemas.microsoft.com/office/drawing/2010/main">
+        <mc:Choice Requires="a14">
           <p:sp>
             <p:nvSpPr>
               <p:cNvPr id="77" name="矩形: 圓角 76">
@@ -9608,7 +9608,7 @@
             </p:txBody>
           </p:sp>
         </mc:Choice>
-        <mc:Fallback>
+        <mc:Fallback xmlns="">
           <p:sp>
             <p:nvSpPr>
               <p:cNvPr id="77" name="矩形: 圓角 76">
@@ -9974,10 +9974,10 @@
         <mc:Choice xmlns:a14="http://schemas.microsoft.com/office/drawing/2010/main" Requires="a14">
           <p:sp>
             <p:nvSpPr>
-              <p:cNvPr id="55" name="矩形 54">
+              <p:cNvPr id="58" name="矩形 57">
                 <a:extLst>
                   <a:ext uri="{FF2B5EF4-FFF2-40B4-BE49-F238E27FC236}">
-                    <a16:creationId xmlns:a16="http://schemas.microsoft.com/office/drawing/2014/main" id="{05426F10-216E-470C-94FF-8FBAC4B58B8E}"/>
+                    <a16:creationId xmlns:a16="http://schemas.microsoft.com/office/drawing/2014/main" id="{3AD01EBF-BD98-4390-9100-BC55DACA90DB}"/>
                   </a:ext>
                 </a:extLst>
               </p:cNvPr>
@@ -9986,8 +9986,8 @@
             </p:nvSpPr>
             <p:spPr>
               <a:xfrm>
-                <a:off x="1230464" y="1352357"/>
-                <a:ext cx="1198533" cy="555152"/>
+                <a:off x="1335008" y="1315026"/>
+                <a:ext cx="1105559" cy="555793"/>
               </a:xfrm>
               <a:prstGeom prst="rect">
                 <a:avLst/>
@@ -10055,26 +10055,6 @@
                                   </m:acc>
                                 </m:e>
                                 <m:sub>
-                                  <m:r>
-                                    <a:rPr lang="en-US" altLang="zh-TW" sz="2000" i="1">
-                                      <a:latin typeface="Cambria Math" panose="02040503050406030204" pitchFamily="18" charset="0"/>
-                                    </a:rPr>
-                                    <m:t>𝑆</m:t>
-                                  </m:r>
-                                  <m:r>
-                                    <a:rPr lang="en-US" altLang="zh-TW" sz="2000" i="1">
-                                      <a:latin typeface="Cambria Math" panose="02040503050406030204" pitchFamily="18" charset="0"/>
-                                    </a:rPr>
-                                    <m:t>,</m:t>
-                                  </m:r>
-                                  <m:r>
-                                    <a:rPr lang="en-US" altLang="zh-TW" sz="2000" b="1" i="1">
-                                      <a:latin typeface="Cambria Math" panose="02040503050406030204" pitchFamily="18" charset="0"/>
-                                    </a:rPr>
-                                    <m:t>𝑸</m:t>
-                                  </m:r>
-                                </m:sub>
-                                <m:sup>
                                   <m:acc>
                                     <m:accPr>
                                       <m:chr m:val="̂"/>
@@ -10103,7 +10083,27 @@
                                     <a:rPr lang="en-US" altLang="zh-TW" sz="2000" b="0" i="1" smtClean="0">
                                       <a:latin typeface="Cambria Math" panose="02040503050406030204" pitchFamily="18" charset="0"/>
                                     </a:rPr>
-                                    <m:t>±1</m:t>
+                                    <m:t>0</m:t>
+                                  </m:r>
+                                </m:sub>
+                                <m:sup>
+                                  <m:r>
+                                    <a:rPr lang="en-US" altLang="zh-TW" sz="2000" i="1">
+                                      <a:latin typeface="Cambria Math" panose="02040503050406030204" pitchFamily="18" charset="0"/>
+                                    </a:rPr>
+                                    <m:t>𝑆</m:t>
+                                  </m:r>
+                                  <m:r>
+                                    <a:rPr lang="en-US" altLang="zh-TW" sz="2000" i="1">
+                                      <a:latin typeface="Cambria Math" panose="02040503050406030204" pitchFamily="18" charset="0"/>
+                                    </a:rPr>
+                                    <m:t>,</m:t>
+                                  </m:r>
+                                  <m:r>
+                                    <a:rPr lang="en-US" altLang="zh-TW" sz="2000" b="1" i="1">
+                                      <a:latin typeface="Cambria Math" panose="02040503050406030204" pitchFamily="18" charset="0"/>
+                                    </a:rPr>
+                                    <m:t>𝑸</m:t>
                                   </m:r>
                                 </m:sup>
                               </m:sSubSup>
@@ -10136,10 +10136,10 @@
         <mc:Fallback>
           <p:sp>
             <p:nvSpPr>
-              <p:cNvPr id="55" name="矩形 54">
+              <p:cNvPr id="58" name="矩形 57">
                 <a:extLst>
                   <a:ext uri="{FF2B5EF4-FFF2-40B4-BE49-F238E27FC236}">
-                    <a16:creationId xmlns:a16="http://schemas.microsoft.com/office/drawing/2014/main" id="{05426F10-216E-470C-94FF-8FBAC4B58B8E}"/>
+                    <a16:creationId xmlns:a16="http://schemas.microsoft.com/office/drawing/2014/main" id="{3AD01EBF-BD98-4390-9100-BC55DACA90DB}"/>
                   </a:ext>
                 </a:extLst>
               </p:cNvPr>
@@ -10150,8 +10150,8 @@
             </p:nvSpPr>
             <p:spPr>
               <a:xfrm>
-                <a:off x="1230464" y="1352357"/>
-                <a:ext cx="1198533" cy="555152"/>
+                <a:off x="1335008" y="1315026"/>
+                <a:ext cx="1105559" cy="555793"/>
               </a:xfrm>
               <a:prstGeom prst="rect">
                 <a:avLst/>
@@ -10182,10 +10182,10 @@
         <mc:Choice xmlns:a14="http://schemas.microsoft.com/office/drawing/2010/main" Requires="a14">
           <p:sp>
             <p:nvSpPr>
-              <p:cNvPr id="57" name="矩形 56">
+              <p:cNvPr id="59" name="矩形 58">
                 <a:extLst>
                   <a:ext uri="{FF2B5EF4-FFF2-40B4-BE49-F238E27FC236}">
-                    <a16:creationId xmlns:a16="http://schemas.microsoft.com/office/drawing/2014/main" id="{71DF72DB-AC6D-44CF-9900-BC2A68F4814C}"/>
+                    <a16:creationId xmlns:a16="http://schemas.microsoft.com/office/drawing/2014/main" id="{D9748BA5-FC0D-414C-AE19-56481F128827}"/>
                   </a:ext>
                 </a:extLst>
               </p:cNvPr>
@@ -10194,15 +10194,15 @@
             </p:nvSpPr>
             <p:spPr>
               <a:xfrm>
-                <a:off x="3017747" y="1218731"/>
-                <a:ext cx="1906932" cy="688778"/>
+                <a:off x="2611825" y="1280786"/>
+                <a:ext cx="2486552" cy="624273"/>
               </a:xfrm>
               <a:prstGeom prst="rect">
                 <a:avLst/>
               </a:prstGeom>
             </p:spPr>
             <p:txBody>
-              <a:bodyPr wrap="none">
+              <a:bodyPr wrap="square">
                 <a:spAutoFit/>
               </a:bodyPr>
               <a:lstStyle/>
@@ -10217,7 +10217,7 @@
                       <m:sSup>
                         <m:sSupPr>
                           <m:ctrlPr>
-                            <a:rPr lang="en-US" altLang="zh-TW" sz="1600" i="1" dirty="0" smtClean="0">
+                            <a:rPr lang="en-US" altLang="zh-TW" sz="2000" i="1" dirty="0" smtClean="0">
                               <a:latin typeface="Cambria Math" panose="02040503050406030204" pitchFamily="18" charset="0"/>
                               <a:ea typeface="Cambria Math" panose="02040503050406030204" pitchFamily="18" charset="0"/>
                             </a:rPr>
@@ -10229,162 +10229,125 @@
                               <m:begChr m:val="|"/>
                               <m:endChr m:val="|"/>
                               <m:ctrlPr>
-                                <a:rPr lang="en-US" altLang="zh-TW" sz="1600" i="1" dirty="0">
+                                <a:rPr lang="en-US" altLang="zh-TW" sz="2000" i="1" dirty="0">
                                   <a:latin typeface="Cambria Math" panose="02040503050406030204" pitchFamily="18" charset="0"/>
                                   <a:ea typeface="Cambria Math" panose="02040503050406030204" pitchFamily="18" charset="0"/>
                                 </a:rPr>
                               </m:ctrlPr>
                             </m:dPr>
                             <m:e>
-                              <m:nary>
-                                <m:naryPr>
-                                  <m:chr m:val="∑"/>
-                                  <m:limLoc m:val="subSup"/>
-                                  <m:supHide m:val="on"/>
+                              <m:sSubSup>
+                                <m:sSubSupPr>
                                   <m:ctrlPr>
-                                    <a:rPr lang="en-US" altLang="zh-TW" sz="1600" i="1" dirty="0" smtClean="0">
+                                    <a:rPr lang="en-US" altLang="zh-TW" sz="2000" b="0" i="1" dirty="0" smtClean="0">
                                       <a:latin typeface="Cambria Math" panose="02040503050406030204" pitchFamily="18" charset="0"/>
                                       <a:ea typeface="Cambria Math" panose="02040503050406030204" pitchFamily="18" charset="0"/>
                                     </a:rPr>
                                   </m:ctrlPr>
-                                </m:naryPr>
+                                </m:sSubSupPr>
+                                <m:e>
+                                  <m:r>
+                                    <m:rPr>
+                                      <m:sty m:val="p"/>
+                                    </m:rPr>
+                                    <a:rPr lang="en-US" altLang="zh-TW" sz="2000" b="0" i="0" dirty="0" smtClean="0">
+                                      <a:latin typeface="Cambria Math" panose="02040503050406030204" pitchFamily="18" charset="0"/>
+                                      <a:ea typeface="Cambria Math" panose="02040503050406030204" pitchFamily="18" charset="0"/>
+                                    </a:rPr>
+                                    <m:t>Φ</m:t>
+                                  </m:r>
+                                </m:e>
                                 <m:sub>
-                                  <m:r>
-                                    <a:rPr lang="en-US" altLang="zh-TW" sz="1600" b="1" i="1">
-                                      <a:latin typeface="Cambria Math" panose="02040503050406030204" pitchFamily="18" charset="0"/>
-                                    </a:rPr>
-                                    <m:t>𝑸</m:t>
-                                  </m:r>
-                                </m:sub>
-                                <m:sup/>
-                                <m:e>
-                                  <m:sSubSup>
-                                    <m:sSubSupPr>
+                                  <m:acc>
+                                    <m:accPr>
+                                      <m:chr m:val="̂"/>
                                       <m:ctrlPr>
-                                        <a:rPr lang="en-US" altLang="zh-TW" sz="1600" i="1">
+                                        <a:rPr lang="en-US" altLang="zh-TW" sz="2000" b="1" i="1">
                                           <a:latin typeface="Cambria Math" panose="02040503050406030204" pitchFamily="18" charset="0"/>
                                         </a:rPr>
                                       </m:ctrlPr>
-                                    </m:sSubSupPr>
+                                    </m:accPr>
                                     <m:e>
-                                      <m:acc>
-                                        <m:accPr>
-                                          <m:chr m:val="̃"/>
-                                          <m:ctrlPr>
-                                            <a:rPr lang="en-US" altLang="zh-TW" sz="1600" i="1">
-                                              <a:latin typeface="Cambria Math" panose="02040503050406030204" pitchFamily="18" charset="0"/>
-                                            </a:rPr>
-                                          </m:ctrlPr>
-                                        </m:accPr>
-                                        <m:e>
-                                          <m:r>
-                                            <a:rPr lang="en-US" altLang="zh-TW" sz="1600" i="1">
-                                              <a:latin typeface="Cambria Math" panose="02040503050406030204" pitchFamily="18" charset="0"/>
-                                            </a:rPr>
-                                            <m:t>𝑀</m:t>
-                                          </m:r>
-                                        </m:e>
-                                      </m:acc>
-                                    </m:e>
-                                    <m:sub>
                                       <m:r>
-                                        <a:rPr lang="en-US" altLang="zh-TW" sz="1600" i="1">
+                                        <a:rPr lang="zh-TW" altLang="en-US" sz="2000" b="1" i="1">
                                           <a:latin typeface="Cambria Math" panose="02040503050406030204" pitchFamily="18" charset="0"/>
                                         </a:rPr>
-                                        <m:t>𝑆</m:t>
+                                        <m:t>𝜺</m:t>
                                       </m:r>
+                                    </m:e>
+                                  </m:acc>
+                                  <m:r>
+                                    <a:rPr lang="en-US" altLang="zh-TW" sz="2000" i="1">
+                                      <a:latin typeface="Cambria Math" panose="02040503050406030204" pitchFamily="18" charset="0"/>
+                                    </a:rPr>
+                                    <m:t>,</m:t>
+                                  </m:r>
+                                  <m:r>
+                                    <a:rPr lang="en-US" altLang="zh-TW" sz="2000" b="0" i="1" smtClean="0">
+                                      <a:latin typeface="Cambria Math" panose="02040503050406030204" pitchFamily="18" charset="0"/>
+                                    </a:rPr>
+                                    <m:t>0</m:t>
+                                  </m:r>
+                                </m:sub>
+                                <m:sup>
+                                  <m:r>
+                                    <a:rPr lang="en-US" altLang="zh-TW" sz="2000" i="1" dirty="0">
+                                      <a:latin typeface="Cambria Math" panose="02040503050406030204" pitchFamily="18" charset="0"/>
+                                      <a:ea typeface="Cambria Math" panose="02040503050406030204" pitchFamily="18" charset="0"/>
+                                    </a:rPr>
+                                    <m:t>𝐾</m:t>
+                                  </m:r>
+                                  <m:r>
+                                    <a:rPr lang="en-US" altLang="zh-TW" sz="2000" i="1" dirty="0">
+                                      <a:latin typeface="Cambria Math" panose="02040503050406030204" pitchFamily="18" charset="0"/>
+                                      <a:ea typeface="Cambria Math" panose="02040503050406030204" pitchFamily="18" charset="0"/>
+                                    </a:rPr>
+                                    <m:t>/</m:t>
+                                  </m:r>
+                                  <m:sSup>
+                                    <m:sSupPr>
+                                      <m:ctrlPr>
+                                        <a:rPr lang="en-US" altLang="zh-TW" sz="2000" i="1" dirty="0">
+                                          <a:latin typeface="Cambria Math" panose="02040503050406030204" pitchFamily="18" charset="0"/>
+                                          <a:ea typeface="Cambria Math" panose="02040503050406030204" pitchFamily="18" charset="0"/>
+                                        </a:rPr>
+                                      </m:ctrlPr>
+                                    </m:sSupPr>
+                                    <m:e>
                                       <m:r>
-                                        <a:rPr lang="en-US" altLang="zh-TW" sz="1600" i="1">
+                                        <a:rPr lang="en-US" altLang="zh-TW" sz="2000" i="1" dirty="0">
                                           <a:latin typeface="Cambria Math" panose="02040503050406030204" pitchFamily="18" charset="0"/>
+                                          <a:ea typeface="Cambria Math" panose="02040503050406030204" pitchFamily="18" charset="0"/>
                                         </a:rPr>
-                                        <m:t>,</m:t>
+                                        <m:t>𝐾</m:t>
                                       </m:r>
+                                    </m:e>
+                                    <m:sup>
                                       <m:r>
-                                        <a:rPr lang="en-US" altLang="zh-TW" sz="1600" b="1" i="1">
+                                        <a:rPr lang="en-US" altLang="zh-TW" sz="2000" i="1" dirty="0">
                                           <a:latin typeface="Cambria Math" panose="02040503050406030204" pitchFamily="18" charset="0"/>
+                                          <a:ea typeface="Cambria Math" panose="02040503050406030204" pitchFamily="18" charset="0"/>
                                         </a:rPr>
-                                        <m:t>𝑸</m:t>
-                                      </m:r>
-                                    </m:sub>
-                                    <m:sup>
-                                      <m:acc>
-                                        <m:accPr>
-                                          <m:chr m:val="̂"/>
-                                          <m:ctrlPr>
-                                            <a:rPr lang="en-US" altLang="zh-TW" sz="1600" b="1" i="1">
-                                              <a:latin typeface="Cambria Math" panose="02040503050406030204" pitchFamily="18" charset="0"/>
-                                            </a:rPr>
-                                          </m:ctrlPr>
-                                        </m:accPr>
-                                        <m:e>
-                                          <m:r>
-                                            <a:rPr lang="zh-TW" altLang="en-US" sz="1600" b="1" i="1">
-                                              <a:latin typeface="Cambria Math" panose="02040503050406030204" pitchFamily="18" charset="0"/>
-                                            </a:rPr>
-                                            <m:t>𝜺</m:t>
-                                          </m:r>
-                                        </m:e>
-                                      </m:acc>
-                                      <m:r>
-                                        <a:rPr lang="en-US" altLang="zh-TW" sz="1600" i="1">
-                                          <a:latin typeface="Cambria Math" panose="02040503050406030204" pitchFamily="18" charset="0"/>
-                                        </a:rPr>
-                                        <m:t>,</m:t>
-                                      </m:r>
-                                      <m:r>
-                                        <a:rPr lang="en-US" altLang="zh-TW" sz="1600" b="0" i="1" smtClean="0">
-                                          <a:latin typeface="Cambria Math" panose="02040503050406030204" pitchFamily="18" charset="0"/>
-                                        </a:rPr>
-                                        <m:t>±1</m:t>
+                                        <m:t>′</m:t>
                                       </m:r>
                                     </m:sup>
-                                  </m:sSubSup>
-                                </m:e>
-                              </m:nary>
-                              <m:sSup>
-                                <m:sSupPr>
+                                  </m:sSup>
+                                </m:sup>
+                              </m:sSubSup>
+                              <m:d>
+                                <m:dPr>
                                   <m:ctrlPr>
-                                    <a:rPr lang="en-US" altLang="zh-TW" sz="1600" b="0" i="1" dirty="0" smtClean="0">
+                                    <a:rPr lang="en-US" altLang="zh-TW" sz="2000" i="1" dirty="0">
                                       <a:latin typeface="Cambria Math" panose="02040503050406030204" pitchFamily="18" charset="0"/>
                                       <a:ea typeface="Cambria Math" panose="02040503050406030204" pitchFamily="18" charset="0"/>
                                     </a:rPr>
                                   </m:ctrlPr>
-                                </m:sSupPr>
+                                </m:dPr>
                                 <m:e>
-                                  <m:r>
-                                    <a:rPr lang="en-US" altLang="zh-TW" sz="1600" b="0" i="1" dirty="0" smtClean="0">
-                                      <a:latin typeface="Cambria Math" panose="02040503050406030204" pitchFamily="18" charset="0"/>
-                                      <a:ea typeface="Cambria Math" panose="02040503050406030204" pitchFamily="18" charset="0"/>
-                                    </a:rPr>
-                                    <m:t>𝑒</m:t>
-                                  </m:r>
-                                </m:e>
-                                <m:sup>
-                                  <m:r>
-                                    <a:rPr lang="en-US" altLang="zh-TW" sz="1600" b="0" i="1" dirty="0" smtClean="0">
-                                      <a:latin typeface="Cambria Math" panose="02040503050406030204" pitchFamily="18" charset="0"/>
-                                      <a:ea typeface="Cambria Math" panose="02040503050406030204" pitchFamily="18" charset="0"/>
-                                    </a:rPr>
-                                    <m:t>𝑖</m:t>
-                                  </m:r>
-                                  <m:r>
-                                    <a:rPr lang="en-US" altLang="zh-TW" sz="1600" b="1" i="1" dirty="0" smtClean="0">
-                                      <a:latin typeface="Cambria Math" panose="02040503050406030204" pitchFamily="18" charset="0"/>
-                                      <a:ea typeface="Cambria Math" panose="02040503050406030204" pitchFamily="18" charset="0"/>
-                                    </a:rPr>
-                                    <m:t>𝑸</m:t>
-                                  </m:r>
-                                  <m:r>
-                                    <a:rPr lang="en-US" altLang="zh-TW" sz="1600" b="0" i="1" dirty="0" smtClean="0">
-                                      <a:latin typeface="Cambria Math" panose="02040503050406030204" pitchFamily="18" charset="0"/>
-                                      <a:ea typeface="Cambria Math" panose="02040503050406030204" pitchFamily="18" charset="0"/>
-                                    </a:rPr>
-                                    <m:t>⋅</m:t>
-                                  </m:r>
                                   <m:sSub>
                                     <m:sSubPr>
                                       <m:ctrlPr>
-                                        <a:rPr lang="en-US" altLang="zh-TW" sz="1600" b="0" i="1" dirty="0" smtClean="0">
+                                        <a:rPr lang="en-US" altLang="zh-TW" sz="2000" i="1" dirty="0">
                                           <a:latin typeface="Cambria Math" panose="02040503050406030204" pitchFamily="18" charset="0"/>
                                           <a:ea typeface="Cambria Math" panose="02040503050406030204" pitchFamily="18" charset="0"/>
                                         </a:rPr>
@@ -10392,7 +10355,7 @@
                                     </m:sSubPr>
                                     <m:e>
                                       <m:r>
-                                        <a:rPr lang="en-US" altLang="zh-TW" sz="1600" b="1" i="1" dirty="0" smtClean="0">
+                                        <a:rPr lang="en-US" altLang="zh-TW" sz="2000" b="1" i="1" dirty="0">
                                           <a:latin typeface="Cambria Math" panose="02040503050406030204" pitchFamily="18" charset="0"/>
                                           <a:ea typeface="Cambria Math" panose="02040503050406030204" pitchFamily="18" charset="0"/>
                                         </a:rPr>
@@ -10401,7 +10364,7 @@
                                     </m:e>
                                     <m:sub>
                                       <m:r>
-                                        <a:rPr lang="en-US" altLang="zh-TW" sz="1600" b="0" i="1" dirty="0" smtClean="0">
+                                        <a:rPr lang="en-US" altLang="zh-TW" sz="2000" i="1" dirty="0">
                                           <a:latin typeface="Cambria Math" panose="02040503050406030204" pitchFamily="18" charset="0"/>
                                           <a:ea typeface="Cambria Math" panose="02040503050406030204" pitchFamily="18" charset="0"/>
                                         </a:rPr>
@@ -10409,14 +10372,42 @@
                                       </m:r>
                                     </m:sub>
                                   </m:sSub>
-                                </m:sup>
-                              </m:sSup>
+                                  <m:r>
+                                    <a:rPr lang="en-US" altLang="zh-TW" sz="2000" i="1" dirty="0">
+                                      <a:latin typeface="Cambria Math" panose="02040503050406030204" pitchFamily="18" charset="0"/>
+                                      <a:ea typeface="Cambria Math" panose="02040503050406030204" pitchFamily="18" charset="0"/>
+                                    </a:rPr>
+                                    <m:t>, </m:t>
+                                  </m:r>
+                                  <m:r>
+                                    <a:rPr lang="en-US" altLang="zh-TW" sz="2000" b="1" i="1" dirty="0">
+                                      <a:latin typeface="Cambria Math" panose="02040503050406030204" pitchFamily="18" charset="0"/>
+                                      <a:ea typeface="Cambria Math" panose="02040503050406030204" pitchFamily="18" charset="0"/>
+                                    </a:rPr>
+                                    <m:t>𝒓</m:t>
+                                  </m:r>
+                                  <m:r>
+                                    <a:rPr lang="en-US" altLang="zh-TW" sz="2000" i="1" dirty="0">
+                                      <a:latin typeface="Cambria Math" panose="02040503050406030204" pitchFamily="18" charset="0"/>
+                                      <a:ea typeface="Cambria Math" panose="02040503050406030204" pitchFamily="18" charset="0"/>
+                                    </a:rPr>
+                                    <m:t>=</m:t>
+                                  </m:r>
+                                  <m:r>
+                                    <a:rPr lang="en-US" altLang="zh-TW" sz="2000" b="1" i="1" dirty="0">
+                                      <a:latin typeface="Cambria Math" panose="02040503050406030204" pitchFamily="18" charset="0"/>
+                                      <a:ea typeface="Cambria Math" panose="02040503050406030204" pitchFamily="18" charset="0"/>
+                                    </a:rPr>
+                                    <m:t>𝟎</m:t>
+                                  </m:r>
+                                </m:e>
+                              </m:d>
                             </m:e>
                           </m:d>
                         </m:e>
                         <m:sup>
                           <m:r>
-                            <a:rPr lang="en-US" altLang="zh-TW" sz="1600" i="1" dirty="0">
+                            <a:rPr lang="en-US" altLang="zh-TW" sz="2000" i="1" dirty="0">
                               <a:latin typeface="Cambria Math" panose="02040503050406030204" pitchFamily="18" charset="0"/>
                               <a:ea typeface="Cambria Math" panose="02040503050406030204" pitchFamily="18" charset="0"/>
                             </a:rPr>
@@ -10435,10 +10426,10 @@
         <mc:Fallback>
           <p:sp>
             <p:nvSpPr>
-              <p:cNvPr id="57" name="矩形 56">
+              <p:cNvPr id="59" name="矩形 58">
                 <a:extLst>
                   <a:ext uri="{FF2B5EF4-FFF2-40B4-BE49-F238E27FC236}">
-                    <a16:creationId xmlns:a16="http://schemas.microsoft.com/office/drawing/2014/main" id="{71DF72DB-AC6D-44CF-9900-BC2A68F4814C}"/>
+                    <a16:creationId xmlns:a16="http://schemas.microsoft.com/office/drawing/2014/main" id="{D9748BA5-FC0D-414C-AE19-56481F128827}"/>
                   </a:ext>
                 </a:extLst>
               </p:cNvPr>
@@ -10449,8 +10440,8 @@
             </p:nvSpPr>
             <p:spPr>
               <a:xfrm>
-                <a:off x="3017747" y="1218731"/>
-                <a:ext cx="1906932" cy="688778"/>
+                <a:off x="2611825" y="1280786"/>
+                <a:ext cx="2486552" cy="624273"/>
               </a:xfrm>
               <a:prstGeom prst="rect">
                 <a:avLst/>
@@ -10481,10 +10472,10 @@
         <mc:Choice xmlns:a14="http://schemas.microsoft.com/office/drawing/2010/main" Requires="a14">
           <p:sp>
             <p:nvSpPr>
-              <p:cNvPr id="58" name="矩形 57">
+              <p:cNvPr id="60" name="矩形 59">
                 <a:extLst>
                   <a:ext uri="{FF2B5EF4-FFF2-40B4-BE49-F238E27FC236}">
-                    <a16:creationId xmlns:a16="http://schemas.microsoft.com/office/drawing/2014/main" id="{9DF4A951-F53E-4E34-84BC-C798BE6D74C9}"/>
+                    <a16:creationId xmlns:a16="http://schemas.microsoft.com/office/drawing/2014/main" id="{0B9805BE-3584-40D3-A141-CCBCDA03B226}"/>
                   </a:ext>
                 </a:extLst>
               </p:cNvPr>
@@ -10493,8 +10484,8 @@
             </p:nvSpPr>
             <p:spPr>
               <a:xfrm>
-                <a:off x="1230464" y="5965307"/>
-                <a:ext cx="1198533" cy="555152"/>
+                <a:off x="6282612" y="1315026"/>
+                <a:ext cx="1105559" cy="555793"/>
               </a:xfrm>
               <a:prstGeom prst="rect">
                 <a:avLst/>
@@ -10562,26 +10553,6 @@
                                   </m:acc>
                                 </m:e>
                                 <m:sub>
-                                  <m:r>
-                                    <a:rPr lang="en-US" altLang="zh-TW" sz="2000" i="1">
-                                      <a:latin typeface="Cambria Math" panose="02040503050406030204" pitchFamily="18" charset="0"/>
-                                    </a:rPr>
-                                    <m:t>𝑆</m:t>
-                                  </m:r>
-                                  <m:r>
-                                    <a:rPr lang="en-US" altLang="zh-TW" sz="2000" i="1">
-                                      <a:latin typeface="Cambria Math" panose="02040503050406030204" pitchFamily="18" charset="0"/>
-                                    </a:rPr>
-                                    <m:t>,</m:t>
-                                  </m:r>
-                                  <m:r>
-                                    <a:rPr lang="en-US" altLang="zh-TW" sz="2000" b="1" i="1">
-                                      <a:latin typeface="Cambria Math" panose="02040503050406030204" pitchFamily="18" charset="0"/>
-                                    </a:rPr>
-                                    <m:t>𝑸</m:t>
-                                  </m:r>
-                                </m:sub>
-                                <m:sup>
                                   <m:acc>
                                     <m:accPr>
                                       <m:chr m:val="̂"/>
@@ -10610,7 +10581,27 @@
                                     <a:rPr lang="en-US" altLang="zh-TW" sz="2000" b="0" i="1" smtClean="0">
                                       <a:latin typeface="Cambria Math" panose="02040503050406030204" pitchFamily="18" charset="0"/>
                                     </a:rPr>
-                                    <m:t>±1</m:t>
+                                    <m:t>0</m:t>
+                                  </m:r>
+                                </m:sub>
+                                <m:sup>
+                                  <m:r>
+                                    <a:rPr lang="en-US" altLang="zh-TW" sz="2000" i="1">
+                                      <a:latin typeface="Cambria Math" panose="02040503050406030204" pitchFamily="18" charset="0"/>
+                                    </a:rPr>
+                                    <m:t>𝑆</m:t>
+                                  </m:r>
+                                  <m:r>
+                                    <a:rPr lang="en-US" altLang="zh-TW" sz="2000" i="1">
+                                      <a:latin typeface="Cambria Math" panose="02040503050406030204" pitchFamily="18" charset="0"/>
+                                    </a:rPr>
+                                    <m:t>,</m:t>
+                                  </m:r>
+                                  <m:r>
+                                    <a:rPr lang="en-US" altLang="zh-TW" sz="2000" b="1" i="1">
+                                      <a:latin typeface="Cambria Math" panose="02040503050406030204" pitchFamily="18" charset="0"/>
+                                    </a:rPr>
+                                    <m:t>𝑸</m:t>
                                   </m:r>
                                 </m:sup>
                               </m:sSubSup>
@@ -10643,10 +10634,10 @@
         <mc:Fallback>
           <p:sp>
             <p:nvSpPr>
-              <p:cNvPr id="58" name="矩形 57">
+              <p:cNvPr id="60" name="矩形 59">
                 <a:extLst>
                   <a:ext uri="{FF2B5EF4-FFF2-40B4-BE49-F238E27FC236}">
-                    <a16:creationId xmlns:a16="http://schemas.microsoft.com/office/drawing/2014/main" id="{9DF4A951-F53E-4E34-84BC-C798BE6D74C9}"/>
+                    <a16:creationId xmlns:a16="http://schemas.microsoft.com/office/drawing/2014/main" id="{0B9805BE-3584-40D3-A141-CCBCDA03B226}"/>
                   </a:ext>
                 </a:extLst>
               </p:cNvPr>
@@ -10657,8 +10648,8 @@
             </p:nvSpPr>
             <p:spPr>
               <a:xfrm>
-                <a:off x="1230464" y="5965307"/>
-                <a:ext cx="1198533" cy="555152"/>
+                <a:off x="6282612" y="1315026"/>
+                <a:ext cx="1105559" cy="555793"/>
               </a:xfrm>
               <a:prstGeom prst="rect">
                 <a:avLst/>
@@ -10689,10 +10680,10 @@
         <mc:Choice xmlns:a14="http://schemas.microsoft.com/office/drawing/2010/main" Requires="a14">
           <p:sp>
             <p:nvSpPr>
-              <p:cNvPr id="59" name="矩形 58">
+              <p:cNvPr id="61" name="矩形 60">
                 <a:extLst>
                   <a:ext uri="{FF2B5EF4-FFF2-40B4-BE49-F238E27FC236}">
-                    <a16:creationId xmlns:a16="http://schemas.microsoft.com/office/drawing/2014/main" id="{415D0778-1766-4C6A-B255-91539B9DC750}"/>
+                    <a16:creationId xmlns:a16="http://schemas.microsoft.com/office/drawing/2014/main" id="{791C1D51-2EC6-4D7F-9EAB-598D74C2309B}"/>
                   </a:ext>
                 </a:extLst>
               </p:cNvPr>
@@ -10701,15 +10692,15 @@
             </p:nvSpPr>
             <p:spPr>
               <a:xfrm>
-                <a:off x="3017747" y="5831681"/>
-                <a:ext cx="1906932" cy="688778"/>
+                <a:off x="7590514" y="1280786"/>
+                <a:ext cx="2482440" cy="624273"/>
               </a:xfrm>
               <a:prstGeom prst="rect">
                 <a:avLst/>
               </a:prstGeom>
             </p:spPr>
             <p:txBody>
-              <a:bodyPr wrap="none">
+              <a:bodyPr wrap="square">
                 <a:spAutoFit/>
               </a:bodyPr>
               <a:lstStyle/>
@@ -10724,7 +10715,7 @@
                       <m:sSup>
                         <m:sSupPr>
                           <m:ctrlPr>
-                            <a:rPr lang="en-US" altLang="zh-TW" sz="1600" i="1" dirty="0" smtClean="0">
+                            <a:rPr lang="en-US" altLang="zh-TW" sz="2000" i="1" dirty="0" smtClean="0">
                               <a:latin typeface="Cambria Math" panose="02040503050406030204" pitchFamily="18" charset="0"/>
                               <a:ea typeface="Cambria Math" panose="02040503050406030204" pitchFamily="18" charset="0"/>
                             </a:rPr>
@@ -10736,162 +10727,125 @@
                               <m:begChr m:val="|"/>
                               <m:endChr m:val="|"/>
                               <m:ctrlPr>
-                                <a:rPr lang="en-US" altLang="zh-TW" sz="1600" i="1" dirty="0">
+                                <a:rPr lang="en-US" altLang="zh-TW" sz="2000" i="1" dirty="0">
                                   <a:latin typeface="Cambria Math" panose="02040503050406030204" pitchFamily="18" charset="0"/>
                                   <a:ea typeface="Cambria Math" panose="02040503050406030204" pitchFamily="18" charset="0"/>
                                 </a:rPr>
                               </m:ctrlPr>
                             </m:dPr>
                             <m:e>
-                              <m:nary>
-                                <m:naryPr>
-                                  <m:chr m:val="∑"/>
-                                  <m:limLoc m:val="subSup"/>
-                                  <m:supHide m:val="on"/>
+                              <m:sSubSup>
+                                <m:sSubSupPr>
                                   <m:ctrlPr>
-                                    <a:rPr lang="en-US" altLang="zh-TW" sz="1600" i="1" dirty="0" smtClean="0">
+                                    <a:rPr lang="en-US" altLang="zh-TW" sz="2000" i="1" dirty="0">
                                       <a:latin typeface="Cambria Math" panose="02040503050406030204" pitchFamily="18" charset="0"/>
                                       <a:ea typeface="Cambria Math" panose="02040503050406030204" pitchFamily="18" charset="0"/>
                                     </a:rPr>
                                   </m:ctrlPr>
-                                </m:naryPr>
+                                </m:sSubSupPr>
+                                <m:e>
+                                  <m:r>
+                                    <m:rPr>
+                                      <m:sty m:val="p"/>
+                                    </m:rPr>
+                                    <a:rPr lang="en-US" altLang="zh-TW" sz="2000" dirty="0">
+                                      <a:latin typeface="Cambria Math" panose="02040503050406030204" pitchFamily="18" charset="0"/>
+                                      <a:ea typeface="Cambria Math" panose="02040503050406030204" pitchFamily="18" charset="0"/>
+                                    </a:rPr>
+                                    <m:t>Φ</m:t>
+                                  </m:r>
+                                </m:e>
                                 <m:sub>
-                                  <m:r>
-                                    <a:rPr lang="en-US" altLang="zh-TW" sz="1600" b="1" i="1">
-                                      <a:latin typeface="Cambria Math" panose="02040503050406030204" pitchFamily="18" charset="0"/>
-                                    </a:rPr>
-                                    <m:t>𝑸</m:t>
-                                  </m:r>
-                                </m:sub>
-                                <m:sup/>
-                                <m:e>
-                                  <m:sSubSup>
-                                    <m:sSubSupPr>
+                                  <m:acc>
+                                    <m:accPr>
+                                      <m:chr m:val="̂"/>
                                       <m:ctrlPr>
-                                        <a:rPr lang="en-US" altLang="zh-TW" sz="1600" i="1">
+                                        <a:rPr lang="en-US" altLang="zh-TW" sz="2000" b="1" i="1">
                                           <a:latin typeface="Cambria Math" panose="02040503050406030204" pitchFamily="18" charset="0"/>
                                         </a:rPr>
                                       </m:ctrlPr>
-                                    </m:sSubSupPr>
+                                    </m:accPr>
                                     <m:e>
-                                      <m:acc>
-                                        <m:accPr>
-                                          <m:chr m:val="̃"/>
-                                          <m:ctrlPr>
-                                            <a:rPr lang="en-US" altLang="zh-TW" sz="1600" i="1">
-                                              <a:latin typeface="Cambria Math" panose="02040503050406030204" pitchFamily="18" charset="0"/>
-                                            </a:rPr>
-                                          </m:ctrlPr>
-                                        </m:accPr>
-                                        <m:e>
-                                          <m:r>
-                                            <a:rPr lang="en-US" altLang="zh-TW" sz="1600" i="1">
-                                              <a:latin typeface="Cambria Math" panose="02040503050406030204" pitchFamily="18" charset="0"/>
-                                            </a:rPr>
-                                            <m:t>𝑀</m:t>
-                                          </m:r>
-                                        </m:e>
-                                      </m:acc>
-                                    </m:e>
-                                    <m:sub>
                                       <m:r>
-                                        <a:rPr lang="en-US" altLang="zh-TW" sz="1600" i="1">
+                                        <a:rPr lang="zh-TW" altLang="en-US" sz="2000" b="1" i="1">
                                           <a:latin typeface="Cambria Math" panose="02040503050406030204" pitchFamily="18" charset="0"/>
                                         </a:rPr>
-                                        <m:t>𝑆</m:t>
+                                        <m:t>𝜺</m:t>
                                       </m:r>
+                                    </m:e>
+                                  </m:acc>
+                                  <m:r>
+                                    <a:rPr lang="en-US" altLang="zh-TW" sz="2000" i="1">
+                                      <a:latin typeface="Cambria Math" panose="02040503050406030204" pitchFamily="18" charset="0"/>
+                                    </a:rPr>
+                                    <m:t>,</m:t>
+                                  </m:r>
+                                  <m:r>
+                                    <a:rPr lang="en-US" altLang="zh-TW" sz="2000" b="0" i="1" smtClean="0">
+                                      <a:latin typeface="Cambria Math" panose="02040503050406030204" pitchFamily="18" charset="0"/>
+                                    </a:rPr>
+                                    <m:t>0</m:t>
+                                  </m:r>
+                                </m:sub>
+                                <m:sup>
+                                  <m:r>
+                                    <a:rPr lang="en-US" altLang="zh-TW" sz="2000" i="1" dirty="0">
+                                      <a:latin typeface="Cambria Math" panose="02040503050406030204" pitchFamily="18" charset="0"/>
+                                      <a:ea typeface="Cambria Math" panose="02040503050406030204" pitchFamily="18" charset="0"/>
+                                    </a:rPr>
+                                    <m:t>𝐾</m:t>
+                                  </m:r>
+                                  <m:r>
+                                    <a:rPr lang="en-US" altLang="zh-TW" sz="2000" i="1" dirty="0">
+                                      <a:latin typeface="Cambria Math" panose="02040503050406030204" pitchFamily="18" charset="0"/>
+                                      <a:ea typeface="Cambria Math" panose="02040503050406030204" pitchFamily="18" charset="0"/>
+                                    </a:rPr>
+                                    <m:t>/</m:t>
+                                  </m:r>
+                                  <m:sSup>
+                                    <m:sSupPr>
+                                      <m:ctrlPr>
+                                        <a:rPr lang="en-US" altLang="zh-TW" sz="2000" i="1" dirty="0">
+                                          <a:latin typeface="Cambria Math" panose="02040503050406030204" pitchFamily="18" charset="0"/>
+                                          <a:ea typeface="Cambria Math" panose="02040503050406030204" pitchFamily="18" charset="0"/>
+                                        </a:rPr>
+                                      </m:ctrlPr>
+                                    </m:sSupPr>
+                                    <m:e>
                                       <m:r>
-                                        <a:rPr lang="en-US" altLang="zh-TW" sz="1600" i="1">
+                                        <a:rPr lang="en-US" altLang="zh-TW" sz="2000" i="1" dirty="0">
                                           <a:latin typeface="Cambria Math" panose="02040503050406030204" pitchFamily="18" charset="0"/>
+                                          <a:ea typeface="Cambria Math" panose="02040503050406030204" pitchFamily="18" charset="0"/>
                                         </a:rPr>
-                                        <m:t>,</m:t>
+                                        <m:t>𝐾</m:t>
                                       </m:r>
+                                    </m:e>
+                                    <m:sup>
                                       <m:r>
-                                        <a:rPr lang="en-US" altLang="zh-TW" sz="1600" b="1" i="1">
+                                        <a:rPr lang="en-US" altLang="zh-TW" sz="2000" i="1" dirty="0">
                                           <a:latin typeface="Cambria Math" panose="02040503050406030204" pitchFamily="18" charset="0"/>
+                                          <a:ea typeface="Cambria Math" panose="02040503050406030204" pitchFamily="18" charset="0"/>
                                         </a:rPr>
-                                        <m:t>𝑸</m:t>
-                                      </m:r>
-                                    </m:sub>
-                                    <m:sup>
-                                      <m:acc>
-                                        <m:accPr>
-                                          <m:chr m:val="̂"/>
-                                          <m:ctrlPr>
-                                            <a:rPr lang="en-US" altLang="zh-TW" sz="1600" b="1" i="1">
-                                              <a:latin typeface="Cambria Math" panose="02040503050406030204" pitchFamily="18" charset="0"/>
-                                            </a:rPr>
-                                          </m:ctrlPr>
-                                        </m:accPr>
-                                        <m:e>
-                                          <m:r>
-                                            <a:rPr lang="zh-TW" altLang="en-US" sz="1600" b="1" i="1">
-                                              <a:latin typeface="Cambria Math" panose="02040503050406030204" pitchFamily="18" charset="0"/>
-                                            </a:rPr>
-                                            <m:t>𝜺</m:t>
-                                          </m:r>
-                                        </m:e>
-                                      </m:acc>
-                                      <m:r>
-                                        <a:rPr lang="en-US" altLang="zh-TW" sz="1600" i="1">
-                                          <a:latin typeface="Cambria Math" panose="02040503050406030204" pitchFamily="18" charset="0"/>
-                                        </a:rPr>
-                                        <m:t>,</m:t>
-                                      </m:r>
-                                      <m:r>
-                                        <a:rPr lang="en-US" altLang="zh-TW" sz="1600" b="0" i="1" smtClean="0">
-                                          <a:latin typeface="Cambria Math" panose="02040503050406030204" pitchFamily="18" charset="0"/>
-                                        </a:rPr>
-                                        <m:t>±1</m:t>
+                                        <m:t>′</m:t>
                                       </m:r>
                                     </m:sup>
-                                  </m:sSubSup>
-                                </m:e>
-                              </m:nary>
-                              <m:sSup>
-                                <m:sSupPr>
+                                  </m:sSup>
+                                </m:sup>
+                              </m:sSubSup>
+                              <m:d>
+                                <m:dPr>
                                   <m:ctrlPr>
-                                    <a:rPr lang="en-US" altLang="zh-TW" sz="1600" b="0" i="1" dirty="0" smtClean="0">
+                                    <a:rPr lang="en-US" altLang="zh-TW" sz="2000" i="1" dirty="0">
                                       <a:latin typeface="Cambria Math" panose="02040503050406030204" pitchFamily="18" charset="0"/>
                                       <a:ea typeface="Cambria Math" panose="02040503050406030204" pitchFamily="18" charset="0"/>
                                     </a:rPr>
                                   </m:ctrlPr>
-                                </m:sSupPr>
+                                </m:dPr>
                                 <m:e>
-                                  <m:r>
-                                    <a:rPr lang="en-US" altLang="zh-TW" sz="1600" b="0" i="1" dirty="0" smtClean="0">
-                                      <a:latin typeface="Cambria Math" panose="02040503050406030204" pitchFamily="18" charset="0"/>
-                                      <a:ea typeface="Cambria Math" panose="02040503050406030204" pitchFamily="18" charset="0"/>
-                                    </a:rPr>
-                                    <m:t>𝑒</m:t>
-                                  </m:r>
-                                </m:e>
-                                <m:sup>
-                                  <m:r>
-                                    <a:rPr lang="en-US" altLang="zh-TW" sz="1600" b="0" i="1" dirty="0" smtClean="0">
-                                      <a:latin typeface="Cambria Math" panose="02040503050406030204" pitchFamily="18" charset="0"/>
-                                      <a:ea typeface="Cambria Math" panose="02040503050406030204" pitchFamily="18" charset="0"/>
-                                    </a:rPr>
-                                    <m:t>𝑖</m:t>
-                                  </m:r>
-                                  <m:r>
-                                    <a:rPr lang="en-US" altLang="zh-TW" sz="1600" b="1" i="1" dirty="0" smtClean="0">
-                                      <a:latin typeface="Cambria Math" panose="02040503050406030204" pitchFamily="18" charset="0"/>
-                                      <a:ea typeface="Cambria Math" panose="02040503050406030204" pitchFamily="18" charset="0"/>
-                                    </a:rPr>
-                                    <m:t>𝑸</m:t>
-                                  </m:r>
-                                  <m:r>
-                                    <a:rPr lang="en-US" altLang="zh-TW" sz="1600" b="0" i="1" dirty="0" smtClean="0">
-                                      <a:latin typeface="Cambria Math" panose="02040503050406030204" pitchFamily="18" charset="0"/>
-                                      <a:ea typeface="Cambria Math" panose="02040503050406030204" pitchFamily="18" charset="0"/>
-                                    </a:rPr>
-                                    <m:t>⋅</m:t>
-                                  </m:r>
                                   <m:sSub>
                                     <m:sSubPr>
                                       <m:ctrlPr>
-                                        <a:rPr lang="en-US" altLang="zh-TW" sz="1600" b="0" i="1" dirty="0" smtClean="0">
+                                        <a:rPr lang="en-US" altLang="zh-TW" sz="2000" i="1" dirty="0">
                                           <a:latin typeface="Cambria Math" panose="02040503050406030204" pitchFamily="18" charset="0"/>
                                           <a:ea typeface="Cambria Math" panose="02040503050406030204" pitchFamily="18" charset="0"/>
                                         </a:rPr>
@@ -10899,7 +10853,7 @@
                                     </m:sSubPr>
                                     <m:e>
                                       <m:r>
-                                        <a:rPr lang="en-US" altLang="zh-TW" sz="1600" b="1" i="1" dirty="0" smtClean="0">
+                                        <a:rPr lang="en-US" altLang="zh-TW" sz="2000" b="1" i="1" dirty="0">
                                           <a:latin typeface="Cambria Math" panose="02040503050406030204" pitchFamily="18" charset="0"/>
                                           <a:ea typeface="Cambria Math" panose="02040503050406030204" pitchFamily="18" charset="0"/>
                                         </a:rPr>
@@ -10908,7 +10862,7 @@
                                     </m:e>
                                     <m:sub>
                                       <m:r>
-                                        <a:rPr lang="en-US" altLang="zh-TW" sz="1600" b="0" i="1" dirty="0" smtClean="0">
+                                        <a:rPr lang="en-US" altLang="zh-TW" sz="2000" i="1" dirty="0">
                                           <a:latin typeface="Cambria Math" panose="02040503050406030204" pitchFamily="18" charset="0"/>
                                           <a:ea typeface="Cambria Math" panose="02040503050406030204" pitchFamily="18" charset="0"/>
                                         </a:rPr>
@@ -10916,14 +10870,42 @@
                                       </m:r>
                                     </m:sub>
                                   </m:sSub>
-                                </m:sup>
-                              </m:sSup>
+                                  <m:r>
+                                    <a:rPr lang="en-US" altLang="zh-TW" sz="2000" i="1" dirty="0">
+                                      <a:latin typeface="Cambria Math" panose="02040503050406030204" pitchFamily="18" charset="0"/>
+                                      <a:ea typeface="Cambria Math" panose="02040503050406030204" pitchFamily="18" charset="0"/>
+                                    </a:rPr>
+                                    <m:t>, </m:t>
+                                  </m:r>
+                                  <m:r>
+                                    <a:rPr lang="en-US" altLang="zh-TW" sz="2000" b="1" i="1" dirty="0">
+                                      <a:latin typeface="Cambria Math" panose="02040503050406030204" pitchFamily="18" charset="0"/>
+                                      <a:ea typeface="Cambria Math" panose="02040503050406030204" pitchFamily="18" charset="0"/>
+                                    </a:rPr>
+                                    <m:t>𝒓</m:t>
+                                  </m:r>
+                                  <m:r>
+                                    <a:rPr lang="en-US" altLang="zh-TW" sz="2000" i="1" dirty="0">
+                                      <a:latin typeface="Cambria Math" panose="02040503050406030204" pitchFamily="18" charset="0"/>
+                                      <a:ea typeface="Cambria Math" panose="02040503050406030204" pitchFamily="18" charset="0"/>
+                                    </a:rPr>
+                                    <m:t>=</m:t>
+                                  </m:r>
+                                  <m:r>
+                                    <a:rPr lang="en-US" altLang="zh-TW" sz="2000" b="1" i="1" dirty="0">
+                                      <a:latin typeface="Cambria Math" panose="02040503050406030204" pitchFamily="18" charset="0"/>
+                                      <a:ea typeface="Cambria Math" panose="02040503050406030204" pitchFamily="18" charset="0"/>
+                                    </a:rPr>
+                                    <m:t>𝟎</m:t>
+                                  </m:r>
+                                </m:e>
+                              </m:d>
                             </m:e>
                           </m:d>
                         </m:e>
                         <m:sup>
                           <m:r>
-                            <a:rPr lang="en-US" altLang="zh-TW" sz="1600" i="1" dirty="0">
+                            <a:rPr lang="en-US" altLang="zh-TW" sz="2000" i="1" dirty="0">
                               <a:latin typeface="Cambria Math" panose="02040503050406030204" pitchFamily="18" charset="0"/>
                               <a:ea typeface="Cambria Math" panose="02040503050406030204" pitchFamily="18" charset="0"/>
                             </a:rPr>
@@ -10942,10 +10924,10 @@
         <mc:Fallback>
           <p:sp>
             <p:nvSpPr>
-              <p:cNvPr id="59" name="矩形 58">
+              <p:cNvPr id="61" name="矩形 60">
                 <a:extLst>
                   <a:ext uri="{FF2B5EF4-FFF2-40B4-BE49-F238E27FC236}">
-                    <a16:creationId xmlns:a16="http://schemas.microsoft.com/office/drawing/2014/main" id="{415D0778-1766-4C6A-B255-91539B9DC750}"/>
+                    <a16:creationId xmlns:a16="http://schemas.microsoft.com/office/drawing/2014/main" id="{791C1D51-2EC6-4D7F-9EAB-598D74C2309B}"/>
                   </a:ext>
                 </a:extLst>
               </p:cNvPr>
@@ -10956,8 +10938,8 @@
             </p:nvSpPr>
             <p:spPr>
               <a:xfrm>
-                <a:off x="3017747" y="5831681"/>
-                <a:ext cx="1906932" cy="688778"/>
+                <a:off x="7590514" y="1280786"/>
+                <a:ext cx="2482440" cy="624273"/>
               </a:xfrm>
               <a:prstGeom prst="rect">
                 <a:avLst/>
@@ -10988,10 +10970,10 @@
         <mc:Choice xmlns:a14="http://schemas.microsoft.com/office/drawing/2010/main" Requires="a14">
           <p:sp>
             <p:nvSpPr>
-              <p:cNvPr id="60" name="矩形 59">
+              <p:cNvPr id="63" name="矩形 62">
                 <a:extLst>
                   <a:ext uri="{FF2B5EF4-FFF2-40B4-BE49-F238E27FC236}">
-                    <a16:creationId xmlns:a16="http://schemas.microsoft.com/office/drawing/2014/main" id="{0DC73882-D7C0-495A-8FBD-35C62FAFD30A}"/>
+                    <a16:creationId xmlns:a16="http://schemas.microsoft.com/office/drawing/2014/main" id="{99D1CD60-D6EB-4D77-8506-80CD6C240F27}"/>
                   </a:ext>
                 </a:extLst>
               </p:cNvPr>
@@ -11000,8 +10982,8 @@
             </p:nvSpPr>
             <p:spPr>
               <a:xfrm>
-                <a:off x="6112097" y="1352357"/>
-                <a:ext cx="1198533" cy="555152"/>
+                <a:off x="1335008" y="5954392"/>
+                <a:ext cx="1105559" cy="555793"/>
               </a:xfrm>
               <a:prstGeom prst="rect">
                 <a:avLst/>
@@ -11069,26 +11051,6 @@
                                   </m:acc>
                                 </m:e>
                                 <m:sub>
-                                  <m:r>
-                                    <a:rPr lang="en-US" altLang="zh-TW" sz="2000" i="1">
-                                      <a:latin typeface="Cambria Math" panose="02040503050406030204" pitchFamily="18" charset="0"/>
-                                    </a:rPr>
-                                    <m:t>𝑆</m:t>
-                                  </m:r>
-                                  <m:r>
-                                    <a:rPr lang="en-US" altLang="zh-TW" sz="2000" i="1">
-                                      <a:latin typeface="Cambria Math" panose="02040503050406030204" pitchFamily="18" charset="0"/>
-                                    </a:rPr>
-                                    <m:t>,</m:t>
-                                  </m:r>
-                                  <m:r>
-                                    <a:rPr lang="en-US" altLang="zh-TW" sz="2000" b="1" i="1">
-                                      <a:latin typeface="Cambria Math" panose="02040503050406030204" pitchFamily="18" charset="0"/>
-                                    </a:rPr>
-                                    <m:t>𝑸</m:t>
-                                  </m:r>
-                                </m:sub>
-                                <m:sup>
                                   <m:acc>
                                     <m:accPr>
                                       <m:chr m:val="̂"/>
@@ -11117,7 +11079,27 @@
                                     <a:rPr lang="en-US" altLang="zh-TW" sz="2000" b="0" i="1" smtClean="0">
                                       <a:latin typeface="Cambria Math" panose="02040503050406030204" pitchFamily="18" charset="0"/>
                                     </a:rPr>
-                                    <m:t>±1</m:t>
+                                    <m:t>0</m:t>
+                                  </m:r>
+                                </m:sub>
+                                <m:sup>
+                                  <m:r>
+                                    <a:rPr lang="en-US" altLang="zh-TW" sz="2000" i="1">
+                                      <a:latin typeface="Cambria Math" panose="02040503050406030204" pitchFamily="18" charset="0"/>
+                                    </a:rPr>
+                                    <m:t>𝑆</m:t>
+                                  </m:r>
+                                  <m:r>
+                                    <a:rPr lang="en-US" altLang="zh-TW" sz="2000" i="1">
+                                      <a:latin typeface="Cambria Math" panose="02040503050406030204" pitchFamily="18" charset="0"/>
+                                    </a:rPr>
+                                    <m:t>,</m:t>
+                                  </m:r>
+                                  <m:r>
+                                    <a:rPr lang="en-US" altLang="zh-TW" sz="2000" b="1" i="1">
+                                      <a:latin typeface="Cambria Math" panose="02040503050406030204" pitchFamily="18" charset="0"/>
+                                    </a:rPr>
+                                    <m:t>𝑸</m:t>
                                   </m:r>
                                 </m:sup>
                               </m:sSubSup>
@@ -11150,10 +11132,10 @@
         <mc:Fallback>
           <p:sp>
             <p:nvSpPr>
-              <p:cNvPr id="60" name="矩形 59">
+              <p:cNvPr id="63" name="矩形 62">
                 <a:extLst>
                   <a:ext uri="{FF2B5EF4-FFF2-40B4-BE49-F238E27FC236}">
-                    <a16:creationId xmlns:a16="http://schemas.microsoft.com/office/drawing/2014/main" id="{0DC73882-D7C0-495A-8FBD-35C62FAFD30A}"/>
+                    <a16:creationId xmlns:a16="http://schemas.microsoft.com/office/drawing/2014/main" id="{99D1CD60-D6EB-4D77-8506-80CD6C240F27}"/>
                   </a:ext>
                 </a:extLst>
               </p:cNvPr>
@@ -11164,8 +11146,8 @@
             </p:nvSpPr>
             <p:spPr>
               <a:xfrm>
-                <a:off x="6112097" y="1352357"/>
-                <a:ext cx="1198533" cy="555152"/>
+                <a:off x="1335008" y="5954392"/>
+                <a:ext cx="1105559" cy="555793"/>
               </a:xfrm>
               <a:prstGeom prst="rect">
                 <a:avLst/>
@@ -11196,10 +11178,10 @@
         <mc:Choice xmlns:a14="http://schemas.microsoft.com/office/drawing/2010/main" Requires="a14">
           <p:sp>
             <p:nvSpPr>
-              <p:cNvPr id="61" name="矩形 60">
+              <p:cNvPr id="64" name="矩形 63">
                 <a:extLst>
                   <a:ext uri="{FF2B5EF4-FFF2-40B4-BE49-F238E27FC236}">
-                    <a16:creationId xmlns:a16="http://schemas.microsoft.com/office/drawing/2014/main" id="{296049B3-A4D4-40D0-9353-CD7B3CEFE673}"/>
+                    <a16:creationId xmlns:a16="http://schemas.microsoft.com/office/drawing/2014/main" id="{2CDDB2ED-224B-4425-B4E1-D2E0F7556789}"/>
                   </a:ext>
                 </a:extLst>
               </p:cNvPr>
@@ -11208,307 +11190,8 @@
             </p:nvSpPr>
             <p:spPr>
               <a:xfrm>
-                <a:off x="7899380" y="1218731"/>
-                <a:ext cx="1906932" cy="688778"/>
-              </a:xfrm>
-              <a:prstGeom prst="rect">
-                <a:avLst/>
-              </a:prstGeom>
-            </p:spPr>
-            <p:txBody>
-              <a:bodyPr wrap="none">
-                <a:spAutoFit/>
-              </a:bodyPr>
-              <a:lstStyle/>
-              <a:p>
-                <a:pPr algn="ctr"/>
-                <a14:m>
-                  <m:oMathPara xmlns:m="http://schemas.openxmlformats.org/officeDocument/2006/math">
-                    <m:oMathParaPr>
-                      <m:jc m:val="centerGroup"/>
-                    </m:oMathParaPr>
-                    <m:oMath xmlns:m="http://schemas.openxmlformats.org/officeDocument/2006/math">
-                      <m:sSup>
-                        <m:sSupPr>
-                          <m:ctrlPr>
-                            <a:rPr lang="en-US" altLang="zh-TW" sz="1600" i="1" dirty="0" smtClean="0">
-                              <a:latin typeface="Cambria Math" panose="02040503050406030204" pitchFamily="18" charset="0"/>
-                              <a:ea typeface="Cambria Math" panose="02040503050406030204" pitchFamily="18" charset="0"/>
-                            </a:rPr>
-                          </m:ctrlPr>
-                        </m:sSupPr>
-                        <m:e>
-                          <m:d>
-                            <m:dPr>
-                              <m:begChr m:val="|"/>
-                              <m:endChr m:val="|"/>
-                              <m:ctrlPr>
-                                <a:rPr lang="en-US" altLang="zh-TW" sz="1600" i="1" dirty="0">
-                                  <a:latin typeface="Cambria Math" panose="02040503050406030204" pitchFamily="18" charset="0"/>
-                                  <a:ea typeface="Cambria Math" panose="02040503050406030204" pitchFamily="18" charset="0"/>
-                                </a:rPr>
-                              </m:ctrlPr>
-                            </m:dPr>
-                            <m:e>
-                              <m:nary>
-                                <m:naryPr>
-                                  <m:chr m:val="∑"/>
-                                  <m:limLoc m:val="subSup"/>
-                                  <m:supHide m:val="on"/>
-                                  <m:ctrlPr>
-                                    <a:rPr lang="en-US" altLang="zh-TW" sz="1600" i="1" dirty="0" smtClean="0">
-                                      <a:latin typeface="Cambria Math" panose="02040503050406030204" pitchFamily="18" charset="0"/>
-                                      <a:ea typeface="Cambria Math" panose="02040503050406030204" pitchFamily="18" charset="0"/>
-                                    </a:rPr>
-                                  </m:ctrlPr>
-                                </m:naryPr>
-                                <m:sub>
-                                  <m:r>
-                                    <a:rPr lang="en-US" altLang="zh-TW" sz="1600" b="1" i="1">
-                                      <a:latin typeface="Cambria Math" panose="02040503050406030204" pitchFamily="18" charset="0"/>
-                                    </a:rPr>
-                                    <m:t>𝑸</m:t>
-                                  </m:r>
-                                </m:sub>
-                                <m:sup/>
-                                <m:e>
-                                  <m:sSubSup>
-                                    <m:sSubSupPr>
-                                      <m:ctrlPr>
-                                        <a:rPr lang="en-US" altLang="zh-TW" sz="1600" i="1">
-                                          <a:latin typeface="Cambria Math" panose="02040503050406030204" pitchFamily="18" charset="0"/>
-                                        </a:rPr>
-                                      </m:ctrlPr>
-                                    </m:sSubSupPr>
-                                    <m:e>
-                                      <m:acc>
-                                        <m:accPr>
-                                          <m:chr m:val="̃"/>
-                                          <m:ctrlPr>
-                                            <a:rPr lang="en-US" altLang="zh-TW" sz="1600" i="1">
-                                              <a:latin typeface="Cambria Math" panose="02040503050406030204" pitchFamily="18" charset="0"/>
-                                            </a:rPr>
-                                          </m:ctrlPr>
-                                        </m:accPr>
-                                        <m:e>
-                                          <m:r>
-                                            <a:rPr lang="en-US" altLang="zh-TW" sz="1600" i="1">
-                                              <a:latin typeface="Cambria Math" panose="02040503050406030204" pitchFamily="18" charset="0"/>
-                                            </a:rPr>
-                                            <m:t>𝑀</m:t>
-                                          </m:r>
-                                        </m:e>
-                                      </m:acc>
-                                    </m:e>
-                                    <m:sub>
-                                      <m:r>
-                                        <a:rPr lang="en-US" altLang="zh-TW" sz="1600" i="1">
-                                          <a:latin typeface="Cambria Math" panose="02040503050406030204" pitchFamily="18" charset="0"/>
-                                        </a:rPr>
-                                        <m:t>𝑆</m:t>
-                                      </m:r>
-                                      <m:r>
-                                        <a:rPr lang="en-US" altLang="zh-TW" sz="1600" i="1">
-                                          <a:latin typeface="Cambria Math" panose="02040503050406030204" pitchFamily="18" charset="0"/>
-                                        </a:rPr>
-                                        <m:t>,</m:t>
-                                      </m:r>
-                                      <m:r>
-                                        <a:rPr lang="en-US" altLang="zh-TW" sz="1600" b="1" i="1">
-                                          <a:latin typeface="Cambria Math" panose="02040503050406030204" pitchFamily="18" charset="0"/>
-                                        </a:rPr>
-                                        <m:t>𝑸</m:t>
-                                      </m:r>
-                                    </m:sub>
-                                    <m:sup>
-                                      <m:acc>
-                                        <m:accPr>
-                                          <m:chr m:val="̂"/>
-                                          <m:ctrlPr>
-                                            <a:rPr lang="en-US" altLang="zh-TW" sz="1600" b="1" i="1">
-                                              <a:latin typeface="Cambria Math" panose="02040503050406030204" pitchFamily="18" charset="0"/>
-                                            </a:rPr>
-                                          </m:ctrlPr>
-                                        </m:accPr>
-                                        <m:e>
-                                          <m:r>
-                                            <a:rPr lang="zh-TW" altLang="en-US" sz="1600" b="1" i="1">
-                                              <a:latin typeface="Cambria Math" panose="02040503050406030204" pitchFamily="18" charset="0"/>
-                                            </a:rPr>
-                                            <m:t>𝜺</m:t>
-                                          </m:r>
-                                        </m:e>
-                                      </m:acc>
-                                      <m:r>
-                                        <a:rPr lang="en-US" altLang="zh-TW" sz="1600" i="1">
-                                          <a:latin typeface="Cambria Math" panose="02040503050406030204" pitchFamily="18" charset="0"/>
-                                        </a:rPr>
-                                        <m:t>,</m:t>
-                                      </m:r>
-                                      <m:r>
-                                        <a:rPr lang="en-US" altLang="zh-TW" sz="1600" b="0" i="1" smtClean="0">
-                                          <a:latin typeface="Cambria Math" panose="02040503050406030204" pitchFamily="18" charset="0"/>
-                                        </a:rPr>
-                                        <m:t>±1</m:t>
-                                      </m:r>
-                                    </m:sup>
-                                  </m:sSubSup>
-                                </m:e>
-                              </m:nary>
-                              <m:sSup>
-                                <m:sSupPr>
-                                  <m:ctrlPr>
-                                    <a:rPr lang="en-US" altLang="zh-TW" sz="1600" b="0" i="1" dirty="0" smtClean="0">
-                                      <a:latin typeface="Cambria Math" panose="02040503050406030204" pitchFamily="18" charset="0"/>
-                                      <a:ea typeface="Cambria Math" panose="02040503050406030204" pitchFamily="18" charset="0"/>
-                                    </a:rPr>
-                                  </m:ctrlPr>
-                                </m:sSupPr>
-                                <m:e>
-                                  <m:r>
-                                    <a:rPr lang="en-US" altLang="zh-TW" sz="1600" b="0" i="1" dirty="0" smtClean="0">
-                                      <a:latin typeface="Cambria Math" panose="02040503050406030204" pitchFamily="18" charset="0"/>
-                                      <a:ea typeface="Cambria Math" panose="02040503050406030204" pitchFamily="18" charset="0"/>
-                                    </a:rPr>
-                                    <m:t>𝑒</m:t>
-                                  </m:r>
-                                </m:e>
-                                <m:sup>
-                                  <m:r>
-                                    <a:rPr lang="en-US" altLang="zh-TW" sz="1600" b="0" i="1" dirty="0" smtClean="0">
-                                      <a:latin typeface="Cambria Math" panose="02040503050406030204" pitchFamily="18" charset="0"/>
-                                      <a:ea typeface="Cambria Math" panose="02040503050406030204" pitchFamily="18" charset="0"/>
-                                    </a:rPr>
-                                    <m:t>𝑖</m:t>
-                                  </m:r>
-                                  <m:r>
-                                    <a:rPr lang="en-US" altLang="zh-TW" sz="1600" b="1" i="1" dirty="0" smtClean="0">
-                                      <a:latin typeface="Cambria Math" panose="02040503050406030204" pitchFamily="18" charset="0"/>
-                                      <a:ea typeface="Cambria Math" panose="02040503050406030204" pitchFamily="18" charset="0"/>
-                                    </a:rPr>
-                                    <m:t>𝑸</m:t>
-                                  </m:r>
-                                  <m:r>
-                                    <a:rPr lang="en-US" altLang="zh-TW" sz="1600" b="0" i="1" dirty="0" smtClean="0">
-                                      <a:latin typeface="Cambria Math" panose="02040503050406030204" pitchFamily="18" charset="0"/>
-                                      <a:ea typeface="Cambria Math" panose="02040503050406030204" pitchFamily="18" charset="0"/>
-                                    </a:rPr>
-                                    <m:t>⋅</m:t>
-                                  </m:r>
-                                  <m:sSub>
-                                    <m:sSubPr>
-                                      <m:ctrlPr>
-                                        <a:rPr lang="en-US" altLang="zh-TW" sz="1600" b="0" i="1" dirty="0" smtClean="0">
-                                          <a:latin typeface="Cambria Math" panose="02040503050406030204" pitchFamily="18" charset="0"/>
-                                          <a:ea typeface="Cambria Math" panose="02040503050406030204" pitchFamily="18" charset="0"/>
-                                        </a:rPr>
-                                      </m:ctrlPr>
-                                    </m:sSubPr>
-                                    <m:e>
-                                      <m:r>
-                                        <a:rPr lang="en-US" altLang="zh-TW" sz="1600" b="1" i="1" dirty="0" smtClean="0">
-                                          <a:latin typeface="Cambria Math" panose="02040503050406030204" pitchFamily="18" charset="0"/>
-                                          <a:ea typeface="Cambria Math" panose="02040503050406030204" pitchFamily="18" charset="0"/>
-                                        </a:rPr>
-                                        <m:t>𝑹</m:t>
-                                      </m:r>
-                                    </m:e>
-                                    <m:sub>
-                                      <m:r>
-                                        <a:rPr lang="en-US" altLang="zh-TW" sz="1600" b="0" i="1" dirty="0" smtClean="0">
-                                          <a:latin typeface="Cambria Math" panose="02040503050406030204" pitchFamily="18" charset="0"/>
-                                          <a:ea typeface="Cambria Math" panose="02040503050406030204" pitchFamily="18" charset="0"/>
-                                        </a:rPr>
-                                        <m:t>𝑐</m:t>
-                                      </m:r>
-                                    </m:sub>
-                                  </m:sSub>
-                                </m:sup>
-                              </m:sSup>
-                            </m:e>
-                          </m:d>
-                        </m:e>
-                        <m:sup>
-                          <m:r>
-                            <a:rPr lang="en-US" altLang="zh-TW" sz="1600" i="1" dirty="0">
-                              <a:latin typeface="Cambria Math" panose="02040503050406030204" pitchFamily="18" charset="0"/>
-                              <a:ea typeface="Cambria Math" panose="02040503050406030204" pitchFamily="18" charset="0"/>
-                            </a:rPr>
-                            <m:t>2</m:t>
-                          </m:r>
-                        </m:sup>
-                      </m:sSup>
-                    </m:oMath>
-                  </m:oMathPara>
-                </a14:m>
-                <a:endParaRPr lang="zh-TW" altLang="en-US" sz="1600" dirty="0"/>
-              </a:p>
-            </p:txBody>
-          </p:sp>
-        </mc:Choice>
-        <mc:Fallback>
-          <p:sp>
-            <p:nvSpPr>
-              <p:cNvPr id="61" name="矩形 60">
-                <a:extLst>
-                  <a:ext uri="{FF2B5EF4-FFF2-40B4-BE49-F238E27FC236}">
-                    <a16:creationId xmlns:a16="http://schemas.microsoft.com/office/drawing/2014/main" id="{296049B3-A4D4-40D0-9353-CD7B3CEFE673}"/>
-                  </a:ext>
-                </a:extLst>
-              </p:cNvPr>
-              <p:cNvSpPr>
-                <a:spLocks noRot="1" noChangeAspect="1" noMove="1" noResize="1" noEditPoints="1" noAdjustHandles="1" noChangeArrowheads="1" noChangeShapeType="1" noTextEdit="1"/>
-              </p:cNvSpPr>
-              <p:nvPr/>
-            </p:nvSpPr>
-            <p:spPr>
-              <a:xfrm>
-                <a:off x="7899380" y="1218731"/>
-                <a:ext cx="1906932" cy="688778"/>
-              </a:xfrm>
-              <a:prstGeom prst="rect">
-                <a:avLst/>
-              </a:prstGeom>
-              <a:blipFill>
-                <a:blip r:embed="rId41"/>
-                <a:stretch>
-                  <a:fillRect/>
-                </a:stretch>
-              </a:blipFill>
-            </p:spPr>
-            <p:txBody>
-              <a:bodyPr/>
-              <a:lstStyle/>
-              <a:p>
-                <a:r>
-                  <a:rPr lang="zh-TW" altLang="en-US">
-                    <a:noFill/>
-                  </a:rPr>
-                  <a:t> </a:t>
-                </a:r>
-              </a:p>
-            </p:txBody>
-          </p:sp>
-        </mc:Fallback>
-      </mc:AlternateContent>
-      <mc:AlternateContent xmlns:mc="http://schemas.openxmlformats.org/markup-compatibility/2006">
-        <mc:Choice xmlns:a14="http://schemas.microsoft.com/office/drawing/2010/main" Requires="a14">
-          <p:sp>
-            <p:nvSpPr>
-              <p:cNvPr id="63" name="矩形 62">
-                <a:extLst>
-                  <a:ext uri="{FF2B5EF4-FFF2-40B4-BE49-F238E27FC236}">
-                    <a16:creationId xmlns:a16="http://schemas.microsoft.com/office/drawing/2014/main" id="{94DBB4D2-B0DA-40D5-8EBF-987CE5F3C1B9}"/>
-                  </a:ext>
-                </a:extLst>
-              </p:cNvPr>
-              <p:cNvSpPr/>
-              <p:nvPr/>
-            </p:nvSpPr>
-            <p:spPr>
-              <a:xfrm>
-                <a:off x="6112097" y="5965307"/>
-                <a:ext cx="1198533" cy="555152"/>
+                <a:off x="6282612" y="5954392"/>
+                <a:ext cx="1105559" cy="555793"/>
               </a:xfrm>
               <a:prstGeom prst="rect">
                 <a:avLst/>
@@ -11576,26 +11259,6 @@
                                   </m:acc>
                                 </m:e>
                                 <m:sub>
-                                  <m:r>
-                                    <a:rPr lang="en-US" altLang="zh-TW" sz="2000" i="1">
-                                      <a:latin typeface="Cambria Math" panose="02040503050406030204" pitchFamily="18" charset="0"/>
-                                    </a:rPr>
-                                    <m:t>𝑆</m:t>
-                                  </m:r>
-                                  <m:r>
-                                    <a:rPr lang="en-US" altLang="zh-TW" sz="2000" i="1">
-                                      <a:latin typeface="Cambria Math" panose="02040503050406030204" pitchFamily="18" charset="0"/>
-                                    </a:rPr>
-                                    <m:t>,</m:t>
-                                  </m:r>
-                                  <m:r>
-                                    <a:rPr lang="en-US" altLang="zh-TW" sz="2000" b="1" i="1">
-                                      <a:latin typeface="Cambria Math" panose="02040503050406030204" pitchFamily="18" charset="0"/>
-                                    </a:rPr>
-                                    <m:t>𝑸</m:t>
-                                  </m:r>
-                                </m:sub>
-                                <m:sup>
                                   <m:acc>
                                     <m:accPr>
                                       <m:chr m:val="̂"/>
@@ -11624,7 +11287,27 @@
                                     <a:rPr lang="en-US" altLang="zh-TW" sz="2000" b="0" i="1" smtClean="0">
                                       <a:latin typeface="Cambria Math" panose="02040503050406030204" pitchFamily="18" charset="0"/>
                                     </a:rPr>
-                                    <m:t>±1</m:t>
+                                    <m:t>0</m:t>
+                                  </m:r>
+                                </m:sub>
+                                <m:sup>
+                                  <m:r>
+                                    <a:rPr lang="en-US" altLang="zh-TW" sz="2000" i="1">
+                                      <a:latin typeface="Cambria Math" panose="02040503050406030204" pitchFamily="18" charset="0"/>
+                                    </a:rPr>
+                                    <m:t>𝑆</m:t>
+                                  </m:r>
+                                  <m:r>
+                                    <a:rPr lang="en-US" altLang="zh-TW" sz="2000" i="1">
+                                      <a:latin typeface="Cambria Math" panose="02040503050406030204" pitchFamily="18" charset="0"/>
+                                    </a:rPr>
+                                    <m:t>,</m:t>
+                                  </m:r>
+                                  <m:r>
+                                    <a:rPr lang="en-US" altLang="zh-TW" sz="2000" b="1" i="1">
+                                      <a:latin typeface="Cambria Math" panose="02040503050406030204" pitchFamily="18" charset="0"/>
+                                    </a:rPr>
+                                    <m:t>𝑸</m:t>
                                   </m:r>
                                 </m:sup>
                               </m:sSubSup>
@@ -11657,10 +11340,10 @@
         <mc:Fallback>
           <p:sp>
             <p:nvSpPr>
-              <p:cNvPr id="63" name="矩形 62">
+              <p:cNvPr id="64" name="矩形 63">
                 <a:extLst>
                   <a:ext uri="{FF2B5EF4-FFF2-40B4-BE49-F238E27FC236}">
-                    <a16:creationId xmlns:a16="http://schemas.microsoft.com/office/drawing/2014/main" id="{94DBB4D2-B0DA-40D5-8EBF-987CE5F3C1B9}"/>
+                    <a16:creationId xmlns:a16="http://schemas.microsoft.com/office/drawing/2014/main" id="{2CDDB2ED-224B-4425-B4E1-D2E0F7556789}"/>
                   </a:ext>
                 </a:extLst>
               </p:cNvPr>
@@ -11671,8 +11354,298 @@
             </p:nvSpPr>
             <p:spPr>
               <a:xfrm>
-                <a:off x="6112097" y="5965307"/>
-                <a:ext cx="1198533" cy="555152"/>
+                <a:off x="6282612" y="5954392"/>
+                <a:ext cx="1105559" cy="555793"/>
+              </a:xfrm>
+              <a:prstGeom prst="rect">
+                <a:avLst/>
+              </a:prstGeom>
+              <a:blipFill>
+                <a:blip r:embed="rId41"/>
+                <a:stretch>
+                  <a:fillRect/>
+                </a:stretch>
+              </a:blipFill>
+            </p:spPr>
+            <p:txBody>
+              <a:bodyPr/>
+              <a:lstStyle/>
+              <a:p>
+                <a:r>
+                  <a:rPr lang="zh-TW" altLang="en-US">
+                    <a:noFill/>
+                  </a:rPr>
+                  <a:t> </a:t>
+                </a:r>
+              </a:p>
+            </p:txBody>
+          </p:sp>
+        </mc:Fallback>
+      </mc:AlternateContent>
+      <mc:AlternateContent xmlns:mc="http://schemas.openxmlformats.org/markup-compatibility/2006">
+        <mc:Choice xmlns:a14="http://schemas.microsoft.com/office/drawing/2010/main" Requires="a14">
+          <p:sp>
+            <p:nvSpPr>
+              <p:cNvPr id="92" name="矩形 91">
+                <a:extLst>
+                  <a:ext uri="{FF2B5EF4-FFF2-40B4-BE49-F238E27FC236}">
+                    <a16:creationId xmlns:a16="http://schemas.microsoft.com/office/drawing/2014/main" id="{4B24170F-E452-469C-AC01-50B8FC43038F}"/>
+                  </a:ext>
+                </a:extLst>
+              </p:cNvPr>
+              <p:cNvSpPr/>
+              <p:nvPr/>
+            </p:nvSpPr>
+            <p:spPr>
+              <a:xfrm>
+                <a:off x="2611825" y="5920152"/>
+                <a:ext cx="2486552" cy="624273"/>
+              </a:xfrm>
+              <a:prstGeom prst="rect">
+                <a:avLst/>
+              </a:prstGeom>
+            </p:spPr>
+            <p:txBody>
+              <a:bodyPr wrap="square">
+                <a:spAutoFit/>
+              </a:bodyPr>
+              <a:lstStyle/>
+              <a:p>
+                <a:pPr algn="ctr"/>
+                <a14:m>
+                  <m:oMathPara xmlns:m="http://schemas.openxmlformats.org/officeDocument/2006/math">
+                    <m:oMathParaPr>
+                      <m:jc m:val="centerGroup"/>
+                    </m:oMathParaPr>
+                    <m:oMath xmlns:m="http://schemas.openxmlformats.org/officeDocument/2006/math">
+                      <m:sSup>
+                        <m:sSupPr>
+                          <m:ctrlPr>
+                            <a:rPr lang="en-US" altLang="zh-TW" sz="2000" i="1" dirty="0" smtClean="0">
+                              <a:latin typeface="Cambria Math" panose="02040503050406030204" pitchFamily="18" charset="0"/>
+                              <a:ea typeface="Cambria Math" panose="02040503050406030204" pitchFamily="18" charset="0"/>
+                            </a:rPr>
+                          </m:ctrlPr>
+                        </m:sSupPr>
+                        <m:e>
+                          <m:d>
+                            <m:dPr>
+                              <m:begChr m:val="|"/>
+                              <m:endChr m:val="|"/>
+                              <m:ctrlPr>
+                                <a:rPr lang="en-US" altLang="zh-TW" sz="2000" i="1" dirty="0">
+                                  <a:latin typeface="Cambria Math" panose="02040503050406030204" pitchFamily="18" charset="0"/>
+                                  <a:ea typeface="Cambria Math" panose="02040503050406030204" pitchFamily="18" charset="0"/>
+                                </a:rPr>
+                              </m:ctrlPr>
+                            </m:dPr>
+                            <m:e>
+                              <m:sSubSup>
+                                <m:sSubSupPr>
+                                  <m:ctrlPr>
+                                    <a:rPr lang="en-US" altLang="zh-TW" sz="2000" b="0" i="1" dirty="0" smtClean="0">
+                                      <a:latin typeface="Cambria Math" panose="02040503050406030204" pitchFamily="18" charset="0"/>
+                                      <a:ea typeface="Cambria Math" panose="02040503050406030204" pitchFamily="18" charset="0"/>
+                                    </a:rPr>
+                                  </m:ctrlPr>
+                                </m:sSubSupPr>
+                                <m:e>
+                                  <m:r>
+                                    <m:rPr>
+                                      <m:sty m:val="p"/>
+                                    </m:rPr>
+                                    <a:rPr lang="en-US" altLang="zh-TW" sz="2000" b="0" i="0" dirty="0" smtClean="0">
+                                      <a:latin typeface="Cambria Math" panose="02040503050406030204" pitchFamily="18" charset="0"/>
+                                      <a:ea typeface="Cambria Math" panose="02040503050406030204" pitchFamily="18" charset="0"/>
+                                    </a:rPr>
+                                    <m:t>Φ</m:t>
+                                  </m:r>
+                                </m:e>
+                                <m:sub>
+                                  <m:acc>
+                                    <m:accPr>
+                                      <m:chr m:val="̂"/>
+                                      <m:ctrlPr>
+                                        <a:rPr lang="en-US" altLang="zh-TW" sz="2000" b="1" i="1">
+                                          <a:latin typeface="Cambria Math" panose="02040503050406030204" pitchFamily="18" charset="0"/>
+                                        </a:rPr>
+                                      </m:ctrlPr>
+                                    </m:accPr>
+                                    <m:e>
+                                      <m:r>
+                                        <a:rPr lang="zh-TW" altLang="en-US" sz="2000" b="1" i="1">
+                                          <a:latin typeface="Cambria Math" panose="02040503050406030204" pitchFamily="18" charset="0"/>
+                                        </a:rPr>
+                                        <m:t>𝜺</m:t>
+                                      </m:r>
+                                    </m:e>
+                                  </m:acc>
+                                  <m:r>
+                                    <a:rPr lang="en-US" altLang="zh-TW" sz="2000" i="1">
+                                      <a:latin typeface="Cambria Math" panose="02040503050406030204" pitchFamily="18" charset="0"/>
+                                    </a:rPr>
+                                    <m:t>,</m:t>
+                                  </m:r>
+                                  <m:r>
+                                    <a:rPr lang="en-US" altLang="zh-TW" sz="2000" b="0" i="1" smtClean="0">
+                                      <a:latin typeface="Cambria Math" panose="02040503050406030204" pitchFamily="18" charset="0"/>
+                                    </a:rPr>
+                                    <m:t>0</m:t>
+                                  </m:r>
+                                </m:sub>
+                                <m:sup>
+                                  <m:r>
+                                    <a:rPr lang="en-US" altLang="zh-TW" sz="2000" i="1" dirty="0">
+                                      <a:latin typeface="Cambria Math" panose="02040503050406030204" pitchFamily="18" charset="0"/>
+                                      <a:ea typeface="Cambria Math" panose="02040503050406030204" pitchFamily="18" charset="0"/>
+                                    </a:rPr>
+                                    <m:t>𝐾</m:t>
+                                  </m:r>
+                                  <m:r>
+                                    <a:rPr lang="en-US" altLang="zh-TW" sz="2000" i="1" dirty="0">
+                                      <a:latin typeface="Cambria Math" panose="02040503050406030204" pitchFamily="18" charset="0"/>
+                                      <a:ea typeface="Cambria Math" panose="02040503050406030204" pitchFamily="18" charset="0"/>
+                                    </a:rPr>
+                                    <m:t>/</m:t>
+                                  </m:r>
+                                  <m:sSup>
+                                    <m:sSupPr>
+                                      <m:ctrlPr>
+                                        <a:rPr lang="en-US" altLang="zh-TW" sz="2000" i="1" dirty="0">
+                                          <a:latin typeface="Cambria Math" panose="02040503050406030204" pitchFamily="18" charset="0"/>
+                                          <a:ea typeface="Cambria Math" panose="02040503050406030204" pitchFamily="18" charset="0"/>
+                                        </a:rPr>
+                                      </m:ctrlPr>
+                                    </m:sSupPr>
+                                    <m:e>
+                                      <m:r>
+                                        <a:rPr lang="en-US" altLang="zh-TW" sz="2000" i="1" dirty="0">
+                                          <a:latin typeface="Cambria Math" panose="02040503050406030204" pitchFamily="18" charset="0"/>
+                                          <a:ea typeface="Cambria Math" panose="02040503050406030204" pitchFamily="18" charset="0"/>
+                                        </a:rPr>
+                                        <m:t>𝐾</m:t>
+                                      </m:r>
+                                    </m:e>
+                                    <m:sup>
+                                      <m:r>
+                                        <a:rPr lang="en-US" altLang="zh-TW" sz="2000" i="1" dirty="0">
+                                          <a:latin typeface="Cambria Math" panose="02040503050406030204" pitchFamily="18" charset="0"/>
+                                          <a:ea typeface="Cambria Math" panose="02040503050406030204" pitchFamily="18" charset="0"/>
+                                        </a:rPr>
+                                        <m:t>′</m:t>
+                                      </m:r>
+                                    </m:sup>
+                                  </m:sSup>
+                                </m:sup>
+                              </m:sSubSup>
+                              <m:d>
+                                <m:dPr>
+                                  <m:ctrlPr>
+                                    <a:rPr lang="en-US" altLang="zh-TW" sz="2000" i="1" dirty="0">
+                                      <a:latin typeface="Cambria Math" panose="02040503050406030204" pitchFamily="18" charset="0"/>
+                                      <a:ea typeface="Cambria Math" panose="02040503050406030204" pitchFamily="18" charset="0"/>
+                                    </a:rPr>
+                                  </m:ctrlPr>
+                                </m:dPr>
+                                <m:e>
+                                  <m:sSub>
+                                    <m:sSubPr>
+                                      <m:ctrlPr>
+                                        <a:rPr lang="en-US" altLang="zh-TW" sz="2000" i="1" dirty="0">
+                                          <a:latin typeface="Cambria Math" panose="02040503050406030204" pitchFamily="18" charset="0"/>
+                                          <a:ea typeface="Cambria Math" panose="02040503050406030204" pitchFamily="18" charset="0"/>
+                                        </a:rPr>
+                                      </m:ctrlPr>
+                                    </m:sSubPr>
+                                    <m:e>
+                                      <m:r>
+                                        <a:rPr lang="en-US" altLang="zh-TW" sz="2000" b="1" i="1" dirty="0">
+                                          <a:latin typeface="Cambria Math" panose="02040503050406030204" pitchFamily="18" charset="0"/>
+                                          <a:ea typeface="Cambria Math" panose="02040503050406030204" pitchFamily="18" charset="0"/>
+                                        </a:rPr>
+                                        <m:t>𝑹</m:t>
+                                      </m:r>
+                                    </m:e>
+                                    <m:sub>
+                                      <m:r>
+                                        <a:rPr lang="en-US" altLang="zh-TW" sz="2000" i="1" dirty="0">
+                                          <a:latin typeface="Cambria Math" panose="02040503050406030204" pitchFamily="18" charset="0"/>
+                                          <a:ea typeface="Cambria Math" panose="02040503050406030204" pitchFamily="18" charset="0"/>
+                                        </a:rPr>
+                                        <m:t>𝑐</m:t>
+                                      </m:r>
+                                    </m:sub>
+                                  </m:sSub>
+                                  <m:r>
+                                    <a:rPr lang="en-US" altLang="zh-TW" sz="2000" i="1" dirty="0">
+                                      <a:latin typeface="Cambria Math" panose="02040503050406030204" pitchFamily="18" charset="0"/>
+                                      <a:ea typeface="Cambria Math" panose="02040503050406030204" pitchFamily="18" charset="0"/>
+                                    </a:rPr>
+                                    <m:t>, </m:t>
+                                  </m:r>
+                                  <m:r>
+                                    <a:rPr lang="en-US" altLang="zh-TW" sz="2000" b="1" i="1" dirty="0">
+                                      <a:latin typeface="Cambria Math" panose="02040503050406030204" pitchFamily="18" charset="0"/>
+                                      <a:ea typeface="Cambria Math" panose="02040503050406030204" pitchFamily="18" charset="0"/>
+                                    </a:rPr>
+                                    <m:t>𝒓</m:t>
+                                  </m:r>
+                                  <m:r>
+                                    <a:rPr lang="en-US" altLang="zh-TW" sz="2000" i="1" dirty="0">
+                                      <a:latin typeface="Cambria Math" panose="02040503050406030204" pitchFamily="18" charset="0"/>
+                                      <a:ea typeface="Cambria Math" panose="02040503050406030204" pitchFamily="18" charset="0"/>
+                                    </a:rPr>
+                                    <m:t>=</m:t>
+                                  </m:r>
+                                  <m:r>
+                                    <a:rPr lang="en-US" altLang="zh-TW" sz="2000" b="1" i="1" dirty="0">
+                                      <a:latin typeface="Cambria Math" panose="02040503050406030204" pitchFamily="18" charset="0"/>
+                                      <a:ea typeface="Cambria Math" panose="02040503050406030204" pitchFamily="18" charset="0"/>
+                                    </a:rPr>
+                                    <m:t>𝟎</m:t>
+                                  </m:r>
+                                </m:e>
+                              </m:d>
+                            </m:e>
+                          </m:d>
+                        </m:e>
+                        <m:sup>
+                          <m:r>
+                            <a:rPr lang="en-US" altLang="zh-TW" sz="2000" i="1" dirty="0">
+                              <a:latin typeface="Cambria Math" panose="02040503050406030204" pitchFamily="18" charset="0"/>
+                              <a:ea typeface="Cambria Math" panose="02040503050406030204" pitchFamily="18" charset="0"/>
+                            </a:rPr>
+                            <m:t>2</m:t>
+                          </m:r>
+                        </m:sup>
+                      </m:sSup>
+                    </m:oMath>
+                  </m:oMathPara>
+                </a14:m>
+                <a:endParaRPr lang="zh-TW" altLang="en-US" sz="1600" dirty="0"/>
+              </a:p>
+            </p:txBody>
+          </p:sp>
+        </mc:Choice>
+        <mc:Fallback>
+          <p:sp>
+            <p:nvSpPr>
+              <p:cNvPr id="92" name="矩形 91">
+                <a:extLst>
+                  <a:ext uri="{FF2B5EF4-FFF2-40B4-BE49-F238E27FC236}">
+                    <a16:creationId xmlns:a16="http://schemas.microsoft.com/office/drawing/2014/main" id="{4B24170F-E452-469C-AC01-50B8FC43038F}"/>
+                  </a:ext>
+                </a:extLst>
+              </p:cNvPr>
+              <p:cNvSpPr>
+                <a:spLocks noRot="1" noChangeAspect="1" noMove="1" noResize="1" noEditPoints="1" noAdjustHandles="1" noChangeArrowheads="1" noChangeShapeType="1" noTextEdit="1"/>
+              </p:cNvSpPr>
+              <p:nvPr/>
+            </p:nvSpPr>
+            <p:spPr>
+              <a:xfrm>
+                <a:off x="2611825" y="5920152"/>
+                <a:ext cx="2486552" cy="624273"/>
               </a:xfrm>
               <a:prstGeom prst="rect">
                 <a:avLst/>
@@ -11703,10 +11676,10 @@
         <mc:Choice xmlns:a14="http://schemas.microsoft.com/office/drawing/2010/main" Requires="a14">
           <p:sp>
             <p:nvSpPr>
-              <p:cNvPr id="64" name="矩形 63">
+              <p:cNvPr id="93" name="矩形 92">
                 <a:extLst>
                   <a:ext uri="{FF2B5EF4-FFF2-40B4-BE49-F238E27FC236}">
-                    <a16:creationId xmlns:a16="http://schemas.microsoft.com/office/drawing/2014/main" id="{86DCE3E2-7B4F-4618-939E-F776EED7617B}"/>
+                    <a16:creationId xmlns:a16="http://schemas.microsoft.com/office/drawing/2014/main" id="{AF54FC83-6709-4506-BA01-6650CD887270}"/>
                   </a:ext>
                 </a:extLst>
               </p:cNvPr>
@@ -11715,15 +11688,15 @@
             </p:nvSpPr>
             <p:spPr>
               <a:xfrm>
-                <a:off x="7899380" y="5831681"/>
-                <a:ext cx="1906932" cy="688778"/>
+                <a:off x="7590514" y="5920152"/>
+                <a:ext cx="2482440" cy="624273"/>
               </a:xfrm>
               <a:prstGeom prst="rect">
                 <a:avLst/>
               </a:prstGeom>
             </p:spPr>
             <p:txBody>
-              <a:bodyPr wrap="none">
+              <a:bodyPr wrap="square">
                 <a:spAutoFit/>
               </a:bodyPr>
               <a:lstStyle/>
@@ -11738,7 +11711,7 @@
                       <m:sSup>
                         <m:sSupPr>
                           <m:ctrlPr>
-                            <a:rPr lang="en-US" altLang="zh-TW" sz="1600" i="1" dirty="0" smtClean="0">
+                            <a:rPr lang="en-US" altLang="zh-TW" sz="2000" i="1" dirty="0" smtClean="0">
                               <a:latin typeface="Cambria Math" panose="02040503050406030204" pitchFamily="18" charset="0"/>
                               <a:ea typeface="Cambria Math" panose="02040503050406030204" pitchFamily="18" charset="0"/>
                             </a:rPr>
@@ -11750,162 +11723,125 @@
                               <m:begChr m:val="|"/>
                               <m:endChr m:val="|"/>
                               <m:ctrlPr>
-                                <a:rPr lang="en-US" altLang="zh-TW" sz="1600" i="1" dirty="0">
+                                <a:rPr lang="en-US" altLang="zh-TW" sz="2000" i="1" dirty="0">
                                   <a:latin typeface="Cambria Math" panose="02040503050406030204" pitchFamily="18" charset="0"/>
                                   <a:ea typeface="Cambria Math" panose="02040503050406030204" pitchFamily="18" charset="0"/>
                                 </a:rPr>
                               </m:ctrlPr>
                             </m:dPr>
                             <m:e>
-                              <m:nary>
-                                <m:naryPr>
-                                  <m:chr m:val="∑"/>
-                                  <m:limLoc m:val="subSup"/>
-                                  <m:supHide m:val="on"/>
+                              <m:sSubSup>
+                                <m:sSubSupPr>
                                   <m:ctrlPr>
-                                    <a:rPr lang="en-US" altLang="zh-TW" sz="1600" i="1" dirty="0" smtClean="0">
+                                    <a:rPr lang="en-US" altLang="zh-TW" sz="2000" i="1" dirty="0">
                                       <a:latin typeface="Cambria Math" panose="02040503050406030204" pitchFamily="18" charset="0"/>
                                       <a:ea typeface="Cambria Math" panose="02040503050406030204" pitchFamily="18" charset="0"/>
                                     </a:rPr>
                                   </m:ctrlPr>
-                                </m:naryPr>
+                                </m:sSubSupPr>
+                                <m:e>
+                                  <m:r>
+                                    <m:rPr>
+                                      <m:sty m:val="p"/>
+                                    </m:rPr>
+                                    <a:rPr lang="en-US" altLang="zh-TW" sz="2000" dirty="0">
+                                      <a:latin typeface="Cambria Math" panose="02040503050406030204" pitchFamily="18" charset="0"/>
+                                      <a:ea typeface="Cambria Math" panose="02040503050406030204" pitchFamily="18" charset="0"/>
+                                    </a:rPr>
+                                    <m:t>Φ</m:t>
+                                  </m:r>
+                                </m:e>
                                 <m:sub>
-                                  <m:r>
-                                    <a:rPr lang="en-US" altLang="zh-TW" sz="1600" b="1" i="1">
-                                      <a:latin typeface="Cambria Math" panose="02040503050406030204" pitchFamily="18" charset="0"/>
-                                    </a:rPr>
-                                    <m:t>𝑸</m:t>
-                                  </m:r>
-                                </m:sub>
-                                <m:sup/>
-                                <m:e>
-                                  <m:sSubSup>
-                                    <m:sSubSupPr>
+                                  <m:acc>
+                                    <m:accPr>
+                                      <m:chr m:val="̂"/>
                                       <m:ctrlPr>
-                                        <a:rPr lang="en-US" altLang="zh-TW" sz="1600" i="1">
+                                        <a:rPr lang="en-US" altLang="zh-TW" sz="2000" b="1" i="1">
                                           <a:latin typeface="Cambria Math" panose="02040503050406030204" pitchFamily="18" charset="0"/>
                                         </a:rPr>
                                       </m:ctrlPr>
-                                    </m:sSubSupPr>
+                                    </m:accPr>
                                     <m:e>
-                                      <m:acc>
-                                        <m:accPr>
-                                          <m:chr m:val="̃"/>
-                                          <m:ctrlPr>
-                                            <a:rPr lang="en-US" altLang="zh-TW" sz="1600" i="1">
-                                              <a:latin typeface="Cambria Math" panose="02040503050406030204" pitchFamily="18" charset="0"/>
-                                            </a:rPr>
-                                          </m:ctrlPr>
-                                        </m:accPr>
-                                        <m:e>
-                                          <m:r>
-                                            <a:rPr lang="en-US" altLang="zh-TW" sz="1600" i="1">
-                                              <a:latin typeface="Cambria Math" panose="02040503050406030204" pitchFamily="18" charset="0"/>
-                                            </a:rPr>
-                                            <m:t>𝑀</m:t>
-                                          </m:r>
-                                        </m:e>
-                                      </m:acc>
-                                    </m:e>
-                                    <m:sub>
                                       <m:r>
-                                        <a:rPr lang="en-US" altLang="zh-TW" sz="1600" i="1">
+                                        <a:rPr lang="zh-TW" altLang="en-US" sz="2000" b="1" i="1">
                                           <a:latin typeface="Cambria Math" panose="02040503050406030204" pitchFamily="18" charset="0"/>
                                         </a:rPr>
-                                        <m:t>𝑆</m:t>
+                                        <m:t>𝜺</m:t>
                                       </m:r>
+                                    </m:e>
+                                  </m:acc>
+                                  <m:r>
+                                    <a:rPr lang="en-US" altLang="zh-TW" sz="2000" i="1">
+                                      <a:latin typeface="Cambria Math" panose="02040503050406030204" pitchFamily="18" charset="0"/>
+                                    </a:rPr>
+                                    <m:t>,</m:t>
+                                  </m:r>
+                                  <m:r>
+                                    <a:rPr lang="en-US" altLang="zh-TW" sz="2000" b="0" i="1" smtClean="0">
+                                      <a:latin typeface="Cambria Math" panose="02040503050406030204" pitchFamily="18" charset="0"/>
+                                    </a:rPr>
+                                    <m:t>0</m:t>
+                                  </m:r>
+                                </m:sub>
+                                <m:sup>
+                                  <m:r>
+                                    <a:rPr lang="en-US" altLang="zh-TW" sz="2000" i="1" dirty="0">
+                                      <a:latin typeface="Cambria Math" panose="02040503050406030204" pitchFamily="18" charset="0"/>
+                                      <a:ea typeface="Cambria Math" panose="02040503050406030204" pitchFamily="18" charset="0"/>
+                                    </a:rPr>
+                                    <m:t>𝐾</m:t>
+                                  </m:r>
+                                  <m:r>
+                                    <a:rPr lang="en-US" altLang="zh-TW" sz="2000" i="1" dirty="0">
+                                      <a:latin typeface="Cambria Math" panose="02040503050406030204" pitchFamily="18" charset="0"/>
+                                      <a:ea typeface="Cambria Math" panose="02040503050406030204" pitchFamily="18" charset="0"/>
+                                    </a:rPr>
+                                    <m:t>/</m:t>
+                                  </m:r>
+                                  <m:sSup>
+                                    <m:sSupPr>
+                                      <m:ctrlPr>
+                                        <a:rPr lang="en-US" altLang="zh-TW" sz="2000" i="1" dirty="0">
+                                          <a:latin typeface="Cambria Math" panose="02040503050406030204" pitchFamily="18" charset="0"/>
+                                          <a:ea typeface="Cambria Math" panose="02040503050406030204" pitchFamily="18" charset="0"/>
+                                        </a:rPr>
+                                      </m:ctrlPr>
+                                    </m:sSupPr>
+                                    <m:e>
                                       <m:r>
-                                        <a:rPr lang="en-US" altLang="zh-TW" sz="1600" i="1">
+                                        <a:rPr lang="en-US" altLang="zh-TW" sz="2000" i="1" dirty="0">
                                           <a:latin typeface="Cambria Math" panose="02040503050406030204" pitchFamily="18" charset="0"/>
+                                          <a:ea typeface="Cambria Math" panose="02040503050406030204" pitchFamily="18" charset="0"/>
                                         </a:rPr>
-                                        <m:t>,</m:t>
+                                        <m:t>𝐾</m:t>
                                       </m:r>
+                                    </m:e>
+                                    <m:sup>
                                       <m:r>
-                                        <a:rPr lang="en-US" altLang="zh-TW" sz="1600" b="1" i="1">
+                                        <a:rPr lang="en-US" altLang="zh-TW" sz="2000" i="1" dirty="0">
                                           <a:latin typeface="Cambria Math" panose="02040503050406030204" pitchFamily="18" charset="0"/>
+                                          <a:ea typeface="Cambria Math" panose="02040503050406030204" pitchFamily="18" charset="0"/>
                                         </a:rPr>
-                                        <m:t>𝑸</m:t>
-                                      </m:r>
-                                    </m:sub>
-                                    <m:sup>
-                                      <m:acc>
-                                        <m:accPr>
-                                          <m:chr m:val="̂"/>
-                                          <m:ctrlPr>
-                                            <a:rPr lang="en-US" altLang="zh-TW" sz="1600" b="1" i="1">
-                                              <a:latin typeface="Cambria Math" panose="02040503050406030204" pitchFamily="18" charset="0"/>
-                                            </a:rPr>
-                                          </m:ctrlPr>
-                                        </m:accPr>
-                                        <m:e>
-                                          <m:r>
-                                            <a:rPr lang="zh-TW" altLang="en-US" sz="1600" b="1" i="1">
-                                              <a:latin typeface="Cambria Math" panose="02040503050406030204" pitchFamily="18" charset="0"/>
-                                            </a:rPr>
-                                            <m:t>𝜺</m:t>
-                                          </m:r>
-                                        </m:e>
-                                      </m:acc>
-                                      <m:r>
-                                        <a:rPr lang="en-US" altLang="zh-TW" sz="1600" i="1">
-                                          <a:latin typeface="Cambria Math" panose="02040503050406030204" pitchFamily="18" charset="0"/>
-                                        </a:rPr>
-                                        <m:t>,</m:t>
-                                      </m:r>
-                                      <m:r>
-                                        <a:rPr lang="en-US" altLang="zh-TW" sz="1600" b="0" i="1" smtClean="0">
-                                          <a:latin typeface="Cambria Math" panose="02040503050406030204" pitchFamily="18" charset="0"/>
-                                        </a:rPr>
-                                        <m:t>±1</m:t>
+                                        <m:t>′</m:t>
                                       </m:r>
                                     </m:sup>
-                                  </m:sSubSup>
-                                </m:e>
-                              </m:nary>
-                              <m:sSup>
-                                <m:sSupPr>
+                                  </m:sSup>
+                                </m:sup>
+                              </m:sSubSup>
+                              <m:d>
+                                <m:dPr>
                                   <m:ctrlPr>
-                                    <a:rPr lang="en-US" altLang="zh-TW" sz="1600" b="0" i="1" dirty="0" smtClean="0">
+                                    <a:rPr lang="en-US" altLang="zh-TW" sz="2000" i="1" dirty="0">
                                       <a:latin typeface="Cambria Math" panose="02040503050406030204" pitchFamily="18" charset="0"/>
                                       <a:ea typeface="Cambria Math" panose="02040503050406030204" pitchFamily="18" charset="0"/>
                                     </a:rPr>
                                   </m:ctrlPr>
-                                </m:sSupPr>
+                                </m:dPr>
                                 <m:e>
-                                  <m:r>
-                                    <a:rPr lang="en-US" altLang="zh-TW" sz="1600" b="0" i="1" dirty="0" smtClean="0">
-                                      <a:latin typeface="Cambria Math" panose="02040503050406030204" pitchFamily="18" charset="0"/>
-                                      <a:ea typeface="Cambria Math" panose="02040503050406030204" pitchFamily="18" charset="0"/>
-                                    </a:rPr>
-                                    <m:t>𝑒</m:t>
-                                  </m:r>
-                                </m:e>
-                                <m:sup>
-                                  <m:r>
-                                    <a:rPr lang="en-US" altLang="zh-TW" sz="1600" b="0" i="1" dirty="0" smtClean="0">
-                                      <a:latin typeface="Cambria Math" panose="02040503050406030204" pitchFamily="18" charset="0"/>
-                                      <a:ea typeface="Cambria Math" panose="02040503050406030204" pitchFamily="18" charset="0"/>
-                                    </a:rPr>
-                                    <m:t>𝑖</m:t>
-                                  </m:r>
-                                  <m:r>
-                                    <a:rPr lang="en-US" altLang="zh-TW" sz="1600" b="1" i="1" dirty="0" smtClean="0">
-                                      <a:latin typeface="Cambria Math" panose="02040503050406030204" pitchFamily="18" charset="0"/>
-                                      <a:ea typeface="Cambria Math" panose="02040503050406030204" pitchFamily="18" charset="0"/>
-                                    </a:rPr>
-                                    <m:t>𝑸</m:t>
-                                  </m:r>
-                                  <m:r>
-                                    <a:rPr lang="en-US" altLang="zh-TW" sz="1600" b="0" i="1" dirty="0" smtClean="0">
-                                      <a:latin typeface="Cambria Math" panose="02040503050406030204" pitchFamily="18" charset="0"/>
-                                      <a:ea typeface="Cambria Math" panose="02040503050406030204" pitchFamily="18" charset="0"/>
-                                    </a:rPr>
-                                    <m:t>⋅</m:t>
-                                  </m:r>
                                   <m:sSub>
                                     <m:sSubPr>
                                       <m:ctrlPr>
-                                        <a:rPr lang="en-US" altLang="zh-TW" sz="1600" b="0" i="1" dirty="0" smtClean="0">
+                                        <a:rPr lang="en-US" altLang="zh-TW" sz="2000" i="1" dirty="0">
                                           <a:latin typeface="Cambria Math" panose="02040503050406030204" pitchFamily="18" charset="0"/>
                                           <a:ea typeface="Cambria Math" panose="02040503050406030204" pitchFamily="18" charset="0"/>
                                         </a:rPr>
@@ -11913,7 +11849,7 @@
                                     </m:sSubPr>
                                     <m:e>
                                       <m:r>
-                                        <a:rPr lang="en-US" altLang="zh-TW" sz="1600" b="1" i="1" dirty="0" smtClean="0">
+                                        <a:rPr lang="en-US" altLang="zh-TW" sz="2000" b="1" i="1" dirty="0">
                                           <a:latin typeface="Cambria Math" panose="02040503050406030204" pitchFamily="18" charset="0"/>
                                           <a:ea typeface="Cambria Math" panose="02040503050406030204" pitchFamily="18" charset="0"/>
                                         </a:rPr>
@@ -11922,7 +11858,7 @@
                                     </m:e>
                                     <m:sub>
                                       <m:r>
-                                        <a:rPr lang="en-US" altLang="zh-TW" sz="1600" b="0" i="1" dirty="0" smtClean="0">
+                                        <a:rPr lang="en-US" altLang="zh-TW" sz="2000" i="1" dirty="0">
                                           <a:latin typeface="Cambria Math" panose="02040503050406030204" pitchFamily="18" charset="0"/>
                                           <a:ea typeface="Cambria Math" panose="02040503050406030204" pitchFamily="18" charset="0"/>
                                         </a:rPr>
@@ -11930,14 +11866,42 @@
                                       </m:r>
                                     </m:sub>
                                   </m:sSub>
-                                </m:sup>
-                              </m:sSup>
+                                  <m:r>
+                                    <a:rPr lang="en-US" altLang="zh-TW" sz="2000" i="1" dirty="0">
+                                      <a:latin typeface="Cambria Math" panose="02040503050406030204" pitchFamily="18" charset="0"/>
+                                      <a:ea typeface="Cambria Math" panose="02040503050406030204" pitchFamily="18" charset="0"/>
+                                    </a:rPr>
+                                    <m:t>, </m:t>
+                                  </m:r>
+                                  <m:r>
+                                    <a:rPr lang="en-US" altLang="zh-TW" sz="2000" b="1" i="1" dirty="0">
+                                      <a:latin typeface="Cambria Math" panose="02040503050406030204" pitchFamily="18" charset="0"/>
+                                      <a:ea typeface="Cambria Math" panose="02040503050406030204" pitchFamily="18" charset="0"/>
+                                    </a:rPr>
+                                    <m:t>𝒓</m:t>
+                                  </m:r>
+                                  <m:r>
+                                    <a:rPr lang="en-US" altLang="zh-TW" sz="2000" i="1" dirty="0">
+                                      <a:latin typeface="Cambria Math" panose="02040503050406030204" pitchFamily="18" charset="0"/>
+                                      <a:ea typeface="Cambria Math" panose="02040503050406030204" pitchFamily="18" charset="0"/>
+                                    </a:rPr>
+                                    <m:t>=</m:t>
+                                  </m:r>
+                                  <m:r>
+                                    <a:rPr lang="en-US" altLang="zh-TW" sz="2000" b="1" i="1" dirty="0">
+                                      <a:latin typeface="Cambria Math" panose="02040503050406030204" pitchFamily="18" charset="0"/>
+                                      <a:ea typeface="Cambria Math" panose="02040503050406030204" pitchFamily="18" charset="0"/>
+                                    </a:rPr>
+                                    <m:t>𝟎</m:t>
+                                  </m:r>
+                                </m:e>
+                              </m:d>
                             </m:e>
                           </m:d>
                         </m:e>
                         <m:sup>
                           <m:r>
-                            <a:rPr lang="en-US" altLang="zh-TW" sz="1600" i="1" dirty="0">
+                            <a:rPr lang="en-US" altLang="zh-TW" sz="2000" i="1" dirty="0">
                               <a:latin typeface="Cambria Math" panose="02040503050406030204" pitchFamily="18" charset="0"/>
                               <a:ea typeface="Cambria Math" panose="02040503050406030204" pitchFamily="18" charset="0"/>
                             </a:rPr>
@@ -11956,10 +11920,10 @@
         <mc:Fallback>
           <p:sp>
             <p:nvSpPr>
-              <p:cNvPr id="64" name="矩形 63">
+              <p:cNvPr id="93" name="矩形 92">
                 <a:extLst>
                   <a:ext uri="{FF2B5EF4-FFF2-40B4-BE49-F238E27FC236}">
-                    <a16:creationId xmlns:a16="http://schemas.microsoft.com/office/drawing/2014/main" id="{86DCE3E2-7B4F-4618-939E-F776EED7617B}"/>
+                    <a16:creationId xmlns:a16="http://schemas.microsoft.com/office/drawing/2014/main" id="{AF54FC83-6709-4506-BA01-6650CD887270}"/>
                   </a:ext>
                 </a:extLst>
               </p:cNvPr>
@@ -11970,8 +11934,8 @@
             </p:nvSpPr>
             <p:spPr>
               <a:xfrm>
-                <a:off x="7899380" y="5831681"/>
-                <a:ext cx="1906932" cy="688778"/>
+                <a:off x="7590514" y="5920152"/>
+                <a:ext cx="2482440" cy="624273"/>
               </a:xfrm>
               <a:prstGeom prst="rect">
                 <a:avLst/>

--- a/Final/Figures/wavepacket_l=1.pptx
+++ b/Final/Figures/wavepacket_l=1.pptx
@@ -254,7 +254,7 @@
           <a:p>
             <a:fld id="{B4A272A4-1B6B-4C0A-B74D-70EF2D8C7D55}" type="datetimeFigureOut">
               <a:rPr lang="zh-TW" altLang="en-US" smtClean="0"/>
-              <a:t>2026/7/1</a:t>
+              <a:t>2026/7/16</a:t>
             </a:fld>
             <a:endParaRPr lang="zh-TW" altLang="en-US"/>
           </a:p>
@@ -424,7 +424,7 @@
           <a:p>
             <a:fld id="{B4A272A4-1B6B-4C0A-B74D-70EF2D8C7D55}" type="datetimeFigureOut">
               <a:rPr lang="zh-TW" altLang="en-US" smtClean="0"/>
-              <a:t>2026/7/1</a:t>
+              <a:t>2026/7/16</a:t>
             </a:fld>
             <a:endParaRPr lang="zh-TW" altLang="en-US"/>
           </a:p>
@@ -604,7 +604,7 @@
           <a:p>
             <a:fld id="{B4A272A4-1B6B-4C0A-B74D-70EF2D8C7D55}" type="datetimeFigureOut">
               <a:rPr lang="zh-TW" altLang="en-US" smtClean="0"/>
-              <a:t>2026/7/1</a:t>
+              <a:t>2026/7/16</a:t>
             </a:fld>
             <a:endParaRPr lang="zh-TW" altLang="en-US"/>
           </a:p>
@@ -774,7 +774,7 @@
           <a:p>
             <a:fld id="{B4A272A4-1B6B-4C0A-B74D-70EF2D8C7D55}" type="datetimeFigureOut">
               <a:rPr lang="zh-TW" altLang="en-US" smtClean="0"/>
-              <a:t>2026/7/1</a:t>
+              <a:t>2026/7/16</a:t>
             </a:fld>
             <a:endParaRPr lang="zh-TW" altLang="en-US"/>
           </a:p>
@@ -1018,7 +1018,7 @@
           <a:p>
             <a:fld id="{B4A272A4-1B6B-4C0A-B74D-70EF2D8C7D55}" type="datetimeFigureOut">
               <a:rPr lang="zh-TW" altLang="en-US" smtClean="0"/>
-              <a:t>2026/7/1</a:t>
+              <a:t>2026/7/16</a:t>
             </a:fld>
             <a:endParaRPr lang="zh-TW" altLang="en-US"/>
           </a:p>
@@ -1250,7 +1250,7 @@
           <a:p>
             <a:fld id="{B4A272A4-1B6B-4C0A-B74D-70EF2D8C7D55}" type="datetimeFigureOut">
               <a:rPr lang="zh-TW" altLang="en-US" smtClean="0"/>
-              <a:t>2026/7/1</a:t>
+              <a:t>2026/7/16</a:t>
             </a:fld>
             <a:endParaRPr lang="zh-TW" altLang="en-US"/>
           </a:p>
@@ -1617,7 +1617,7 @@
           <a:p>
             <a:fld id="{B4A272A4-1B6B-4C0A-B74D-70EF2D8C7D55}" type="datetimeFigureOut">
               <a:rPr lang="zh-TW" altLang="en-US" smtClean="0"/>
-              <a:t>2026/7/1</a:t>
+              <a:t>2026/7/16</a:t>
             </a:fld>
             <a:endParaRPr lang="zh-TW" altLang="en-US"/>
           </a:p>
@@ -1735,7 +1735,7 @@
           <a:p>
             <a:fld id="{B4A272A4-1B6B-4C0A-B74D-70EF2D8C7D55}" type="datetimeFigureOut">
               <a:rPr lang="zh-TW" altLang="en-US" smtClean="0"/>
-              <a:t>2026/7/1</a:t>
+              <a:t>2026/7/16</a:t>
             </a:fld>
             <a:endParaRPr lang="zh-TW" altLang="en-US"/>
           </a:p>
@@ -1830,7 +1830,7 @@
           <a:p>
             <a:fld id="{B4A272A4-1B6B-4C0A-B74D-70EF2D8C7D55}" type="datetimeFigureOut">
               <a:rPr lang="zh-TW" altLang="en-US" smtClean="0"/>
-              <a:t>2026/7/1</a:t>
+              <a:t>2026/7/16</a:t>
             </a:fld>
             <a:endParaRPr lang="zh-TW" altLang="en-US"/>
           </a:p>
@@ -2107,7 +2107,7 @@
           <a:p>
             <a:fld id="{B4A272A4-1B6B-4C0A-B74D-70EF2D8C7D55}" type="datetimeFigureOut">
               <a:rPr lang="zh-TW" altLang="en-US" smtClean="0"/>
-              <a:t>2026/7/1</a:t>
+              <a:t>2026/7/16</a:t>
             </a:fld>
             <a:endParaRPr lang="zh-TW" altLang="en-US"/>
           </a:p>
@@ -2364,7 +2364,7 @@
           <a:p>
             <a:fld id="{B4A272A4-1B6B-4C0A-B74D-70EF2D8C7D55}" type="datetimeFigureOut">
               <a:rPr lang="zh-TW" altLang="en-US" smtClean="0"/>
-              <a:t>2026/7/1</a:t>
+              <a:t>2026/7/16</a:t>
             </a:fld>
             <a:endParaRPr lang="zh-TW" altLang="en-US"/>
           </a:p>
@@ -2577,7 +2577,7 @@
           <a:p>
             <a:fld id="{B4A272A4-1B6B-4C0A-B74D-70EF2D8C7D55}" type="datetimeFigureOut">
               <a:rPr lang="zh-TW" altLang="en-US" smtClean="0"/>
-              <a:t>2026/7/1</a:t>
+              <a:t>2026/7/16</a:t>
             </a:fld>
             <a:endParaRPr lang="zh-TW" altLang="en-US"/>
           </a:p>
@@ -9986,8 +9986,8 @@
             </p:nvSpPr>
             <p:spPr>
               <a:xfrm>
-                <a:off x="1335008" y="1315026"/>
-                <a:ext cx="1105559" cy="555793"/>
+                <a:off x="1299165" y="1315026"/>
+                <a:ext cx="1177245" cy="555793"/>
               </a:xfrm>
               <a:prstGeom prst="rect">
                 <a:avLst/>
@@ -10083,7 +10083,7 @@
                                     <a:rPr lang="en-US" altLang="zh-TW" sz="2000" b="0" i="1" smtClean="0">
                                       <a:latin typeface="Cambria Math" panose="02040503050406030204" pitchFamily="18" charset="0"/>
                                     </a:rPr>
-                                    <m:t>0</m:t>
+                                    <m:t>±1</m:t>
                                   </m:r>
                                 </m:sub>
                                 <m:sup>
@@ -10150,8 +10150,8 @@
             </p:nvSpPr>
             <p:spPr>
               <a:xfrm>
-                <a:off x="1335008" y="1315026"/>
-                <a:ext cx="1105559" cy="555793"/>
+                <a:off x="1299165" y="1315026"/>
+                <a:ext cx="1177245" cy="555793"/>
               </a:xfrm>
               <a:prstGeom prst="rect">
                 <a:avLst/>
@@ -10286,7 +10286,7 @@
                                     <a:rPr lang="en-US" altLang="zh-TW" sz="2000" b="0" i="1" smtClean="0">
                                       <a:latin typeface="Cambria Math" panose="02040503050406030204" pitchFamily="18" charset="0"/>
                                     </a:rPr>
-                                    <m:t>0</m:t>
+                                    <m:t>±1</m:t>
                                   </m:r>
                                 </m:sub>
                                 <m:sup>
@@ -10484,8 +10484,8 @@
             </p:nvSpPr>
             <p:spPr>
               <a:xfrm>
-                <a:off x="6282612" y="1315026"/>
-                <a:ext cx="1105559" cy="555793"/>
+                <a:off x="6246769" y="1315026"/>
+                <a:ext cx="1177245" cy="555793"/>
               </a:xfrm>
               <a:prstGeom prst="rect">
                 <a:avLst/>
@@ -10581,7 +10581,7 @@
                                     <a:rPr lang="en-US" altLang="zh-TW" sz="2000" b="0" i="1" smtClean="0">
                                       <a:latin typeface="Cambria Math" panose="02040503050406030204" pitchFamily="18" charset="0"/>
                                     </a:rPr>
-                                    <m:t>0</m:t>
+                                    <m:t>±1</m:t>
                                   </m:r>
                                 </m:sub>
                                 <m:sup>
@@ -10648,8 +10648,8 @@
             </p:nvSpPr>
             <p:spPr>
               <a:xfrm>
-                <a:off x="6282612" y="1315026"/>
-                <a:ext cx="1105559" cy="555793"/>
+                <a:off x="6246769" y="1315026"/>
+                <a:ext cx="1177245" cy="555793"/>
               </a:xfrm>
               <a:prstGeom prst="rect">
                 <a:avLst/>
@@ -10784,7 +10784,7 @@
                                     <a:rPr lang="en-US" altLang="zh-TW" sz="2000" b="0" i="1" smtClean="0">
                                       <a:latin typeface="Cambria Math" panose="02040503050406030204" pitchFamily="18" charset="0"/>
                                     </a:rPr>
-                                    <m:t>0</m:t>
+                                    <m:t>±1</m:t>
                                   </m:r>
                                 </m:sub>
                                 <m:sup>
@@ -10982,8 +10982,8 @@
             </p:nvSpPr>
             <p:spPr>
               <a:xfrm>
-                <a:off x="1335008" y="5954392"/>
-                <a:ext cx="1105559" cy="555793"/>
+                <a:off x="1299165" y="5954392"/>
+                <a:ext cx="1177245" cy="555793"/>
               </a:xfrm>
               <a:prstGeom prst="rect">
                 <a:avLst/>
@@ -11079,7 +11079,7 @@
                                     <a:rPr lang="en-US" altLang="zh-TW" sz="2000" b="0" i="1" smtClean="0">
                                       <a:latin typeface="Cambria Math" panose="02040503050406030204" pitchFamily="18" charset="0"/>
                                     </a:rPr>
-                                    <m:t>0</m:t>
+                                    <m:t>±1</m:t>
                                   </m:r>
                                 </m:sub>
                                 <m:sup>
@@ -11146,8 +11146,8 @@
             </p:nvSpPr>
             <p:spPr>
               <a:xfrm>
-                <a:off x="1335008" y="5954392"/>
-                <a:ext cx="1105559" cy="555793"/>
+                <a:off x="1299165" y="5954392"/>
+                <a:ext cx="1177245" cy="555793"/>
               </a:xfrm>
               <a:prstGeom prst="rect">
                 <a:avLst/>
@@ -11190,8 +11190,8 @@
             </p:nvSpPr>
             <p:spPr>
               <a:xfrm>
-                <a:off x="6282612" y="5954392"/>
-                <a:ext cx="1105559" cy="555793"/>
+                <a:off x="6246769" y="5954392"/>
+                <a:ext cx="1177245" cy="555793"/>
               </a:xfrm>
               <a:prstGeom prst="rect">
                 <a:avLst/>
@@ -11287,7 +11287,7 @@
                                     <a:rPr lang="en-US" altLang="zh-TW" sz="2000" b="0" i="1" smtClean="0">
                                       <a:latin typeface="Cambria Math" panose="02040503050406030204" pitchFamily="18" charset="0"/>
                                     </a:rPr>
-                                    <m:t>0</m:t>
+                                    <m:t>±1</m:t>
                                   </m:r>
                                 </m:sub>
                                 <m:sup>
@@ -11354,8 +11354,8 @@
             </p:nvSpPr>
             <p:spPr>
               <a:xfrm>
-                <a:off x="6282612" y="5954392"/>
-                <a:ext cx="1105559" cy="555793"/>
+                <a:off x="6246769" y="5954392"/>
+                <a:ext cx="1177245" cy="555793"/>
               </a:xfrm>
               <a:prstGeom prst="rect">
                 <a:avLst/>
@@ -11490,7 +11490,7 @@
                                     <a:rPr lang="en-US" altLang="zh-TW" sz="2000" b="0" i="1" smtClean="0">
                                       <a:latin typeface="Cambria Math" panose="02040503050406030204" pitchFamily="18" charset="0"/>
                                     </a:rPr>
-                                    <m:t>0</m:t>
+                                    <m:t>±1</m:t>
                                   </m:r>
                                 </m:sub>
                                 <m:sup>
@@ -11780,7 +11780,7 @@
                                     <a:rPr lang="en-US" altLang="zh-TW" sz="2000" b="0" i="1" smtClean="0">
                                       <a:latin typeface="Cambria Math" panose="02040503050406030204" pitchFamily="18" charset="0"/>
                                     </a:rPr>
-                                    <m:t>0</m:t>
+                                    <m:t>±1</m:t>
                                   </m:r>
                                 </m:sub>
                                 <m:sup>
